--- a/ppt-gtsebrae/G2-Lilian-Botelho.pptx
+++ b/ppt-gtsebrae/G2-Lilian-Botelho.pptx
@@ -1,49 +1,49 @@
 
 <file path=ppt/presentation.xml><?xml version="1.0" encoding="utf-8"?>
-<p:presentation xmlns:a="http://schemas.openxmlformats.org/drawingml/2006/main" xmlns:r="http://schemas.openxmlformats.org/officeDocument/2006/relationships" xmlns:mc="http://schemas.openxmlformats.org/markup-compatibility/2006" xmlns:mv="urn:schemas-microsoft-com:mac:vml" xmlns:p="http://schemas.openxmlformats.org/presentationml/2006/main" xmlns:c="http://schemas.openxmlformats.org/drawingml/2006/chart" xmlns:dgm="http://schemas.openxmlformats.org/drawingml/2006/diagram" xmlns:o="urn:schemas-microsoft-com:office:office" xmlns:v="urn:schemas-microsoft-com:vml" xmlns:pvml="urn:schemas-microsoft-com:office:powerpoint" xmlns:com="http://schemas.openxmlformats.org/drawingml/2006/compatibility" xmlns:p14="http://schemas.microsoft.com/office/powerpoint/2010/main" xmlns:p15="http://schemas.microsoft.com/office/powerpoint/2012/main" xmlns:ahyp="http://schemas.microsoft.com/office/drawing/2018/hyperlinkcolor" autoCompressPictures="0" embedTrueTypeFonts="1" strictFirstAndLastChars="0" saveSubsetFonts="1">
+<p:presentation xmlns:a="http://schemas.openxmlformats.org/drawingml/2006/main" xmlns:r="http://schemas.openxmlformats.org/officeDocument/2006/relationships" xmlns:p="http://schemas.openxmlformats.org/presentationml/2006/main" strictFirstAndLastChars="0" embedTrueTypeFonts="1" saveSubsetFonts="1" autoCompressPictures="0">
   <p:sldMasterIdLst>
-    <p:sldMasterId id="2147483659" r:id="rId4"/>
+    <p:sldMasterId id="2147483659" r:id="rId1"/>
   </p:sldMasterIdLst>
   <p:notesMasterIdLst>
-    <p:notesMasterId r:id="rId5"/>
+    <p:notesMasterId r:id="rId24"/>
   </p:notesMasterIdLst>
   <p:sldIdLst>
-    <p:sldId id="256" r:id="rId6"/>
-    <p:sldId id="257" r:id="rId7"/>
-    <p:sldId id="258" r:id="rId8"/>
-    <p:sldId id="259" r:id="rId9"/>
-    <p:sldId id="260" r:id="rId10"/>
-    <p:sldId id="261" r:id="rId11"/>
-    <p:sldId id="262" r:id="rId12"/>
-    <p:sldId id="263" r:id="rId13"/>
-    <p:sldId id="264" r:id="rId14"/>
-    <p:sldId id="265" r:id="rId15"/>
-    <p:sldId id="266" r:id="rId16"/>
-    <p:sldId id="267" r:id="rId17"/>
-    <p:sldId id="268" r:id="rId18"/>
-    <p:sldId id="269" r:id="rId19"/>
-    <p:sldId id="270" r:id="rId20"/>
-    <p:sldId id="271" r:id="rId21"/>
-    <p:sldId id="272" r:id="rId22"/>
-    <p:sldId id="273" r:id="rId23"/>
-    <p:sldId id="274" r:id="rId24"/>
-    <p:sldId id="275" r:id="rId25"/>
-    <p:sldId id="276" r:id="rId26"/>
-    <p:sldId id="277" r:id="rId27"/>
+    <p:sldId id="256" r:id="rId2"/>
+    <p:sldId id="257" r:id="rId3"/>
+    <p:sldId id="258" r:id="rId4"/>
+    <p:sldId id="259" r:id="rId5"/>
+    <p:sldId id="260" r:id="rId6"/>
+    <p:sldId id="261" r:id="rId7"/>
+    <p:sldId id="262" r:id="rId8"/>
+    <p:sldId id="263" r:id="rId9"/>
+    <p:sldId id="264" r:id="rId10"/>
+    <p:sldId id="265" r:id="rId11"/>
+    <p:sldId id="266" r:id="rId12"/>
+    <p:sldId id="267" r:id="rId13"/>
+    <p:sldId id="268" r:id="rId14"/>
+    <p:sldId id="269" r:id="rId15"/>
+    <p:sldId id="270" r:id="rId16"/>
+    <p:sldId id="271" r:id="rId17"/>
+    <p:sldId id="272" r:id="rId18"/>
+    <p:sldId id="273" r:id="rId19"/>
+    <p:sldId id="274" r:id="rId20"/>
+    <p:sldId id="275" r:id="rId21"/>
+    <p:sldId id="276" r:id="rId22"/>
+    <p:sldId id="277" r:id="rId23"/>
   </p:sldIdLst>
-  <p:sldSz cy="5143500" cx="9144000"/>
+  <p:sldSz cx="9144000" cy="5143500" type="screen16x9"/>
   <p:notesSz cx="6858000" cy="9144000"/>
   <p:embeddedFontLst>
     <p:embeddedFont>
-      <p:font typeface="Figtree"/>
-      <p:regular r:id="rId28"/>
-      <p:bold r:id="rId29"/>
-      <p:italic r:id="rId30"/>
-      <p:boldItalic r:id="rId31"/>
+      <p:font typeface="Figtree" panose="020B0604020202020204" charset="0"/>
+      <p:regular r:id="rId25"/>
+      <p:bold r:id="rId26"/>
+      <p:italic r:id="rId27"/>
+      <p:boldItalic r:id="rId28"/>
     </p:embeddedFont>
   </p:embeddedFontLst>
   <p:defaultTextStyle>
-    <a:defPPr lvl="0" marR="0" rtl="0" algn="l">
+    <a:defPPr marR="0" lvl="0" algn="l" rtl="0">
       <a:lnSpc>
         <a:spcPct val="100000"/>
       </a:lnSpc>
@@ -54,7 +54,7 @@
         <a:spcPts val="0"/>
       </a:spcAft>
     </a:defPPr>
-    <a:lvl1pPr lvl="0" marR="0" rtl="0" algn="l">
+    <a:lvl1pPr marR="0" lvl="0" algn="l" rtl="0">
       <a:lnSpc>
         <a:spcPct val="100000"/>
       </a:lnSpc>
@@ -68,7 +68,7 @@
         <a:srgbClr val="000000"/>
       </a:buClr>
       <a:buFont typeface="Arial"/>
-      <a:defRPr b="0" i="0" spc="0" sz="1400" u="none" cap="none" strike="noStrike">
+      <a:defRPr sz="1400" b="0" i="0" u="none" strike="noStrike" cap="none" spc="0">
         <a:solidFill>
           <a:srgbClr val="000000"/>
         </a:solidFill>
@@ -78,7 +78,7 @@
         <a:sym typeface="Arial"/>
       </a:defRPr>
     </a:lvl1pPr>
-    <a:lvl2pPr lvl="1" marR="0" rtl="0" algn="l">
+    <a:lvl2pPr marR="0" lvl="1" algn="l" rtl="0">
       <a:lnSpc>
         <a:spcPct val="100000"/>
       </a:lnSpc>
@@ -92,7 +92,7 @@
         <a:srgbClr val="000000"/>
       </a:buClr>
       <a:buFont typeface="Arial"/>
-      <a:defRPr b="0" i="0" spc="0" sz="1400" u="none" cap="none" strike="noStrike">
+      <a:defRPr sz="1400" b="0" i="0" u="none" strike="noStrike" cap="none" spc="0">
         <a:solidFill>
           <a:srgbClr val="000000"/>
         </a:solidFill>
@@ -102,7 +102,7 @@
         <a:sym typeface="Arial"/>
       </a:defRPr>
     </a:lvl2pPr>
-    <a:lvl3pPr lvl="2" marR="0" rtl="0" algn="l">
+    <a:lvl3pPr marR="0" lvl="2" algn="l" rtl="0">
       <a:lnSpc>
         <a:spcPct val="100000"/>
       </a:lnSpc>
@@ -116,7 +116,7 @@
         <a:srgbClr val="000000"/>
       </a:buClr>
       <a:buFont typeface="Arial"/>
-      <a:defRPr b="0" i="0" spc="0" sz="1400" u="none" cap="none" strike="noStrike">
+      <a:defRPr sz="1400" b="0" i="0" u="none" strike="noStrike" cap="none" spc="0">
         <a:solidFill>
           <a:srgbClr val="000000"/>
         </a:solidFill>
@@ -126,7 +126,7 @@
         <a:sym typeface="Arial"/>
       </a:defRPr>
     </a:lvl3pPr>
-    <a:lvl4pPr lvl="3" marR="0" rtl="0" algn="l">
+    <a:lvl4pPr marR="0" lvl="3" algn="l" rtl="0">
       <a:lnSpc>
         <a:spcPct val="100000"/>
       </a:lnSpc>
@@ -140,7 +140,7 @@
         <a:srgbClr val="000000"/>
       </a:buClr>
       <a:buFont typeface="Arial"/>
-      <a:defRPr b="0" i="0" spc="0" sz="1400" u="none" cap="none" strike="noStrike">
+      <a:defRPr sz="1400" b="0" i="0" u="none" strike="noStrike" cap="none" spc="0">
         <a:solidFill>
           <a:srgbClr val="000000"/>
         </a:solidFill>
@@ -150,7 +150,7 @@
         <a:sym typeface="Arial"/>
       </a:defRPr>
     </a:lvl4pPr>
-    <a:lvl5pPr lvl="4" marR="0" rtl="0" algn="l">
+    <a:lvl5pPr marR="0" lvl="4" algn="l" rtl="0">
       <a:lnSpc>
         <a:spcPct val="100000"/>
       </a:lnSpc>
@@ -164,7 +164,7 @@
         <a:srgbClr val="000000"/>
       </a:buClr>
       <a:buFont typeface="Arial"/>
-      <a:defRPr b="0" i="0" spc="0" sz="1400" u="none" cap="none" strike="noStrike">
+      <a:defRPr sz="1400" b="0" i="0" u="none" strike="noStrike" cap="none" spc="0">
         <a:solidFill>
           <a:srgbClr val="000000"/>
         </a:solidFill>
@@ -174,7 +174,7 @@
         <a:sym typeface="Arial"/>
       </a:defRPr>
     </a:lvl5pPr>
-    <a:lvl6pPr lvl="5" marR="0" rtl="0" algn="l">
+    <a:lvl6pPr marR="0" lvl="5" algn="l" rtl="0">
       <a:lnSpc>
         <a:spcPct val="100000"/>
       </a:lnSpc>
@@ -188,7 +188,7 @@
         <a:srgbClr val="000000"/>
       </a:buClr>
       <a:buFont typeface="Arial"/>
-      <a:defRPr b="0" i="0" spc="0" sz="1400" u="none" cap="none" strike="noStrike">
+      <a:defRPr sz="1400" b="0" i="0" u="none" strike="noStrike" cap="none" spc="0">
         <a:solidFill>
           <a:srgbClr val="000000"/>
         </a:solidFill>
@@ -198,7 +198,7 @@
         <a:sym typeface="Arial"/>
       </a:defRPr>
     </a:lvl6pPr>
-    <a:lvl7pPr lvl="6" marR="0" rtl="0" algn="l">
+    <a:lvl7pPr marR="0" lvl="6" algn="l" rtl="0">
       <a:lnSpc>
         <a:spcPct val="100000"/>
       </a:lnSpc>
@@ -212,7 +212,7 @@
         <a:srgbClr val="000000"/>
       </a:buClr>
       <a:buFont typeface="Arial"/>
-      <a:defRPr b="0" i="0" spc="0" sz="1400" u="none" cap="none" strike="noStrike">
+      <a:defRPr sz="1400" b="0" i="0" u="none" strike="noStrike" cap="none" spc="0">
         <a:solidFill>
           <a:srgbClr val="000000"/>
         </a:solidFill>
@@ -222,7 +222,7 @@
         <a:sym typeface="Arial"/>
       </a:defRPr>
     </a:lvl7pPr>
-    <a:lvl8pPr lvl="7" marR="0" rtl="0" algn="l">
+    <a:lvl8pPr marR="0" lvl="7" algn="l" rtl="0">
       <a:lnSpc>
         <a:spcPct val="100000"/>
       </a:lnSpc>
@@ -236,7 +236,7 @@
         <a:srgbClr val="000000"/>
       </a:buClr>
       <a:buFont typeface="Arial"/>
-      <a:defRPr b="0" i="0" spc="0" sz="1400" u="none" cap="none" strike="noStrike">
+      <a:defRPr sz="1400" b="0" i="0" u="none" strike="noStrike" cap="none" spc="0">
         <a:solidFill>
           <a:srgbClr val="000000"/>
         </a:solidFill>
@@ -246,7 +246,7 @@
         <a:sym typeface="Arial"/>
       </a:defRPr>
     </a:lvl8pPr>
-    <a:lvl9pPr lvl="8" marR="0" rtl="0" algn="l">
+    <a:lvl9pPr marR="0" lvl="8" algn="l" rtl="0">
       <a:lnSpc>
         <a:spcPct val="100000"/>
       </a:lnSpc>
@@ -260,7 +260,7 @@
         <a:srgbClr val="000000"/>
       </a:buClr>
       <a:buFont typeface="Arial"/>
-      <a:defRPr b="0" i="0" spc="0" sz="1400" u="none" cap="none" strike="noStrike">
+      <a:defRPr sz="1400" b="0" i="0" u="none" strike="noStrike" cap="none" spc="0">
         <a:solidFill>
           <a:srgbClr val="000000"/>
         </a:solidFill>
@@ -273,7 +273,7 @@
   </p:defaultTextStyle>
   <p:extLst>
     <p:ext uri="{EFAFB233-063F-42B5-8137-9DF3F51BA10A}">
-      <p15:sldGuideLst>
+      <p15:sldGuideLst xmlns:p15="http://schemas.microsoft.com/office/powerpoint/2012/main">
         <p15:guide id="1" orient="horz" pos="1620">
           <p15:clr>
             <a:srgbClr val="747775"/>
@@ -291,11 +291,16 @@
 </file>
 
 <file path=ppt/notesMasters/notesMaster1.xml><?xml version="1.0" encoding="utf-8"?>
-<p:notesMaster xmlns:a="http://schemas.openxmlformats.org/drawingml/2006/main" xmlns:r="http://schemas.openxmlformats.org/officeDocument/2006/relationships" xmlns:mc="http://schemas.openxmlformats.org/markup-compatibility/2006" xmlns:mv="urn:schemas-microsoft-com:mac:vml" xmlns:p="http://schemas.openxmlformats.org/presentationml/2006/main" xmlns:c="http://schemas.openxmlformats.org/drawingml/2006/chart" xmlns:dgm="http://schemas.openxmlformats.org/drawingml/2006/diagram" xmlns:o="urn:schemas-microsoft-com:office:office" xmlns:v="urn:schemas-microsoft-com:vml" xmlns:pvml="urn:schemas-microsoft-com:office:powerpoint" xmlns:com="http://schemas.openxmlformats.org/drawingml/2006/compatibility" xmlns:p14="http://schemas.microsoft.com/office/powerpoint/2010/main" xmlns:p15="http://schemas.microsoft.com/office/powerpoint/2012/main" xmlns:ahyp="http://schemas.microsoft.com/office/drawing/2018/hyperlinkcolor">
+<p:notesMaster xmlns:a="http://schemas.openxmlformats.org/drawingml/2006/main" xmlns:r="http://schemas.openxmlformats.org/officeDocument/2006/relationships" xmlns:p="http://schemas.openxmlformats.org/presentationml/2006/main">
   <p:cSld>
+    <p:bg>
+      <p:bgRef idx="1001">
+        <a:schemeClr val="bg1"/>
+      </p:bgRef>
+    </p:bg>
     <p:spTree>
       <p:nvGrpSpPr>
-        <p:cNvPr id="2" name="Shape 2"/>
+        <p:cNvPr id="1" name="Shape 2"/>
         <p:cNvGrpSpPr/>
         <p:nvPr/>
       </p:nvGrpSpPr>
@@ -310,9 +315,11 @@
       <p:sp>
         <p:nvSpPr>
           <p:cNvPr id="3" name="Google Shape;3;n"/>
-          <p:cNvSpPr/>
+          <p:cNvSpPr>
+            <a:spLocks noGrp="1" noRot="1" noChangeAspect="1"/>
+          </p:cNvSpPr>
           <p:nvPr>
-            <p:ph idx="2" type="sldImg"/>
+            <p:ph type="sldImg" idx="2"/>
           </p:nvPr>
         </p:nvSpPr>
         <p:spPr>
@@ -321,9 +328,13 @@
             <a:ext cx="6096075" cy="3429000"/>
           </a:xfrm>
           <a:custGeom>
-            <a:rect b="b" l="l" r="r" t="t"/>
+            <a:avLst/>
+            <a:gdLst/>
+            <a:ahLst/>
+            <a:cxnLst/>
+            <a:rect l="l" t="t" r="r" b="b"/>
             <a:pathLst>
-              <a:path extrusionOk="0" h="120000" w="120000">
+              <a:path w="120000" h="120000" extrusionOk="0">
                 <a:moveTo>
                   <a:pt x="0" y="0"/>
                 </a:moveTo>
@@ -341,23 +352,25 @@
             </a:pathLst>
           </a:custGeom>
           <a:noFill/>
-          <a:ln cap="flat" cmpd="sng" w="9525">
+          <a:ln w="9525" cap="flat" cmpd="sng">
             <a:solidFill>
               <a:srgbClr val="000000"/>
             </a:solidFill>
             <a:prstDash val="solid"/>
             <a:round/>
-            <a:headEnd len="sm" w="sm" type="none"/>
-            <a:tailEnd len="sm" w="sm" type="none"/>
+            <a:headEnd type="none" w="sm" len="sm"/>
+            <a:tailEnd type="none" w="sm" len="sm"/>
           </a:ln>
         </p:spPr>
       </p:sp>
       <p:sp>
         <p:nvSpPr>
           <p:cNvPr id="4" name="Google Shape;4;n"/>
-          <p:cNvSpPr txBox="1"/>
+          <p:cNvSpPr txBox="1">
+            <a:spLocks noGrp="1"/>
+          </p:cNvSpPr>
           <p:nvPr>
-            <p:ph idx="1" type="body"/>
+            <p:ph type="body" idx="1"/>
           </p:nvPr>
         </p:nvSpPr>
         <p:spPr>
@@ -374,11 +387,11 @@
           </a:ln>
         </p:spPr>
         <p:txBody>
-          <a:bodyPr anchorCtr="0" anchor="t" bIns="91425" lIns="91425" spcFirstLastPara="1" rIns="91425" wrap="square" tIns="91425">
+          <a:bodyPr spcFirstLastPara="1" wrap="square" lIns="91425" tIns="91425" rIns="91425" bIns="91425" anchor="t" anchorCtr="0">
             <a:noAutofit/>
           </a:bodyPr>
           <a:lstStyle>
-            <a:lvl1pPr indent="-298450" lvl="0" marL="457200">
+            <a:lvl1pPr marL="457200" lvl="0" indent="-298450">
               <a:spcBef>
                 <a:spcPts val="0"/>
               </a:spcBef>
@@ -389,7 +402,7 @@
               <a:buChar char="●"/>
               <a:defRPr sz="1100"/>
             </a:lvl1pPr>
-            <a:lvl2pPr indent="-298450" lvl="1" marL="914400">
+            <a:lvl2pPr marL="914400" lvl="1" indent="-298450">
               <a:spcBef>
                 <a:spcPts val="0"/>
               </a:spcBef>
@@ -400,7 +413,7 @@
               <a:buChar char="○"/>
               <a:defRPr sz="1100"/>
             </a:lvl2pPr>
-            <a:lvl3pPr indent="-298450" lvl="2" marL="1371600">
+            <a:lvl3pPr marL="1371600" lvl="2" indent="-298450">
               <a:spcBef>
                 <a:spcPts val="0"/>
               </a:spcBef>
@@ -411,7 +424,7 @@
               <a:buChar char="■"/>
               <a:defRPr sz="1100"/>
             </a:lvl3pPr>
-            <a:lvl4pPr indent="-298450" lvl="3" marL="1828800">
+            <a:lvl4pPr marL="1828800" lvl="3" indent="-298450">
               <a:spcBef>
                 <a:spcPts val="0"/>
               </a:spcBef>
@@ -422,7 +435,7 @@
               <a:buChar char="●"/>
               <a:defRPr sz="1100"/>
             </a:lvl4pPr>
-            <a:lvl5pPr indent="-298450" lvl="4" marL="2286000">
+            <a:lvl5pPr marL="2286000" lvl="4" indent="-298450">
               <a:spcBef>
                 <a:spcPts val="0"/>
               </a:spcBef>
@@ -433,7 +446,7 @@
               <a:buChar char="○"/>
               <a:defRPr sz="1100"/>
             </a:lvl5pPr>
-            <a:lvl6pPr indent="-298450" lvl="5" marL="2743200">
+            <a:lvl6pPr marL="2743200" lvl="5" indent="-298450">
               <a:spcBef>
                 <a:spcPts val="0"/>
               </a:spcBef>
@@ -444,7 +457,7 @@
               <a:buChar char="■"/>
               <a:defRPr sz="1100"/>
             </a:lvl6pPr>
-            <a:lvl7pPr indent="-298450" lvl="6" marL="3200400">
+            <a:lvl7pPr marL="3200400" lvl="6" indent="-298450">
               <a:spcBef>
                 <a:spcPts val="0"/>
               </a:spcBef>
@@ -455,7 +468,7 @@
               <a:buChar char="●"/>
               <a:defRPr sz="1100"/>
             </a:lvl7pPr>
-            <a:lvl8pPr indent="-298450" lvl="7" marL="3657600">
+            <a:lvl8pPr marL="3657600" lvl="7" indent="-298450">
               <a:spcBef>
                 <a:spcPts val="0"/>
               </a:spcBef>
@@ -466,7 +479,7 @@
               <a:buChar char="○"/>
               <a:defRPr sz="1100"/>
             </a:lvl8pPr>
-            <a:lvl9pPr indent="-298450" lvl="8" marL="4114800">
+            <a:lvl9pPr marL="4114800" lvl="8" indent="-298450">
               <a:spcBef>
                 <a:spcPts val="0"/>
               </a:spcBef>
@@ -478,14 +491,16 @@
               <a:defRPr sz="1100"/>
             </a:lvl9pPr>
           </a:lstStyle>
-          <a:p/>
+          <a:p>
+            <a:endParaRPr/>
+          </a:p>
         </p:txBody>
       </p:sp>
     </p:spTree>
   </p:cSld>
-  <p:clrMap accent1="accent1" accent2="accent2" accent3="accent3" accent4="accent4" accent5="accent5" accent6="accent6" bg1="lt1" bg2="dk2" tx1="dk1" tx2="lt2" folHlink="folHlink" hlink="hlink"/>
+  <p:clrMap bg1="lt1" tx1="dk1" bg2="dk2" tx2="lt2" accent1="accent1" accent2="accent2" accent3="accent3" accent4="accent4" accent5="accent5" accent6="accent6" hlink="hlink" folHlink="folHlink"/>
   <p:notesStyle>
-    <a:defPPr lvl="0" marR="0" rtl="0" algn="l">
+    <a:defPPr marR="0" lvl="0" algn="l" rtl="0">
       <a:lnSpc>
         <a:spcPct val="100000"/>
       </a:lnSpc>
@@ -496,7 +511,7 @@
         <a:spcPts val="0"/>
       </a:spcAft>
     </a:defPPr>
-    <a:lvl1pPr lvl="0" marR="0" rtl="0" algn="l">
+    <a:lvl1pPr marR="0" lvl="0" algn="l" rtl="0">
       <a:lnSpc>
         <a:spcPct val="100000"/>
       </a:lnSpc>
@@ -510,7 +525,7 @@
         <a:srgbClr val="000000"/>
       </a:buClr>
       <a:buFont typeface="Arial"/>
-      <a:defRPr b="0" i="0" spc="0" sz="1400" u="none" cap="none" strike="noStrike">
+      <a:defRPr sz="1400" b="0" i="0" u="none" strike="noStrike" cap="none" spc="0">
         <a:solidFill>
           <a:srgbClr val="000000"/>
         </a:solidFill>
@@ -520,7 +535,7 @@
         <a:sym typeface="Arial"/>
       </a:defRPr>
     </a:lvl1pPr>
-    <a:lvl2pPr lvl="1" marR="0" rtl="0" algn="l">
+    <a:lvl2pPr marR="0" lvl="1" algn="l" rtl="0">
       <a:lnSpc>
         <a:spcPct val="100000"/>
       </a:lnSpc>
@@ -534,7 +549,7 @@
         <a:srgbClr val="000000"/>
       </a:buClr>
       <a:buFont typeface="Arial"/>
-      <a:defRPr b="0" i="0" spc="0" sz="1400" u="none" cap="none" strike="noStrike">
+      <a:defRPr sz="1400" b="0" i="0" u="none" strike="noStrike" cap="none" spc="0">
         <a:solidFill>
           <a:srgbClr val="000000"/>
         </a:solidFill>
@@ -544,7 +559,7 @@
         <a:sym typeface="Arial"/>
       </a:defRPr>
     </a:lvl2pPr>
-    <a:lvl3pPr lvl="2" marR="0" rtl="0" algn="l">
+    <a:lvl3pPr marR="0" lvl="2" algn="l" rtl="0">
       <a:lnSpc>
         <a:spcPct val="100000"/>
       </a:lnSpc>
@@ -558,7 +573,7 @@
         <a:srgbClr val="000000"/>
       </a:buClr>
       <a:buFont typeface="Arial"/>
-      <a:defRPr b="0" i="0" spc="0" sz="1400" u="none" cap="none" strike="noStrike">
+      <a:defRPr sz="1400" b="0" i="0" u="none" strike="noStrike" cap="none" spc="0">
         <a:solidFill>
           <a:srgbClr val="000000"/>
         </a:solidFill>
@@ -568,7 +583,7 @@
         <a:sym typeface="Arial"/>
       </a:defRPr>
     </a:lvl3pPr>
-    <a:lvl4pPr lvl="3" marR="0" rtl="0" algn="l">
+    <a:lvl4pPr marR="0" lvl="3" algn="l" rtl="0">
       <a:lnSpc>
         <a:spcPct val="100000"/>
       </a:lnSpc>
@@ -582,7 +597,7 @@
         <a:srgbClr val="000000"/>
       </a:buClr>
       <a:buFont typeface="Arial"/>
-      <a:defRPr b="0" i="0" spc="0" sz="1400" u="none" cap="none" strike="noStrike">
+      <a:defRPr sz="1400" b="0" i="0" u="none" strike="noStrike" cap="none" spc="0">
         <a:solidFill>
           <a:srgbClr val="000000"/>
         </a:solidFill>
@@ -592,7 +607,7 @@
         <a:sym typeface="Arial"/>
       </a:defRPr>
     </a:lvl4pPr>
-    <a:lvl5pPr lvl="4" marR="0" rtl="0" algn="l">
+    <a:lvl5pPr marR="0" lvl="4" algn="l" rtl="0">
       <a:lnSpc>
         <a:spcPct val="100000"/>
       </a:lnSpc>
@@ -606,7 +621,7 @@
         <a:srgbClr val="000000"/>
       </a:buClr>
       <a:buFont typeface="Arial"/>
-      <a:defRPr b="0" i="0" spc="0" sz="1400" u="none" cap="none" strike="noStrike">
+      <a:defRPr sz="1400" b="0" i="0" u="none" strike="noStrike" cap="none" spc="0">
         <a:solidFill>
           <a:srgbClr val="000000"/>
         </a:solidFill>
@@ -616,7 +631,7 @@
         <a:sym typeface="Arial"/>
       </a:defRPr>
     </a:lvl5pPr>
-    <a:lvl6pPr lvl="5" marR="0" rtl="0" algn="l">
+    <a:lvl6pPr marR="0" lvl="5" algn="l" rtl="0">
       <a:lnSpc>
         <a:spcPct val="100000"/>
       </a:lnSpc>
@@ -630,7 +645,7 @@
         <a:srgbClr val="000000"/>
       </a:buClr>
       <a:buFont typeface="Arial"/>
-      <a:defRPr b="0" i="0" spc="0" sz="1400" u="none" cap="none" strike="noStrike">
+      <a:defRPr sz="1400" b="0" i="0" u="none" strike="noStrike" cap="none" spc="0">
         <a:solidFill>
           <a:srgbClr val="000000"/>
         </a:solidFill>
@@ -640,7 +655,7 @@
         <a:sym typeface="Arial"/>
       </a:defRPr>
     </a:lvl6pPr>
-    <a:lvl7pPr lvl="6" marR="0" rtl="0" algn="l">
+    <a:lvl7pPr marR="0" lvl="6" algn="l" rtl="0">
       <a:lnSpc>
         <a:spcPct val="100000"/>
       </a:lnSpc>
@@ -654,7 +669,7 @@
         <a:srgbClr val="000000"/>
       </a:buClr>
       <a:buFont typeface="Arial"/>
-      <a:defRPr b="0" i="0" spc="0" sz="1400" u="none" cap="none" strike="noStrike">
+      <a:defRPr sz="1400" b="0" i="0" u="none" strike="noStrike" cap="none" spc="0">
         <a:solidFill>
           <a:srgbClr val="000000"/>
         </a:solidFill>
@@ -664,7 +679,7 @@
         <a:sym typeface="Arial"/>
       </a:defRPr>
     </a:lvl7pPr>
-    <a:lvl8pPr lvl="7" marR="0" rtl="0" algn="l">
+    <a:lvl8pPr marR="0" lvl="7" algn="l" rtl="0">
       <a:lnSpc>
         <a:spcPct val="100000"/>
       </a:lnSpc>
@@ -678,7 +693,7 @@
         <a:srgbClr val="000000"/>
       </a:buClr>
       <a:buFont typeface="Arial"/>
-      <a:defRPr b="0" i="0" spc="0" sz="1400" u="none" cap="none" strike="noStrike">
+      <a:defRPr sz="1400" b="0" i="0" u="none" strike="noStrike" cap="none" spc="0">
         <a:solidFill>
           <a:srgbClr val="000000"/>
         </a:solidFill>
@@ -688,7 +703,7 @@
         <a:sym typeface="Arial"/>
       </a:defRPr>
     </a:lvl8pPr>
-    <a:lvl9pPr lvl="8" marR="0" rtl="0" algn="l">
+    <a:lvl9pPr marR="0" lvl="8" algn="l" rtl="0">
       <a:lnSpc>
         <a:spcPct val="100000"/>
       </a:lnSpc>
@@ -702,7 +717,7 @@
         <a:srgbClr val="000000"/>
       </a:buClr>
       <a:buFont typeface="Arial"/>
-      <a:defRPr b="0" i="0" spc="0" sz="1400" u="none" cap="none" strike="noStrike">
+      <a:defRPr sz="1400" b="0" i="0" u="none" strike="noStrike" cap="none" spc="0">
         <a:solidFill>
           <a:srgbClr val="000000"/>
         </a:solidFill>
@@ -717,11 +732,11 @@
 </file>
 
 <file path=ppt/notesSlides/notesSlide1.xml><?xml version="1.0" encoding="utf-8"?>
-<p:notes xmlns:a="http://schemas.openxmlformats.org/drawingml/2006/main" xmlns:r="http://schemas.openxmlformats.org/officeDocument/2006/relationships" xmlns:mc="http://schemas.openxmlformats.org/markup-compatibility/2006" xmlns:mv="urn:schemas-microsoft-com:mac:vml" xmlns:p="http://schemas.openxmlformats.org/presentationml/2006/main" xmlns:c="http://schemas.openxmlformats.org/drawingml/2006/chart" xmlns:dgm="http://schemas.openxmlformats.org/drawingml/2006/diagram" xmlns:o="urn:schemas-microsoft-com:office:office" xmlns:v="urn:schemas-microsoft-com:vml" xmlns:pvml="urn:schemas-microsoft-com:office:powerpoint" xmlns:com="http://schemas.openxmlformats.org/drawingml/2006/compatibility" xmlns:p14="http://schemas.microsoft.com/office/powerpoint/2010/main" xmlns:p15="http://schemas.microsoft.com/office/powerpoint/2012/main" xmlns:ahyp="http://schemas.microsoft.com/office/drawing/2018/hyperlinkcolor" showMasterPhAnim="0" showMasterSp="0">
+<p:notes xmlns:a="http://schemas.openxmlformats.org/drawingml/2006/main" xmlns:r="http://schemas.openxmlformats.org/officeDocument/2006/relationships" xmlns:p="http://schemas.openxmlformats.org/presentationml/2006/main" showMasterSp="0" showMasterPhAnim="0">
   <p:cSld>
     <p:spTree>
       <p:nvGrpSpPr>
-        <p:cNvPr id="50" name="Shape 50"/>
+        <p:cNvPr id="1" name="Shape 50"/>
         <p:cNvGrpSpPr/>
         <p:nvPr/>
       </p:nvGrpSpPr>
@@ -736,9 +751,11 @@
       <p:sp>
         <p:nvSpPr>
           <p:cNvPr id="51" name="Google Shape;51;p:notes"/>
-          <p:cNvSpPr/>
+          <p:cNvSpPr>
+            <a:spLocks noGrp="1" noRot="1" noChangeAspect="1"/>
+          </p:cNvSpPr>
           <p:nvPr>
-            <p:ph idx="2" type="sldImg"/>
+            <p:ph type="sldImg" idx="2"/>
           </p:nvPr>
         </p:nvSpPr>
         <p:spPr>
@@ -747,9 +764,13 @@
             <a:ext cx="6096075" cy="3429000"/>
           </a:xfrm>
           <a:custGeom>
-            <a:rect b="b" l="l" r="r" t="t"/>
+            <a:avLst/>
+            <a:gdLst/>
+            <a:ahLst/>
+            <a:cxnLst/>
+            <a:rect l="l" t="t" r="r" b="b"/>
             <a:pathLst>
-              <a:path extrusionOk="0" h="120000" w="120000">
+              <a:path w="120000" h="120000" extrusionOk="0">
                 <a:moveTo>
                   <a:pt x="0" y="0"/>
                 </a:moveTo>
@@ -771,9 +792,11 @@
       <p:sp>
         <p:nvSpPr>
           <p:cNvPr id="52" name="Google Shape;52;p:notes"/>
-          <p:cNvSpPr txBox="1"/>
+          <p:cNvSpPr txBox="1">
+            <a:spLocks noGrp="1"/>
+          </p:cNvSpPr>
           <p:nvPr>
-            <p:ph idx="1" type="body"/>
+            <p:ph type="body" idx="1"/>
           </p:nvPr>
         </p:nvSpPr>
         <p:spPr>
@@ -786,12 +809,12 @@
           </a:prstGeom>
         </p:spPr>
         <p:txBody>
-          <a:bodyPr anchorCtr="0" anchor="t" bIns="91425" lIns="91425" spcFirstLastPara="1" rIns="91425" wrap="square" tIns="91425">
+          <a:bodyPr spcFirstLastPara="1" wrap="square" lIns="91425" tIns="91425" rIns="91425" bIns="91425" anchor="t" anchorCtr="0">
             <a:noAutofit/>
           </a:bodyPr>
           <a:lstStyle/>
           <a:p>
-            <a:pPr indent="0" lvl="0" marL="0" rtl="0" algn="l">
+            <a:pPr marL="0" lvl="0" indent="0" algn="l" rtl="0">
               <a:spcBef>
                 <a:spcPts val="0"/>
               </a:spcBef>
@@ -800,9 +823,6 @@
               </a:spcAft>
               <a:buNone/>
             </a:pPr>
-            <a:r>
-              <a:t/>
-            </a:r>
             <a:endParaRPr/>
           </a:p>
         </p:txBody>
@@ -816,11 +836,11 @@
 </file>
 
 <file path=ppt/notesSlides/notesSlide10.xml><?xml version="1.0" encoding="utf-8"?>
-<p:notes xmlns:a="http://schemas.openxmlformats.org/drawingml/2006/main" xmlns:r="http://schemas.openxmlformats.org/officeDocument/2006/relationships" xmlns:mc="http://schemas.openxmlformats.org/markup-compatibility/2006" xmlns:mv="urn:schemas-microsoft-com:mac:vml" xmlns:p="http://schemas.openxmlformats.org/presentationml/2006/main" xmlns:c="http://schemas.openxmlformats.org/drawingml/2006/chart" xmlns:dgm="http://schemas.openxmlformats.org/drawingml/2006/diagram" xmlns:o="urn:schemas-microsoft-com:office:office" xmlns:v="urn:schemas-microsoft-com:vml" xmlns:pvml="urn:schemas-microsoft-com:office:powerpoint" xmlns:com="http://schemas.openxmlformats.org/drawingml/2006/compatibility" xmlns:p14="http://schemas.microsoft.com/office/powerpoint/2010/main" xmlns:p15="http://schemas.microsoft.com/office/powerpoint/2012/main" xmlns:ahyp="http://schemas.microsoft.com/office/drawing/2018/hyperlinkcolor" showMasterPhAnim="0" showMasterSp="0">
+<p:notes xmlns:a="http://schemas.openxmlformats.org/drawingml/2006/main" xmlns:r="http://schemas.openxmlformats.org/officeDocument/2006/relationships" xmlns:p="http://schemas.openxmlformats.org/presentationml/2006/main" showMasterSp="0" showMasterPhAnim="0">
   <p:cSld>
     <p:spTree>
       <p:nvGrpSpPr>
-        <p:cNvPr id="106" name="Shape 106"/>
+        <p:cNvPr id="1" name="Shape 106"/>
         <p:cNvGrpSpPr/>
         <p:nvPr/>
       </p:nvGrpSpPr>
@@ -835,20 +855,26 @@
       <p:sp>
         <p:nvSpPr>
           <p:cNvPr id="107" name="Google Shape;107;g3f71289ebad_0_44:notes"/>
-          <p:cNvSpPr/>
+          <p:cNvSpPr>
+            <a:spLocks noGrp="1" noRot="1" noChangeAspect="1"/>
+          </p:cNvSpPr>
           <p:nvPr>
-            <p:ph idx="2" type="sldImg"/>
+            <p:ph type="sldImg" idx="2"/>
           </p:nvPr>
         </p:nvSpPr>
         <p:spPr>
           <a:xfrm>
-            <a:off x="381300" y="685800"/>
+            <a:off x="381000" y="685800"/>
             <a:ext cx="6096000" cy="3429000"/>
           </a:xfrm>
           <a:custGeom>
-            <a:rect b="b" l="l" r="r" t="t"/>
+            <a:avLst/>
+            <a:gdLst/>
+            <a:ahLst/>
+            <a:cxnLst/>
+            <a:rect l="l" t="t" r="r" b="b"/>
             <a:pathLst>
-              <a:path extrusionOk="0" h="120000" w="120000">
+              <a:path w="120000" h="120000" extrusionOk="0">
                 <a:moveTo>
                   <a:pt x="0" y="0"/>
                 </a:moveTo>
@@ -870,9 +896,11 @@
       <p:sp>
         <p:nvSpPr>
           <p:cNvPr id="108" name="Google Shape;108;g3f71289ebad_0_44:notes"/>
-          <p:cNvSpPr txBox="1"/>
+          <p:cNvSpPr txBox="1">
+            <a:spLocks noGrp="1"/>
+          </p:cNvSpPr>
           <p:nvPr>
-            <p:ph idx="1" type="body"/>
+            <p:ph type="body" idx="1"/>
           </p:nvPr>
         </p:nvSpPr>
         <p:spPr>
@@ -885,12 +913,12 @@
           </a:prstGeom>
         </p:spPr>
         <p:txBody>
-          <a:bodyPr anchorCtr="0" anchor="t" bIns="91425" lIns="91425" spcFirstLastPara="1" rIns="91425" wrap="square" tIns="91425">
+          <a:bodyPr spcFirstLastPara="1" wrap="square" lIns="91425" tIns="91425" rIns="91425" bIns="91425" anchor="t" anchorCtr="0">
             <a:noAutofit/>
           </a:bodyPr>
           <a:lstStyle/>
           <a:p>
-            <a:pPr indent="0" lvl="0" marL="0" rtl="0" algn="l">
+            <a:pPr marL="0" lvl="0" indent="0" algn="l" rtl="0">
               <a:spcBef>
                 <a:spcPts val="0"/>
               </a:spcBef>
@@ -899,9 +927,6 @@
               </a:spcAft>
               <a:buNone/>
             </a:pPr>
-            <a:r>
-              <a:t/>
-            </a:r>
             <a:endParaRPr/>
           </a:p>
         </p:txBody>
@@ -915,11 +940,11 @@
 </file>
 
 <file path=ppt/notesSlides/notesSlide11.xml><?xml version="1.0" encoding="utf-8"?>
-<p:notes xmlns:a="http://schemas.openxmlformats.org/drawingml/2006/main" xmlns:r="http://schemas.openxmlformats.org/officeDocument/2006/relationships" xmlns:mc="http://schemas.openxmlformats.org/markup-compatibility/2006" xmlns:mv="urn:schemas-microsoft-com:mac:vml" xmlns:p="http://schemas.openxmlformats.org/presentationml/2006/main" xmlns:c="http://schemas.openxmlformats.org/drawingml/2006/chart" xmlns:dgm="http://schemas.openxmlformats.org/drawingml/2006/diagram" xmlns:o="urn:schemas-microsoft-com:office:office" xmlns:v="urn:schemas-microsoft-com:vml" xmlns:pvml="urn:schemas-microsoft-com:office:powerpoint" xmlns:com="http://schemas.openxmlformats.org/drawingml/2006/compatibility" xmlns:p14="http://schemas.microsoft.com/office/powerpoint/2010/main" xmlns:p15="http://schemas.microsoft.com/office/powerpoint/2012/main" xmlns:ahyp="http://schemas.microsoft.com/office/drawing/2018/hyperlinkcolor" showMasterPhAnim="0" showMasterSp="0">
+<p:notes xmlns:a="http://schemas.openxmlformats.org/drawingml/2006/main" xmlns:r="http://schemas.openxmlformats.org/officeDocument/2006/relationships" xmlns:p="http://schemas.openxmlformats.org/presentationml/2006/main" showMasterSp="0" showMasterPhAnim="0">
   <p:cSld>
     <p:spTree>
       <p:nvGrpSpPr>
-        <p:cNvPr id="110" name="Shape 110"/>
+        <p:cNvPr id="1" name="Shape 110"/>
         <p:cNvGrpSpPr/>
         <p:nvPr/>
       </p:nvGrpSpPr>
@@ -934,9 +959,11 @@
       <p:sp>
         <p:nvSpPr>
           <p:cNvPr id="111" name="Google Shape;111;g3f71289ebad_0_47:notes"/>
-          <p:cNvSpPr/>
+          <p:cNvSpPr>
+            <a:spLocks noGrp="1" noRot="1" noChangeAspect="1"/>
+          </p:cNvSpPr>
           <p:nvPr>
-            <p:ph idx="2" type="sldImg"/>
+            <p:ph type="sldImg" idx="2"/>
           </p:nvPr>
         </p:nvSpPr>
         <p:spPr>
@@ -945,9 +972,13 @@
             <a:ext cx="6096000" cy="3429000"/>
           </a:xfrm>
           <a:custGeom>
-            <a:rect b="b" l="l" r="r" t="t"/>
+            <a:avLst/>
+            <a:gdLst/>
+            <a:ahLst/>
+            <a:cxnLst/>
+            <a:rect l="l" t="t" r="r" b="b"/>
             <a:pathLst>
-              <a:path extrusionOk="0" h="120000" w="120000">
+              <a:path w="120000" h="120000" extrusionOk="0">
                 <a:moveTo>
                   <a:pt x="0" y="0"/>
                 </a:moveTo>
@@ -969,9 +1000,11 @@
       <p:sp>
         <p:nvSpPr>
           <p:cNvPr id="112" name="Google Shape;112;g3f71289ebad_0_47:notes"/>
-          <p:cNvSpPr txBox="1"/>
+          <p:cNvSpPr txBox="1">
+            <a:spLocks noGrp="1"/>
+          </p:cNvSpPr>
           <p:nvPr>
-            <p:ph idx="1" type="body"/>
+            <p:ph type="body" idx="1"/>
           </p:nvPr>
         </p:nvSpPr>
         <p:spPr>
@@ -984,12 +1017,12 @@
           </a:prstGeom>
         </p:spPr>
         <p:txBody>
-          <a:bodyPr anchorCtr="0" anchor="t" bIns="91425" lIns="91425" spcFirstLastPara="1" rIns="91425" wrap="square" tIns="91425">
+          <a:bodyPr spcFirstLastPara="1" wrap="square" lIns="91425" tIns="91425" rIns="91425" bIns="91425" anchor="t" anchorCtr="0">
             <a:noAutofit/>
           </a:bodyPr>
           <a:lstStyle/>
           <a:p>
-            <a:pPr indent="0" lvl="0" marL="0" rtl="0" algn="l">
+            <a:pPr marL="0" lvl="0" indent="0" algn="l" rtl="0">
               <a:spcBef>
                 <a:spcPts val="0"/>
               </a:spcBef>
@@ -998,9 +1031,6 @@
               </a:spcAft>
               <a:buNone/>
             </a:pPr>
-            <a:r>
-              <a:t/>
-            </a:r>
             <a:endParaRPr/>
           </a:p>
         </p:txBody>
@@ -1014,11 +1044,11 @@
 </file>
 
 <file path=ppt/notesSlides/notesSlide12.xml><?xml version="1.0" encoding="utf-8"?>
-<p:notes xmlns:a="http://schemas.openxmlformats.org/drawingml/2006/main" xmlns:r="http://schemas.openxmlformats.org/officeDocument/2006/relationships" xmlns:mc="http://schemas.openxmlformats.org/markup-compatibility/2006" xmlns:mv="urn:schemas-microsoft-com:mac:vml" xmlns:p="http://schemas.openxmlformats.org/presentationml/2006/main" xmlns:c="http://schemas.openxmlformats.org/drawingml/2006/chart" xmlns:dgm="http://schemas.openxmlformats.org/drawingml/2006/diagram" xmlns:o="urn:schemas-microsoft-com:office:office" xmlns:v="urn:schemas-microsoft-com:vml" xmlns:pvml="urn:schemas-microsoft-com:office:powerpoint" xmlns:com="http://schemas.openxmlformats.org/drawingml/2006/compatibility" xmlns:p14="http://schemas.microsoft.com/office/powerpoint/2010/main" xmlns:p15="http://schemas.microsoft.com/office/powerpoint/2012/main" xmlns:ahyp="http://schemas.microsoft.com/office/drawing/2018/hyperlinkcolor" showMasterPhAnim="0" showMasterSp="0">
+<p:notes xmlns:a="http://schemas.openxmlformats.org/drawingml/2006/main" xmlns:r="http://schemas.openxmlformats.org/officeDocument/2006/relationships" xmlns:p="http://schemas.openxmlformats.org/presentationml/2006/main" showMasterSp="0" showMasterPhAnim="0">
   <p:cSld>
     <p:spTree>
       <p:nvGrpSpPr>
-        <p:cNvPr id="114" name="Shape 114"/>
+        <p:cNvPr id="1" name="Shape 114"/>
         <p:cNvGrpSpPr/>
         <p:nvPr/>
       </p:nvGrpSpPr>
@@ -1033,9 +1063,11 @@
       <p:sp>
         <p:nvSpPr>
           <p:cNvPr id="115" name="Google Shape;115;g3f71289ebad_0_50:notes"/>
-          <p:cNvSpPr/>
+          <p:cNvSpPr>
+            <a:spLocks noGrp="1" noRot="1" noChangeAspect="1"/>
+          </p:cNvSpPr>
           <p:nvPr>
-            <p:ph idx="2" type="sldImg"/>
+            <p:ph type="sldImg" idx="2"/>
           </p:nvPr>
         </p:nvSpPr>
         <p:spPr>
@@ -1044,9 +1076,13 @@
             <a:ext cx="6096000" cy="3429000"/>
           </a:xfrm>
           <a:custGeom>
-            <a:rect b="b" l="l" r="r" t="t"/>
+            <a:avLst/>
+            <a:gdLst/>
+            <a:ahLst/>
+            <a:cxnLst/>
+            <a:rect l="l" t="t" r="r" b="b"/>
             <a:pathLst>
-              <a:path extrusionOk="0" h="120000" w="120000">
+              <a:path w="120000" h="120000" extrusionOk="0">
                 <a:moveTo>
                   <a:pt x="0" y="0"/>
                 </a:moveTo>
@@ -1068,9 +1104,11 @@
       <p:sp>
         <p:nvSpPr>
           <p:cNvPr id="116" name="Google Shape;116;g3f71289ebad_0_50:notes"/>
-          <p:cNvSpPr txBox="1"/>
+          <p:cNvSpPr txBox="1">
+            <a:spLocks noGrp="1"/>
+          </p:cNvSpPr>
           <p:nvPr>
-            <p:ph idx="1" type="body"/>
+            <p:ph type="body" idx="1"/>
           </p:nvPr>
         </p:nvSpPr>
         <p:spPr>
@@ -1083,12 +1121,12 @@
           </a:prstGeom>
         </p:spPr>
         <p:txBody>
-          <a:bodyPr anchorCtr="0" anchor="t" bIns="91425" lIns="91425" spcFirstLastPara="1" rIns="91425" wrap="square" tIns="91425">
+          <a:bodyPr spcFirstLastPara="1" wrap="square" lIns="91425" tIns="91425" rIns="91425" bIns="91425" anchor="t" anchorCtr="0">
             <a:noAutofit/>
           </a:bodyPr>
           <a:lstStyle/>
           <a:p>
-            <a:pPr indent="0" lvl="0" marL="0" rtl="0" algn="l">
+            <a:pPr marL="0" lvl="0" indent="0" algn="l" rtl="0">
               <a:spcBef>
                 <a:spcPts val="0"/>
               </a:spcBef>
@@ -1097,9 +1135,6 @@
               </a:spcAft>
               <a:buNone/>
             </a:pPr>
-            <a:r>
-              <a:t/>
-            </a:r>
             <a:endParaRPr/>
           </a:p>
         </p:txBody>
@@ -1113,11 +1148,11 @@
 </file>
 
 <file path=ppt/notesSlides/notesSlide13.xml><?xml version="1.0" encoding="utf-8"?>
-<p:notes xmlns:a="http://schemas.openxmlformats.org/drawingml/2006/main" xmlns:r="http://schemas.openxmlformats.org/officeDocument/2006/relationships" xmlns:mc="http://schemas.openxmlformats.org/markup-compatibility/2006" xmlns:mv="urn:schemas-microsoft-com:mac:vml" xmlns:p="http://schemas.openxmlformats.org/presentationml/2006/main" xmlns:c="http://schemas.openxmlformats.org/drawingml/2006/chart" xmlns:dgm="http://schemas.openxmlformats.org/drawingml/2006/diagram" xmlns:o="urn:schemas-microsoft-com:office:office" xmlns:v="urn:schemas-microsoft-com:vml" xmlns:pvml="urn:schemas-microsoft-com:office:powerpoint" xmlns:com="http://schemas.openxmlformats.org/drawingml/2006/compatibility" xmlns:p14="http://schemas.microsoft.com/office/powerpoint/2010/main" xmlns:p15="http://schemas.microsoft.com/office/powerpoint/2012/main" xmlns:ahyp="http://schemas.microsoft.com/office/drawing/2018/hyperlinkcolor" showMasterPhAnim="0" showMasterSp="0">
+<p:notes xmlns:a="http://schemas.openxmlformats.org/drawingml/2006/main" xmlns:r="http://schemas.openxmlformats.org/officeDocument/2006/relationships" xmlns:p="http://schemas.openxmlformats.org/presentationml/2006/main" showMasterSp="0" showMasterPhAnim="0">
   <p:cSld>
     <p:spTree>
       <p:nvGrpSpPr>
-        <p:cNvPr id="125" name="Shape 125"/>
+        <p:cNvPr id="1" name="Shape 125"/>
         <p:cNvGrpSpPr/>
         <p:nvPr/>
       </p:nvGrpSpPr>
@@ -1132,9 +1167,11 @@
       <p:sp>
         <p:nvSpPr>
           <p:cNvPr id="126" name="Google Shape;126;g3f71289ebad_0_60:notes"/>
-          <p:cNvSpPr/>
+          <p:cNvSpPr>
+            <a:spLocks noGrp="1" noRot="1" noChangeAspect="1"/>
+          </p:cNvSpPr>
           <p:nvPr>
-            <p:ph idx="2" type="sldImg"/>
+            <p:ph type="sldImg" idx="2"/>
           </p:nvPr>
         </p:nvSpPr>
         <p:spPr>
@@ -1143,9 +1180,13 @@
             <a:ext cx="6096000" cy="3429000"/>
           </a:xfrm>
           <a:custGeom>
-            <a:rect b="b" l="l" r="r" t="t"/>
+            <a:avLst/>
+            <a:gdLst/>
+            <a:ahLst/>
+            <a:cxnLst/>
+            <a:rect l="l" t="t" r="r" b="b"/>
             <a:pathLst>
-              <a:path extrusionOk="0" h="120000" w="120000">
+              <a:path w="120000" h="120000" extrusionOk="0">
                 <a:moveTo>
                   <a:pt x="0" y="0"/>
                 </a:moveTo>
@@ -1167,9 +1208,11 @@
       <p:sp>
         <p:nvSpPr>
           <p:cNvPr id="127" name="Google Shape;127;g3f71289ebad_0_60:notes"/>
-          <p:cNvSpPr txBox="1"/>
+          <p:cNvSpPr txBox="1">
+            <a:spLocks noGrp="1"/>
+          </p:cNvSpPr>
           <p:nvPr>
-            <p:ph idx="1" type="body"/>
+            <p:ph type="body" idx="1"/>
           </p:nvPr>
         </p:nvSpPr>
         <p:spPr>
@@ -1182,12 +1225,12 @@
           </a:prstGeom>
         </p:spPr>
         <p:txBody>
-          <a:bodyPr anchorCtr="0" anchor="t" bIns="91425" lIns="91425" spcFirstLastPara="1" rIns="91425" wrap="square" tIns="91425">
+          <a:bodyPr spcFirstLastPara="1" wrap="square" lIns="91425" tIns="91425" rIns="91425" bIns="91425" anchor="t" anchorCtr="0">
             <a:noAutofit/>
           </a:bodyPr>
           <a:lstStyle/>
           <a:p>
-            <a:pPr indent="0" lvl="0" marL="0" rtl="0" algn="l">
+            <a:pPr marL="0" lvl="0" indent="0" algn="l" rtl="0">
               <a:spcBef>
                 <a:spcPts val="0"/>
               </a:spcBef>
@@ -1196,9 +1239,6 @@
               </a:spcAft>
               <a:buNone/>
             </a:pPr>
-            <a:r>
-              <a:t/>
-            </a:r>
             <a:endParaRPr/>
           </a:p>
         </p:txBody>
@@ -1212,11 +1252,11 @@
 </file>
 
 <file path=ppt/notesSlides/notesSlide14.xml><?xml version="1.0" encoding="utf-8"?>
-<p:notes xmlns:a="http://schemas.openxmlformats.org/drawingml/2006/main" xmlns:r="http://schemas.openxmlformats.org/officeDocument/2006/relationships" xmlns:mc="http://schemas.openxmlformats.org/markup-compatibility/2006" xmlns:mv="urn:schemas-microsoft-com:mac:vml" xmlns:p="http://schemas.openxmlformats.org/presentationml/2006/main" xmlns:c="http://schemas.openxmlformats.org/drawingml/2006/chart" xmlns:dgm="http://schemas.openxmlformats.org/drawingml/2006/diagram" xmlns:o="urn:schemas-microsoft-com:office:office" xmlns:v="urn:schemas-microsoft-com:vml" xmlns:pvml="urn:schemas-microsoft-com:office:powerpoint" xmlns:com="http://schemas.openxmlformats.org/drawingml/2006/compatibility" xmlns:p14="http://schemas.microsoft.com/office/powerpoint/2010/main" xmlns:p15="http://schemas.microsoft.com/office/powerpoint/2012/main" xmlns:ahyp="http://schemas.microsoft.com/office/drawing/2018/hyperlinkcolor" showMasterPhAnim="0" showMasterSp="0">
+<p:notes xmlns:a="http://schemas.openxmlformats.org/drawingml/2006/main" xmlns:r="http://schemas.openxmlformats.org/officeDocument/2006/relationships" xmlns:p="http://schemas.openxmlformats.org/presentationml/2006/main" showMasterSp="0" showMasterPhAnim="0">
   <p:cSld>
     <p:spTree>
       <p:nvGrpSpPr>
-        <p:cNvPr id="132" name="Shape 132"/>
+        <p:cNvPr id="1" name="Shape 132"/>
         <p:cNvGrpSpPr/>
         <p:nvPr/>
       </p:nvGrpSpPr>
@@ -1231,20 +1271,26 @@
       <p:sp>
         <p:nvSpPr>
           <p:cNvPr id="133" name="Google Shape;133;g3f71289ebad_0_66:notes"/>
-          <p:cNvSpPr/>
+          <p:cNvSpPr>
+            <a:spLocks noGrp="1" noRot="1" noChangeAspect="1"/>
+          </p:cNvSpPr>
           <p:nvPr>
-            <p:ph idx="2" type="sldImg"/>
+            <p:ph type="sldImg" idx="2"/>
           </p:nvPr>
         </p:nvSpPr>
         <p:spPr>
           <a:xfrm>
-            <a:off x="381300" y="685800"/>
+            <a:off x="381000" y="685800"/>
             <a:ext cx="6096000" cy="3429000"/>
           </a:xfrm>
           <a:custGeom>
-            <a:rect b="b" l="l" r="r" t="t"/>
+            <a:avLst/>
+            <a:gdLst/>
+            <a:ahLst/>
+            <a:cxnLst/>
+            <a:rect l="l" t="t" r="r" b="b"/>
             <a:pathLst>
-              <a:path extrusionOk="0" h="120000" w="120000">
+              <a:path w="120000" h="120000" extrusionOk="0">
                 <a:moveTo>
                   <a:pt x="0" y="0"/>
                 </a:moveTo>
@@ -1266,9 +1312,11 @@
       <p:sp>
         <p:nvSpPr>
           <p:cNvPr id="134" name="Google Shape;134;g3f71289ebad_0_66:notes"/>
-          <p:cNvSpPr txBox="1"/>
+          <p:cNvSpPr txBox="1">
+            <a:spLocks noGrp="1"/>
+          </p:cNvSpPr>
           <p:nvPr>
-            <p:ph idx="1" type="body"/>
+            <p:ph type="body" idx="1"/>
           </p:nvPr>
         </p:nvSpPr>
         <p:spPr>
@@ -1281,12 +1329,12 @@
           </a:prstGeom>
         </p:spPr>
         <p:txBody>
-          <a:bodyPr anchorCtr="0" anchor="t" bIns="91425" lIns="91425" spcFirstLastPara="1" rIns="91425" wrap="square" tIns="91425">
+          <a:bodyPr spcFirstLastPara="1" wrap="square" lIns="91425" tIns="91425" rIns="91425" bIns="91425" anchor="t" anchorCtr="0">
             <a:noAutofit/>
           </a:bodyPr>
           <a:lstStyle/>
           <a:p>
-            <a:pPr indent="0" lvl="0" marL="0" rtl="0" algn="l">
+            <a:pPr marL="0" lvl="0" indent="0" algn="l" rtl="0">
               <a:spcBef>
                 <a:spcPts val="0"/>
               </a:spcBef>
@@ -1295,9 +1343,6 @@
               </a:spcAft>
               <a:buNone/>
             </a:pPr>
-            <a:r>
-              <a:t/>
-            </a:r>
             <a:endParaRPr/>
           </a:p>
         </p:txBody>
@@ -1311,11 +1356,11 @@
 </file>
 
 <file path=ppt/notesSlides/notesSlide15.xml><?xml version="1.0" encoding="utf-8"?>
-<p:notes xmlns:a="http://schemas.openxmlformats.org/drawingml/2006/main" xmlns:r="http://schemas.openxmlformats.org/officeDocument/2006/relationships" xmlns:mc="http://schemas.openxmlformats.org/markup-compatibility/2006" xmlns:mv="urn:schemas-microsoft-com:mac:vml" xmlns:p="http://schemas.openxmlformats.org/presentationml/2006/main" xmlns:c="http://schemas.openxmlformats.org/drawingml/2006/chart" xmlns:dgm="http://schemas.openxmlformats.org/drawingml/2006/diagram" xmlns:o="urn:schemas-microsoft-com:office:office" xmlns:v="urn:schemas-microsoft-com:vml" xmlns:pvml="urn:schemas-microsoft-com:office:powerpoint" xmlns:com="http://schemas.openxmlformats.org/drawingml/2006/compatibility" xmlns:p14="http://schemas.microsoft.com/office/powerpoint/2010/main" xmlns:p15="http://schemas.microsoft.com/office/powerpoint/2012/main" xmlns:ahyp="http://schemas.microsoft.com/office/drawing/2018/hyperlinkcolor" showMasterPhAnim="0" showMasterSp="0">
+<p:notes xmlns:a="http://schemas.openxmlformats.org/drawingml/2006/main" xmlns:r="http://schemas.openxmlformats.org/officeDocument/2006/relationships" xmlns:p="http://schemas.openxmlformats.org/presentationml/2006/main" showMasterSp="0" showMasterPhAnim="0">
   <p:cSld>
     <p:spTree>
       <p:nvGrpSpPr>
-        <p:cNvPr id="136" name="Shape 136"/>
+        <p:cNvPr id="1" name="Shape 136"/>
         <p:cNvGrpSpPr/>
         <p:nvPr/>
       </p:nvGrpSpPr>
@@ -1330,9 +1375,11 @@
       <p:sp>
         <p:nvSpPr>
           <p:cNvPr id="137" name="Google Shape;137;g3f71289ebad_0_69:notes"/>
-          <p:cNvSpPr/>
+          <p:cNvSpPr>
+            <a:spLocks noGrp="1" noRot="1" noChangeAspect="1"/>
+          </p:cNvSpPr>
           <p:nvPr>
-            <p:ph idx="2" type="sldImg"/>
+            <p:ph type="sldImg" idx="2"/>
           </p:nvPr>
         </p:nvSpPr>
         <p:spPr>
@@ -1341,9 +1388,13 @@
             <a:ext cx="6096000" cy="3429000"/>
           </a:xfrm>
           <a:custGeom>
-            <a:rect b="b" l="l" r="r" t="t"/>
+            <a:avLst/>
+            <a:gdLst/>
+            <a:ahLst/>
+            <a:cxnLst/>
+            <a:rect l="l" t="t" r="r" b="b"/>
             <a:pathLst>
-              <a:path extrusionOk="0" h="120000" w="120000">
+              <a:path w="120000" h="120000" extrusionOk="0">
                 <a:moveTo>
                   <a:pt x="0" y="0"/>
                 </a:moveTo>
@@ -1365,9 +1416,11 @@
       <p:sp>
         <p:nvSpPr>
           <p:cNvPr id="138" name="Google Shape;138;g3f71289ebad_0_69:notes"/>
-          <p:cNvSpPr txBox="1"/>
+          <p:cNvSpPr txBox="1">
+            <a:spLocks noGrp="1"/>
+          </p:cNvSpPr>
           <p:nvPr>
-            <p:ph idx="1" type="body"/>
+            <p:ph type="body" idx="1"/>
           </p:nvPr>
         </p:nvSpPr>
         <p:spPr>
@@ -1380,12 +1433,12 @@
           </a:prstGeom>
         </p:spPr>
         <p:txBody>
-          <a:bodyPr anchorCtr="0" anchor="t" bIns="91425" lIns="91425" spcFirstLastPara="1" rIns="91425" wrap="square" tIns="91425">
+          <a:bodyPr spcFirstLastPara="1" wrap="square" lIns="91425" tIns="91425" rIns="91425" bIns="91425" anchor="t" anchorCtr="0">
             <a:noAutofit/>
           </a:bodyPr>
           <a:lstStyle/>
           <a:p>
-            <a:pPr indent="0" lvl="0" marL="0" rtl="0" algn="l">
+            <a:pPr marL="0" lvl="0" indent="0" algn="l" rtl="0">
               <a:spcBef>
                 <a:spcPts val="0"/>
               </a:spcBef>
@@ -1394,9 +1447,6 @@
               </a:spcAft>
               <a:buNone/>
             </a:pPr>
-            <a:r>
-              <a:t/>
-            </a:r>
             <a:endParaRPr/>
           </a:p>
         </p:txBody>
@@ -1410,11 +1460,11 @@
 </file>
 
 <file path=ppt/notesSlides/notesSlide16.xml><?xml version="1.0" encoding="utf-8"?>
-<p:notes xmlns:a="http://schemas.openxmlformats.org/drawingml/2006/main" xmlns:r="http://schemas.openxmlformats.org/officeDocument/2006/relationships" xmlns:mc="http://schemas.openxmlformats.org/markup-compatibility/2006" xmlns:mv="urn:schemas-microsoft-com:mac:vml" xmlns:p="http://schemas.openxmlformats.org/presentationml/2006/main" xmlns:c="http://schemas.openxmlformats.org/drawingml/2006/chart" xmlns:dgm="http://schemas.openxmlformats.org/drawingml/2006/diagram" xmlns:o="urn:schemas-microsoft-com:office:office" xmlns:v="urn:schemas-microsoft-com:vml" xmlns:pvml="urn:schemas-microsoft-com:office:powerpoint" xmlns:com="http://schemas.openxmlformats.org/drawingml/2006/compatibility" xmlns:p14="http://schemas.microsoft.com/office/powerpoint/2010/main" xmlns:p15="http://schemas.microsoft.com/office/powerpoint/2012/main" xmlns:ahyp="http://schemas.microsoft.com/office/drawing/2018/hyperlinkcolor" showMasterPhAnim="0" showMasterSp="0">
+<p:notes xmlns:a="http://schemas.openxmlformats.org/drawingml/2006/main" xmlns:r="http://schemas.openxmlformats.org/officeDocument/2006/relationships" xmlns:p="http://schemas.openxmlformats.org/presentationml/2006/main" showMasterSp="0" showMasterPhAnim="0">
   <p:cSld>
     <p:spTree>
       <p:nvGrpSpPr>
-        <p:cNvPr id="140" name="Shape 140"/>
+        <p:cNvPr id="1" name="Shape 140"/>
         <p:cNvGrpSpPr/>
         <p:nvPr/>
       </p:nvGrpSpPr>
@@ -1429,9 +1479,11 @@
       <p:sp>
         <p:nvSpPr>
           <p:cNvPr id="141" name="Google Shape;141;g3f71289ebad_0_72:notes"/>
-          <p:cNvSpPr/>
+          <p:cNvSpPr>
+            <a:spLocks noGrp="1" noRot="1" noChangeAspect="1"/>
+          </p:cNvSpPr>
           <p:nvPr>
-            <p:ph idx="2" type="sldImg"/>
+            <p:ph type="sldImg" idx="2"/>
           </p:nvPr>
         </p:nvSpPr>
         <p:spPr>
@@ -1440,9 +1492,13 @@
             <a:ext cx="6096000" cy="3429000"/>
           </a:xfrm>
           <a:custGeom>
-            <a:rect b="b" l="l" r="r" t="t"/>
+            <a:avLst/>
+            <a:gdLst/>
+            <a:ahLst/>
+            <a:cxnLst/>
+            <a:rect l="l" t="t" r="r" b="b"/>
             <a:pathLst>
-              <a:path extrusionOk="0" h="120000" w="120000">
+              <a:path w="120000" h="120000" extrusionOk="0">
                 <a:moveTo>
                   <a:pt x="0" y="0"/>
                 </a:moveTo>
@@ -1464,9 +1520,11 @@
       <p:sp>
         <p:nvSpPr>
           <p:cNvPr id="142" name="Google Shape;142;g3f71289ebad_0_72:notes"/>
-          <p:cNvSpPr txBox="1"/>
+          <p:cNvSpPr txBox="1">
+            <a:spLocks noGrp="1"/>
+          </p:cNvSpPr>
           <p:nvPr>
-            <p:ph idx="1" type="body"/>
+            <p:ph type="body" idx="1"/>
           </p:nvPr>
         </p:nvSpPr>
         <p:spPr>
@@ -1479,12 +1537,12 @@
           </a:prstGeom>
         </p:spPr>
         <p:txBody>
-          <a:bodyPr anchorCtr="0" anchor="t" bIns="91425" lIns="91425" spcFirstLastPara="1" rIns="91425" wrap="square" tIns="91425">
+          <a:bodyPr spcFirstLastPara="1" wrap="square" lIns="91425" tIns="91425" rIns="91425" bIns="91425" anchor="t" anchorCtr="0">
             <a:noAutofit/>
           </a:bodyPr>
           <a:lstStyle/>
           <a:p>
-            <a:pPr indent="0" lvl="0" marL="0" rtl="0" algn="l">
+            <a:pPr marL="0" lvl="0" indent="0" algn="l" rtl="0">
               <a:spcBef>
                 <a:spcPts val="0"/>
               </a:spcBef>
@@ -1493,9 +1551,6 @@
               </a:spcAft>
               <a:buNone/>
             </a:pPr>
-            <a:r>
-              <a:t/>
-            </a:r>
             <a:endParaRPr/>
           </a:p>
         </p:txBody>
@@ -1509,11 +1564,11 @@
 </file>
 
 <file path=ppt/notesSlides/notesSlide17.xml><?xml version="1.0" encoding="utf-8"?>
-<p:notes xmlns:a="http://schemas.openxmlformats.org/drawingml/2006/main" xmlns:r="http://schemas.openxmlformats.org/officeDocument/2006/relationships" xmlns:mc="http://schemas.openxmlformats.org/markup-compatibility/2006" xmlns:mv="urn:schemas-microsoft-com:mac:vml" xmlns:p="http://schemas.openxmlformats.org/presentationml/2006/main" xmlns:c="http://schemas.openxmlformats.org/drawingml/2006/chart" xmlns:dgm="http://schemas.openxmlformats.org/drawingml/2006/diagram" xmlns:o="urn:schemas-microsoft-com:office:office" xmlns:v="urn:schemas-microsoft-com:vml" xmlns:pvml="urn:schemas-microsoft-com:office:powerpoint" xmlns:com="http://schemas.openxmlformats.org/drawingml/2006/compatibility" xmlns:p14="http://schemas.microsoft.com/office/powerpoint/2010/main" xmlns:p15="http://schemas.microsoft.com/office/powerpoint/2012/main" xmlns:ahyp="http://schemas.microsoft.com/office/drawing/2018/hyperlinkcolor" showMasterPhAnim="0" showMasterSp="0">
+<p:notes xmlns:a="http://schemas.openxmlformats.org/drawingml/2006/main" xmlns:r="http://schemas.openxmlformats.org/officeDocument/2006/relationships" xmlns:p="http://schemas.openxmlformats.org/presentationml/2006/main" showMasterSp="0" showMasterPhAnim="0">
   <p:cSld>
     <p:spTree>
       <p:nvGrpSpPr>
-        <p:cNvPr id="151" name="Shape 151"/>
+        <p:cNvPr id="1" name="Shape 151"/>
         <p:cNvGrpSpPr/>
         <p:nvPr/>
       </p:nvGrpSpPr>
@@ -1528,9 +1583,11 @@
       <p:sp>
         <p:nvSpPr>
           <p:cNvPr id="152" name="Google Shape;152;g3f71289ebad_0_82:notes"/>
-          <p:cNvSpPr/>
+          <p:cNvSpPr>
+            <a:spLocks noGrp="1" noRot="1" noChangeAspect="1"/>
+          </p:cNvSpPr>
           <p:nvPr>
-            <p:ph idx="2" type="sldImg"/>
+            <p:ph type="sldImg" idx="2"/>
           </p:nvPr>
         </p:nvSpPr>
         <p:spPr>
@@ -1539,9 +1596,13 @@
             <a:ext cx="6096000" cy="3429000"/>
           </a:xfrm>
           <a:custGeom>
-            <a:rect b="b" l="l" r="r" t="t"/>
+            <a:avLst/>
+            <a:gdLst/>
+            <a:ahLst/>
+            <a:cxnLst/>
+            <a:rect l="l" t="t" r="r" b="b"/>
             <a:pathLst>
-              <a:path extrusionOk="0" h="120000" w="120000">
+              <a:path w="120000" h="120000" extrusionOk="0">
                 <a:moveTo>
                   <a:pt x="0" y="0"/>
                 </a:moveTo>
@@ -1563,9 +1624,11 @@
       <p:sp>
         <p:nvSpPr>
           <p:cNvPr id="153" name="Google Shape;153;g3f71289ebad_0_82:notes"/>
-          <p:cNvSpPr txBox="1"/>
+          <p:cNvSpPr txBox="1">
+            <a:spLocks noGrp="1"/>
+          </p:cNvSpPr>
           <p:nvPr>
-            <p:ph idx="1" type="body"/>
+            <p:ph type="body" idx="1"/>
           </p:nvPr>
         </p:nvSpPr>
         <p:spPr>
@@ -1578,12 +1641,12 @@
           </a:prstGeom>
         </p:spPr>
         <p:txBody>
-          <a:bodyPr anchorCtr="0" anchor="t" bIns="91425" lIns="91425" spcFirstLastPara="1" rIns="91425" wrap="square" tIns="91425">
+          <a:bodyPr spcFirstLastPara="1" wrap="square" lIns="91425" tIns="91425" rIns="91425" bIns="91425" anchor="t" anchorCtr="0">
             <a:noAutofit/>
           </a:bodyPr>
           <a:lstStyle/>
           <a:p>
-            <a:pPr indent="0" lvl="0" marL="0" rtl="0" algn="l">
+            <a:pPr marL="0" lvl="0" indent="0" algn="l" rtl="0">
               <a:spcBef>
                 <a:spcPts val="0"/>
               </a:spcBef>
@@ -1592,9 +1655,6 @@
               </a:spcAft>
               <a:buNone/>
             </a:pPr>
-            <a:r>
-              <a:t/>
-            </a:r>
             <a:endParaRPr/>
           </a:p>
         </p:txBody>
@@ -1608,11 +1668,11 @@
 </file>
 
 <file path=ppt/notesSlides/notesSlide18.xml><?xml version="1.0" encoding="utf-8"?>
-<p:notes xmlns:a="http://schemas.openxmlformats.org/drawingml/2006/main" xmlns:r="http://schemas.openxmlformats.org/officeDocument/2006/relationships" xmlns:mc="http://schemas.openxmlformats.org/markup-compatibility/2006" xmlns:mv="urn:schemas-microsoft-com:mac:vml" xmlns:p="http://schemas.openxmlformats.org/presentationml/2006/main" xmlns:c="http://schemas.openxmlformats.org/drawingml/2006/chart" xmlns:dgm="http://schemas.openxmlformats.org/drawingml/2006/diagram" xmlns:o="urn:schemas-microsoft-com:office:office" xmlns:v="urn:schemas-microsoft-com:vml" xmlns:pvml="urn:schemas-microsoft-com:office:powerpoint" xmlns:com="http://schemas.openxmlformats.org/drawingml/2006/compatibility" xmlns:p14="http://schemas.microsoft.com/office/powerpoint/2010/main" xmlns:p15="http://schemas.microsoft.com/office/powerpoint/2012/main" xmlns:ahyp="http://schemas.microsoft.com/office/drawing/2018/hyperlinkcolor" showMasterPhAnim="0" showMasterSp="0">
+<p:notes xmlns:a="http://schemas.openxmlformats.org/drawingml/2006/main" xmlns:r="http://schemas.openxmlformats.org/officeDocument/2006/relationships" xmlns:p="http://schemas.openxmlformats.org/presentationml/2006/main" showMasterSp="0" showMasterPhAnim="0">
   <p:cSld>
     <p:spTree>
       <p:nvGrpSpPr>
-        <p:cNvPr id="158" name="Shape 158"/>
+        <p:cNvPr id="1" name="Shape 158"/>
         <p:cNvGrpSpPr/>
         <p:nvPr/>
       </p:nvGrpSpPr>
@@ -1627,20 +1687,26 @@
       <p:sp>
         <p:nvSpPr>
           <p:cNvPr id="159" name="Google Shape;159;g3f71289ebad_0_88:notes"/>
-          <p:cNvSpPr/>
+          <p:cNvSpPr>
+            <a:spLocks noGrp="1" noRot="1" noChangeAspect="1"/>
+          </p:cNvSpPr>
           <p:nvPr>
-            <p:ph idx="2" type="sldImg"/>
+            <p:ph type="sldImg" idx="2"/>
           </p:nvPr>
         </p:nvSpPr>
         <p:spPr>
           <a:xfrm>
-            <a:off x="381300" y="685800"/>
+            <a:off x="381000" y="685800"/>
             <a:ext cx="6096000" cy="3429000"/>
           </a:xfrm>
           <a:custGeom>
-            <a:rect b="b" l="l" r="r" t="t"/>
+            <a:avLst/>
+            <a:gdLst/>
+            <a:ahLst/>
+            <a:cxnLst/>
+            <a:rect l="l" t="t" r="r" b="b"/>
             <a:pathLst>
-              <a:path extrusionOk="0" h="120000" w="120000">
+              <a:path w="120000" h="120000" extrusionOk="0">
                 <a:moveTo>
                   <a:pt x="0" y="0"/>
                 </a:moveTo>
@@ -1662,9 +1728,11 @@
       <p:sp>
         <p:nvSpPr>
           <p:cNvPr id="160" name="Google Shape;160;g3f71289ebad_0_88:notes"/>
-          <p:cNvSpPr txBox="1"/>
+          <p:cNvSpPr txBox="1">
+            <a:spLocks noGrp="1"/>
+          </p:cNvSpPr>
           <p:nvPr>
-            <p:ph idx="1" type="body"/>
+            <p:ph type="body" idx="1"/>
           </p:nvPr>
         </p:nvSpPr>
         <p:spPr>
@@ -1677,12 +1745,12 @@
           </a:prstGeom>
         </p:spPr>
         <p:txBody>
-          <a:bodyPr anchorCtr="0" anchor="t" bIns="91425" lIns="91425" spcFirstLastPara="1" rIns="91425" wrap="square" tIns="91425">
+          <a:bodyPr spcFirstLastPara="1" wrap="square" lIns="91425" tIns="91425" rIns="91425" bIns="91425" anchor="t" anchorCtr="0">
             <a:noAutofit/>
           </a:bodyPr>
           <a:lstStyle/>
           <a:p>
-            <a:pPr indent="0" lvl="0" marL="0" rtl="0" algn="l">
+            <a:pPr marL="0" lvl="0" indent="0" algn="l" rtl="0">
               <a:spcBef>
                 <a:spcPts val="0"/>
               </a:spcBef>
@@ -1691,9 +1759,6 @@
               </a:spcAft>
               <a:buNone/>
             </a:pPr>
-            <a:r>
-              <a:t/>
-            </a:r>
             <a:endParaRPr/>
           </a:p>
         </p:txBody>
@@ -1707,11 +1772,11 @@
 </file>
 
 <file path=ppt/notesSlides/notesSlide19.xml><?xml version="1.0" encoding="utf-8"?>
-<p:notes xmlns:a="http://schemas.openxmlformats.org/drawingml/2006/main" xmlns:r="http://schemas.openxmlformats.org/officeDocument/2006/relationships" xmlns:mc="http://schemas.openxmlformats.org/markup-compatibility/2006" xmlns:mv="urn:schemas-microsoft-com:mac:vml" xmlns:p="http://schemas.openxmlformats.org/presentationml/2006/main" xmlns:c="http://schemas.openxmlformats.org/drawingml/2006/chart" xmlns:dgm="http://schemas.openxmlformats.org/drawingml/2006/diagram" xmlns:o="urn:schemas-microsoft-com:office:office" xmlns:v="urn:schemas-microsoft-com:vml" xmlns:pvml="urn:schemas-microsoft-com:office:powerpoint" xmlns:com="http://schemas.openxmlformats.org/drawingml/2006/compatibility" xmlns:p14="http://schemas.microsoft.com/office/powerpoint/2010/main" xmlns:p15="http://schemas.microsoft.com/office/powerpoint/2012/main" xmlns:ahyp="http://schemas.microsoft.com/office/drawing/2018/hyperlinkcolor" showMasterPhAnim="0" showMasterSp="0">
+<p:notes xmlns:a="http://schemas.openxmlformats.org/drawingml/2006/main" xmlns:r="http://schemas.openxmlformats.org/officeDocument/2006/relationships" xmlns:p="http://schemas.openxmlformats.org/presentationml/2006/main" showMasterSp="0" showMasterPhAnim="0">
   <p:cSld>
     <p:spTree>
       <p:nvGrpSpPr>
-        <p:cNvPr id="162" name="Shape 162"/>
+        <p:cNvPr id="1" name="Shape 162"/>
         <p:cNvGrpSpPr/>
         <p:nvPr/>
       </p:nvGrpSpPr>
@@ -1726,9 +1791,11 @@
       <p:sp>
         <p:nvSpPr>
           <p:cNvPr id="163" name="Google Shape;163;g3f71289ebad_0_91:notes"/>
-          <p:cNvSpPr/>
+          <p:cNvSpPr>
+            <a:spLocks noGrp="1" noRot="1" noChangeAspect="1"/>
+          </p:cNvSpPr>
           <p:nvPr>
-            <p:ph idx="2" type="sldImg"/>
+            <p:ph type="sldImg" idx="2"/>
           </p:nvPr>
         </p:nvSpPr>
         <p:spPr>
@@ -1737,9 +1804,13 @@
             <a:ext cx="6096000" cy="3429000"/>
           </a:xfrm>
           <a:custGeom>
-            <a:rect b="b" l="l" r="r" t="t"/>
+            <a:avLst/>
+            <a:gdLst/>
+            <a:ahLst/>
+            <a:cxnLst/>
+            <a:rect l="l" t="t" r="r" b="b"/>
             <a:pathLst>
-              <a:path extrusionOk="0" h="120000" w="120000">
+              <a:path w="120000" h="120000" extrusionOk="0">
                 <a:moveTo>
                   <a:pt x="0" y="0"/>
                 </a:moveTo>
@@ -1761,9 +1832,11 @@
       <p:sp>
         <p:nvSpPr>
           <p:cNvPr id="164" name="Google Shape;164;g3f71289ebad_0_91:notes"/>
-          <p:cNvSpPr txBox="1"/>
+          <p:cNvSpPr txBox="1">
+            <a:spLocks noGrp="1"/>
+          </p:cNvSpPr>
           <p:nvPr>
-            <p:ph idx="1" type="body"/>
+            <p:ph type="body" idx="1"/>
           </p:nvPr>
         </p:nvSpPr>
         <p:spPr>
@@ -1776,12 +1849,12 @@
           </a:prstGeom>
         </p:spPr>
         <p:txBody>
-          <a:bodyPr anchorCtr="0" anchor="t" bIns="91425" lIns="91425" spcFirstLastPara="1" rIns="91425" wrap="square" tIns="91425">
+          <a:bodyPr spcFirstLastPara="1" wrap="square" lIns="91425" tIns="91425" rIns="91425" bIns="91425" anchor="t" anchorCtr="0">
             <a:noAutofit/>
           </a:bodyPr>
           <a:lstStyle/>
           <a:p>
-            <a:pPr indent="0" lvl="0" marL="0" rtl="0" algn="l">
+            <a:pPr marL="0" lvl="0" indent="0" algn="l" rtl="0">
               <a:spcBef>
                 <a:spcPts val="0"/>
               </a:spcBef>
@@ -1790,9 +1863,6 @@
               </a:spcAft>
               <a:buNone/>
             </a:pPr>
-            <a:r>
-              <a:t/>
-            </a:r>
             <a:endParaRPr/>
           </a:p>
         </p:txBody>
@@ -1806,11 +1876,11 @@
 </file>
 
 <file path=ppt/notesSlides/notesSlide2.xml><?xml version="1.0" encoding="utf-8"?>
-<p:notes xmlns:a="http://schemas.openxmlformats.org/drawingml/2006/main" xmlns:r="http://schemas.openxmlformats.org/officeDocument/2006/relationships" xmlns:mc="http://schemas.openxmlformats.org/markup-compatibility/2006" xmlns:mv="urn:schemas-microsoft-com:mac:vml" xmlns:p="http://schemas.openxmlformats.org/presentationml/2006/main" xmlns:c="http://schemas.openxmlformats.org/drawingml/2006/chart" xmlns:dgm="http://schemas.openxmlformats.org/drawingml/2006/diagram" xmlns:o="urn:schemas-microsoft-com:office:office" xmlns:v="urn:schemas-microsoft-com:vml" xmlns:pvml="urn:schemas-microsoft-com:office:powerpoint" xmlns:com="http://schemas.openxmlformats.org/drawingml/2006/compatibility" xmlns:p14="http://schemas.microsoft.com/office/powerpoint/2010/main" xmlns:p15="http://schemas.microsoft.com/office/powerpoint/2012/main" xmlns:ahyp="http://schemas.microsoft.com/office/drawing/2018/hyperlinkcolor" showMasterPhAnim="0" showMasterSp="0">
+<p:notes xmlns:a="http://schemas.openxmlformats.org/drawingml/2006/main" xmlns:r="http://schemas.openxmlformats.org/officeDocument/2006/relationships" xmlns:p="http://schemas.openxmlformats.org/presentationml/2006/main" showMasterSp="0" showMasterPhAnim="0">
   <p:cSld>
     <p:spTree>
       <p:nvGrpSpPr>
-        <p:cNvPr id="54" name="Shape 54"/>
+        <p:cNvPr id="1" name="Shape 54"/>
         <p:cNvGrpSpPr/>
         <p:nvPr/>
       </p:nvGrpSpPr>
@@ -1825,20 +1895,26 @@
       <p:sp>
         <p:nvSpPr>
           <p:cNvPr id="55" name="Google Shape;55;g3f71289ebad_0_0:notes"/>
-          <p:cNvSpPr/>
+          <p:cNvSpPr>
+            <a:spLocks noGrp="1" noRot="1" noChangeAspect="1"/>
+          </p:cNvSpPr>
           <p:nvPr>
-            <p:ph idx="2" type="sldImg"/>
+            <p:ph type="sldImg" idx="2"/>
           </p:nvPr>
         </p:nvSpPr>
         <p:spPr>
           <a:xfrm>
-            <a:off x="381300" y="685800"/>
+            <a:off x="381000" y="685800"/>
             <a:ext cx="6096000" cy="3429000"/>
           </a:xfrm>
           <a:custGeom>
-            <a:rect b="b" l="l" r="r" t="t"/>
+            <a:avLst/>
+            <a:gdLst/>
+            <a:ahLst/>
+            <a:cxnLst/>
+            <a:rect l="l" t="t" r="r" b="b"/>
             <a:pathLst>
-              <a:path extrusionOk="0" h="120000" w="120000">
+              <a:path w="120000" h="120000" extrusionOk="0">
                 <a:moveTo>
                   <a:pt x="0" y="0"/>
                 </a:moveTo>
@@ -1860,9 +1936,11 @@
       <p:sp>
         <p:nvSpPr>
           <p:cNvPr id="56" name="Google Shape;56;g3f71289ebad_0_0:notes"/>
-          <p:cNvSpPr txBox="1"/>
+          <p:cNvSpPr txBox="1">
+            <a:spLocks noGrp="1"/>
+          </p:cNvSpPr>
           <p:nvPr>
-            <p:ph idx="1" type="body"/>
+            <p:ph type="body" idx="1"/>
           </p:nvPr>
         </p:nvSpPr>
         <p:spPr>
@@ -1875,12 +1953,12 @@
           </a:prstGeom>
         </p:spPr>
         <p:txBody>
-          <a:bodyPr anchorCtr="0" anchor="t" bIns="91425" lIns="91425" spcFirstLastPara="1" rIns="91425" wrap="square" tIns="91425">
+          <a:bodyPr spcFirstLastPara="1" wrap="square" lIns="91425" tIns="91425" rIns="91425" bIns="91425" anchor="t" anchorCtr="0">
             <a:noAutofit/>
           </a:bodyPr>
           <a:lstStyle/>
           <a:p>
-            <a:pPr indent="0" lvl="0" marL="0" rtl="0" algn="l">
+            <a:pPr marL="0" lvl="0" indent="0" algn="l" rtl="0">
               <a:spcBef>
                 <a:spcPts val="0"/>
               </a:spcBef>
@@ -1889,9 +1967,6 @@
               </a:spcAft>
               <a:buNone/>
             </a:pPr>
-            <a:r>
-              <a:t/>
-            </a:r>
             <a:endParaRPr/>
           </a:p>
         </p:txBody>
@@ -1905,11 +1980,11 @@
 </file>
 
 <file path=ppt/notesSlides/notesSlide20.xml><?xml version="1.0" encoding="utf-8"?>
-<p:notes xmlns:a="http://schemas.openxmlformats.org/drawingml/2006/main" xmlns:r="http://schemas.openxmlformats.org/officeDocument/2006/relationships" xmlns:mc="http://schemas.openxmlformats.org/markup-compatibility/2006" xmlns:mv="urn:schemas-microsoft-com:mac:vml" xmlns:p="http://schemas.openxmlformats.org/presentationml/2006/main" xmlns:c="http://schemas.openxmlformats.org/drawingml/2006/chart" xmlns:dgm="http://schemas.openxmlformats.org/drawingml/2006/diagram" xmlns:o="urn:schemas-microsoft-com:office:office" xmlns:v="urn:schemas-microsoft-com:vml" xmlns:pvml="urn:schemas-microsoft-com:office:powerpoint" xmlns:com="http://schemas.openxmlformats.org/drawingml/2006/compatibility" xmlns:p14="http://schemas.microsoft.com/office/powerpoint/2010/main" xmlns:p15="http://schemas.microsoft.com/office/powerpoint/2012/main" xmlns:ahyp="http://schemas.microsoft.com/office/drawing/2018/hyperlinkcolor" showMasterPhAnim="0" showMasterSp="0">
+<p:notes xmlns:a="http://schemas.openxmlformats.org/drawingml/2006/main" xmlns:r="http://schemas.openxmlformats.org/officeDocument/2006/relationships" xmlns:p="http://schemas.openxmlformats.org/presentationml/2006/main" showMasterSp="0" showMasterPhAnim="0">
   <p:cSld>
     <p:spTree>
       <p:nvGrpSpPr>
-        <p:cNvPr id="166" name="Shape 166"/>
+        <p:cNvPr id="1" name="Shape 166"/>
         <p:cNvGrpSpPr/>
         <p:nvPr/>
       </p:nvGrpSpPr>
@@ -1924,9 +1999,11 @@
       <p:sp>
         <p:nvSpPr>
           <p:cNvPr id="167" name="Google Shape;167;g3f71289ebad_0_94:notes"/>
-          <p:cNvSpPr/>
+          <p:cNvSpPr>
+            <a:spLocks noGrp="1" noRot="1" noChangeAspect="1"/>
+          </p:cNvSpPr>
           <p:nvPr>
-            <p:ph idx="2" type="sldImg"/>
+            <p:ph type="sldImg" idx="2"/>
           </p:nvPr>
         </p:nvSpPr>
         <p:spPr>
@@ -1935,9 +2012,13 @@
             <a:ext cx="6096000" cy="3429000"/>
           </a:xfrm>
           <a:custGeom>
-            <a:rect b="b" l="l" r="r" t="t"/>
+            <a:avLst/>
+            <a:gdLst/>
+            <a:ahLst/>
+            <a:cxnLst/>
+            <a:rect l="l" t="t" r="r" b="b"/>
             <a:pathLst>
-              <a:path extrusionOk="0" h="120000" w="120000">
+              <a:path w="120000" h="120000" extrusionOk="0">
                 <a:moveTo>
                   <a:pt x="0" y="0"/>
                 </a:moveTo>
@@ -1959,9 +2040,11 @@
       <p:sp>
         <p:nvSpPr>
           <p:cNvPr id="168" name="Google Shape;168;g3f71289ebad_0_94:notes"/>
-          <p:cNvSpPr txBox="1"/>
+          <p:cNvSpPr txBox="1">
+            <a:spLocks noGrp="1"/>
+          </p:cNvSpPr>
           <p:nvPr>
-            <p:ph idx="1" type="body"/>
+            <p:ph type="body" idx="1"/>
           </p:nvPr>
         </p:nvSpPr>
         <p:spPr>
@@ -1974,12 +2057,12 @@
           </a:prstGeom>
         </p:spPr>
         <p:txBody>
-          <a:bodyPr anchorCtr="0" anchor="t" bIns="91425" lIns="91425" spcFirstLastPara="1" rIns="91425" wrap="square" tIns="91425">
+          <a:bodyPr spcFirstLastPara="1" wrap="square" lIns="91425" tIns="91425" rIns="91425" bIns="91425" anchor="t" anchorCtr="0">
             <a:noAutofit/>
           </a:bodyPr>
           <a:lstStyle/>
           <a:p>
-            <a:pPr indent="0" lvl="0" marL="0" rtl="0" algn="l">
+            <a:pPr marL="0" lvl="0" indent="0" algn="l" rtl="0">
               <a:spcBef>
                 <a:spcPts val="0"/>
               </a:spcBef>
@@ -1988,9 +2071,6 @@
               </a:spcAft>
               <a:buNone/>
             </a:pPr>
-            <a:r>
-              <a:t/>
-            </a:r>
             <a:endParaRPr/>
           </a:p>
         </p:txBody>
@@ -2004,11 +2084,11 @@
 </file>
 
 <file path=ppt/notesSlides/notesSlide21.xml><?xml version="1.0" encoding="utf-8"?>
-<p:notes xmlns:a="http://schemas.openxmlformats.org/drawingml/2006/main" xmlns:r="http://schemas.openxmlformats.org/officeDocument/2006/relationships" xmlns:mc="http://schemas.openxmlformats.org/markup-compatibility/2006" xmlns:mv="urn:schemas-microsoft-com:mac:vml" xmlns:p="http://schemas.openxmlformats.org/presentationml/2006/main" xmlns:c="http://schemas.openxmlformats.org/drawingml/2006/chart" xmlns:dgm="http://schemas.openxmlformats.org/drawingml/2006/diagram" xmlns:o="urn:schemas-microsoft-com:office:office" xmlns:v="urn:schemas-microsoft-com:vml" xmlns:pvml="urn:schemas-microsoft-com:office:powerpoint" xmlns:com="http://schemas.openxmlformats.org/drawingml/2006/compatibility" xmlns:p14="http://schemas.microsoft.com/office/powerpoint/2010/main" xmlns:p15="http://schemas.microsoft.com/office/powerpoint/2012/main" xmlns:ahyp="http://schemas.microsoft.com/office/drawing/2018/hyperlinkcolor" showMasterPhAnim="0" showMasterSp="0">
+<p:notes xmlns:a="http://schemas.openxmlformats.org/drawingml/2006/main" xmlns:r="http://schemas.openxmlformats.org/officeDocument/2006/relationships" xmlns:p="http://schemas.openxmlformats.org/presentationml/2006/main" showMasterSp="0" showMasterPhAnim="0">
   <p:cSld>
     <p:spTree>
       <p:nvGrpSpPr>
-        <p:cNvPr id="177" name="Shape 177"/>
+        <p:cNvPr id="1" name="Shape 177"/>
         <p:cNvGrpSpPr/>
         <p:nvPr/>
       </p:nvGrpSpPr>
@@ -2023,9 +2103,11 @@
       <p:sp>
         <p:nvSpPr>
           <p:cNvPr id="178" name="Google Shape;178;g3f71289ebad_0_104:notes"/>
-          <p:cNvSpPr/>
+          <p:cNvSpPr>
+            <a:spLocks noGrp="1" noRot="1" noChangeAspect="1"/>
+          </p:cNvSpPr>
           <p:nvPr>
-            <p:ph idx="2" type="sldImg"/>
+            <p:ph type="sldImg" idx="2"/>
           </p:nvPr>
         </p:nvSpPr>
         <p:spPr>
@@ -2034,9 +2116,13 @@
             <a:ext cx="6096000" cy="3429000"/>
           </a:xfrm>
           <a:custGeom>
-            <a:rect b="b" l="l" r="r" t="t"/>
+            <a:avLst/>
+            <a:gdLst/>
+            <a:ahLst/>
+            <a:cxnLst/>
+            <a:rect l="l" t="t" r="r" b="b"/>
             <a:pathLst>
-              <a:path extrusionOk="0" h="120000" w="120000">
+              <a:path w="120000" h="120000" extrusionOk="0">
                 <a:moveTo>
                   <a:pt x="0" y="0"/>
                 </a:moveTo>
@@ -2058,9 +2144,11 @@
       <p:sp>
         <p:nvSpPr>
           <p:cNvPr id="179" name="Google Shape;179;g3f71289ebad_0_104:notes"/>
-          <p:cNvSpPr txBox="1"/>
+          <p:cNvSpPr txBox="1">
+            <a:spLocks noGrp="1"/>
+          </p:cNvSpPr>
           <p:nvPr>
-            <p:ph idx="1" type="body"/>
+            <p:ph type="body" idx="1"/>
           </p:nvPr>
         </p:nvSpPr>
         <p:spPr>
@@ -2073,12 +2161,12 @@
           </a:prstGeom>
         </p:spPr>
         <p:txBody>
-          <a:bodyPr anchorCtr="0" anchor="t" bIns="91425" lIns="91425" spcFirstLastPara="1" rIns="91425" wrap="square" tIns="91425">
+          <a:bodyPr spcFirstLastPara="1" wrap="square" lIns="91425" tIns="91425" rIns="91425" bIns="91425" anchor="t" anchorCtr="0">
             <a:noAutofit/>
           </a:bodyPr>
           <a:lstStyle/>
           <a:p>
-            <a:pPr indent="0" lvl="0" marL="0" rtl="0" algn="l">
+            <a:pPr marL="0" lvl="0" indent="0" algn="l" rtl="0">
               <a:spcBef>
                 <a:spcPts val="0"/>
               </a:spcBef>
@@ -2087,9 +2175,6 @@
               </a:spcAft>
               <a:buNone/>
             </a:pPr>
-            <a:r>
-              <a:t/>
-            </a:r>
             <a:endParaRPr/>
           </a:p>
         </p:txBody>
@@ -2103,11 +2188,11 @@
 </file>
 
 <file path=ppt/notesSlides/notesSlide22.xml><?xml version="1.0" encoding="utf-8"?>
-<p:notes xmlns:a="http://schemas.openxmlformats.org/drawingml/2006/main" xmlns:r="http://schemas.openxmlformats.org/officeDocument/2006/relationships" xmlns:mc="http://schemas.openxmlformats.org/markup-compatibility/2006" xmlns:mv="urn:schemas-microsoft-com:mac:vml" xmlns:p="http://schemas.openxmlformats.org/presentationml/2006/main" xmlns:c="http://schemas.openxmlformats.org/drawingml/2006/chart" xmlns:dgm="http://schemas.openxmlformats.org/drawingml/2006/diagram" xmlns:o="urn:schemas-microsoft-com:office:office" xmlns:v="urn:schemas-microsoft-com:vml" xmlns:pvml="urn:schemas-microsoft-com:office:powerpoint" xmlns:com="http://schemas.openxmlformats.org/drawingml/2006/compatibility" xmlns:p14="http://schemas.microsoft.com/office/powerpoint/2010/main" xmlns:p15="http://schemas.microsoft.com/office/powerpoint/2012/main" xmlns:ahyp="http://schemas.microsoft.com/office/drawing/2018/hyperlinkcolor" showMasterPhAnim="0" showMasterSp="0">
+<p:notes xmlns:a="http://schemas.openxmlformats.org/drawingml/2006/main" xmlns:r="http://schemas.openxmlformats.org/officeDocument/2006/relationships" xmlns:p="http://schemas.openxmlformats.org/presentationml/2006/main" showMasterSp="0" showMasterPhAnim="0">
   <p:cSld>
     <p:spTree>
       <p:nvGrpSpPr>
-        <p:cNvPr id="184" name="Shape 184"/>
+        <p:cNvPr id="1" name="Shape 184"/>
         <p:cNvGrpSpPr/>
         <p:nvPr/>
       </p:nvGrpSpPr>
@@ -2122,20 +2207,26 @@
       <p:sp>
         <p:nvSpPr>
           <p:cNvPr id="185" name="Google Shape;185;g3f71289ebad_0_155:notes"/>
-          <p:cNvSpPr/>
+          <p:cNvSpPr>
+            <a:spLocks noGrp="1" noRot="1" noChangeAspect="1"/>
+          </p:cNvSpPr>
           <p:nvPr>
-            <p:ph idx="2" type="sldImg"/>
+            <p:ph type="sldImg" idx="2"/>
           </p:nvPr>
         </p:nvSpPr>
         <p:spPr>
           <a:xfrm>
-            <a:off x="381300" y="685800"/>
+            <a:off x="381000" y="685800"/>
             <a:ext cx="6096000" cy="3429000"/>
           </a:xfrm>
           <a:custGeom>
-            <a:rect b="b" l="l" r="r" t="t"/>
+            <a:avLst/>
+            <a:gdLst/>
+            <a:ahLst/>
+            <a:cxnLst/>
+            <a:rect l="l" t="t" r="r" b="b"/>
             <a:pathLst>
-              <a:path extrusionOk="0" h="120000" w="120000">
+              <a:path w="120000" h="120000" extrusionOk="0">
                 <a:moveTo>
                   <a:pt x="0" y="0"/>
                 </a:moveTo>
@@ -2157,9 +2248,11 @@
       <p:sp>
         <p:nvSpPr>
           <p:cNvPr id="186" name="Google Shape;186;g3f71289ebad_0_155:notes"/>
-          <p:cNvSpPr txBox="1"/>
+          <p:cNvSpPr txBox="1">
+            <a:spLocks noGrp="1"/>
+          </p:cNvSpPr>
           <p:nvPr>
-            <p:ph idx="1" type="body"/>
+            <p:ph type="body" idx="1"/>
           </p:nvPr>
         </p:nvSpPr>
         <p:spPr>
@@ -2172,12 +2265,12 @@
           </a:prstGeom>
         </p:spPr>
         <p:txBody>
-          <a:bodyPr anchorCtr="0" anchor="t" bIns="91425" lIns="91425" spcFirstLastPara="1" rIns="91425" wrap="square" tIns="91425">
+          <a:bodyPr spcFirstLastPara="1" wrap="square" lIns="91425" tIns="91425" rIns="91425" bIns="91425" anchor="t" anchorCtr="0">
             <a:noAutofit/>
           </a:bodyPr>
           <a:lstStyle/>
           <a:p>
-            <a:pPr indent="0" lvl="0" marL="0" rtl="0" algn="l">
+            <a:pPr marL="0" lvl="0" indent="0" algn="l" rtl="0">
               <a:spcBef>
                 <a:spcPts val="0"/>
               </a:spcBef>
@@ -2186,9 +2279,6 @@
               </a:spcAft>
               <a:buNone/>
             </a:pPr>
-            <a:r>
-              <a:t/>
-            </a:r>
             <a:endParaRPr/>
           </a:p>
         </p:txBody>
@@ -2202,11 +2292,11 @@
 </file>
 
 <file path=ppt/notesSlides/notesSlide3.xml><?xml version="1.0" encoding="utf-8"?>
-<p:notes xmlns:a="http://schemas.openxmlformats.org/drawingml/2006/main" xmlns:r="http://schemas.openxmlformats.org/officeDocument/2006/relationships" xmlns:mc="http://schemas.openxmlformats.org/markup-compatibility/2006" xmlns:mv="urn:schemas-microsoft-com:mac:vml" xmlns:p="http://schemas.openxmlformats.org/presentationml/2006/main" xmlns:c="http://schemas.openxmlformats.org/drawingml/2006/chart" xmlns:dgm="http://schemas.openxmlformats.org/drawingml/2006/diagram" xmlns:o="urn:schemas-microsoft-com:office:office" xmlns:v="urn:schemas-microsoft-com:vml" xmlns:pvml="urn:schemas-microsoft-com:office:powerpoint" xmlns:com="http://schemas.openxmlformats.org/drawingml/2006/compatibility" xmlns:p14="http://schemas.microsoft.com/office/powerpoint/2010/main" xmlns:p15="http://schemas.microsoft.com/office/powerpoint/2012/main" xmlns:ahyp="http://schemas.microsoft.com/office/drawing/2018/hyperlinkcolor" showMasterPhAnim="0" showMasterSp="0">
+<p:notes xmlns:a="http://schemas.openxmlformats.org/drawingml/2006/main" xmlns:r="http://schemas.openxmlformats.org/officeDocument/2006/relationships" xmlns:p="http://schemas.openxmlformats.org/presentationml/2006/main" showMasterSp="0" showMasterPhAnim="0">
   <p:cSld>
     <p:spTree>
       <p:nvGrpSpPr>
-        <p:cNvPr id="58" name="Shape 58"/>
+        <p:cNvPr id="1" name="Shape 58"/>
         <p:cNvGrpSpPr/>
         <p:nvPr/>
       </p:nvGrpSpPr>
@@ -2221,9 +2311,11 @@
       <p:sp>
         <p:nvSpPr>
           <p:cNvPr id="59" name="Google Shape;59;g3f71289ebad_0_3:notes"/>
-          <p:cNvSpPr/>
+          <p:cNvSpPr>
+            <a:spLocks noGrp="1" noRot="1" noChangeAspect="1"/>
+          </p:cNvSpPr>
           <p:nvPr>
-            <p:ph idx="2" type="sldImg"/>
+            <p:ph type="sldImg" idx="2"/>
           </p:nvPr>
         </p:nvSpPr>
         <p:spPr>
@@ -2232,9 +2324,13 @@
             <a:ext cx="6096000" cy="3429000"/>
           </a:xfrm>
           <a:custGeom>
-            <a:rect b="b" l="l" r="r" t="t"/>
+            <a:avLst/>
+            <a:gdLst/>
+            <a:ahLst/>
+            <a:cxnLst/>
+            <a:rect l="l" t="t" r="r" b="b"/>
             <a:pathLst>
-              <a:path extrusionOk="0" h="120000" w="120000">
+              <a:path w="120000" h="120000" extrusionOk="0">
                 <a:moveTo>
                   <a:pt x="0" y="0"/>
                 </a:moveTo>
@@ -2256,9 +2352,11 @@
       <p:sp>
         <p:nvSpPr>
           <p:cNvPr id="60" name="Google Shape;60;g3f71289ebad_0_3:notes"/>
-          <p:cNvSpPr txBox="1"/>
+          <p:cNvSpPr txBox="1">
+            <a:spLocks noGrp="1"/>
+          </p:cNvSpPr>
           <p:nvPr>
-            <p:ph idx="1" type="body"/>
+            <p:ph type="body" idx="1"/>
           </p:nvPr>
         </p:nvSpPr>
         <p:spPr>
@@ -2271,12 +2369,12 @@
           </a:prstGeom>
         </p:spPr>
         <p:txBody>
-          <a:bodyPr anchorCtr="0" anchor="t" bIns="91425" lIns="91425" spcFirstLastPara="1" rIns="91425" wrap="square" tIns="91425">
+          <a:bodyPr spcFirstLastPara="1" wrap="square" lIns="91425" tIns="91425" rIns="91425" bIns="91425" anchor="t" anchorCtr="0">
             <a:noAutofit/>
           </a:bodyPr>
           <a:lstStyle/>
           <a:p>
-            <a:pPr indent="0" lvl="0" marL="0" rtl="0" algn="l">
+            <a:pPr marL="0" lvl="0" indent="0" algn="l" rtl="0">
               <a:spcBef>
                 <a:spcPts val="0"/>
               </a:spcBef>
@@ -2285,9 +2383,6 @@
               </a:spcAft>
               <a:buNone/>
             </a:pPr>
-            <a:r>
-              <a:t/>
-            </a:r>
             <a:endParaRPr/>
           </a:p>
         </p:txBody>
@@ -2301,11 +2396,11 @@
 </file>
 
 <file path=ppt/notesSlides/notesSlide4.xml><?xml version="1.0" encoding="utf-8"?>
-<p:notes xmlns:a="http://schemas.openxmlformats.org/drawingml/2006/main" xmlns:r="http://schemas.openxmlformats.org/officeDocument/2006/relationships" xmlns:mc="http://schemas.openxmlformats.org/markup-compatibility/2006" xmlns:mv="urn:schemas-microsoft-com:mac:vml" xmlns:p="http://schemas.openxmlformats.org/presentationml/2006/main" xmlns:c="http://schemas.openxmlformats.org/drawingml/2006/chart" xmlns:dgm="http://schemas.openxmlformats.org/drawingml/2006/diagram" xmlns:o="urn:schemas-microsoft-com:office:office" xmlns:v="urn:schemas-microsoft-com:vml" xmlns:pvml="urn:schemas-microsoft-com:office:powerpoint" xmlns:com="http://schemas.openxmlformats.org/drawingml/2006/compatibility" xmlns:p14="http://schemas.microsoft.com/office/powerpoint/2010/main" xmlns:p15="http://schemas.microsoft.com/office/powerpoint/2012/main" xmlns:ahyp="http://schemas.microsoft.com/office/drawing/2018/hyperlinkcolor" showMasterPhAnim="0" showMasterSp="0">
+<p:notes xmlns:a="http://schemas.openxmlformats.org/drawingml/2006/main" xmlns:r="http://schemas.openxmlformats.org/officeDocument/2006/relationships" xmlns:p="http://schemas.openxmlformats.org/presentationml/2006/main" showMasterSp="0" showMasterPhAnim="0">
   <p:cSld>
     <p:spTree>
       <p:nvGrpSpPr>
-        <p:cNvPr id="62" name="Shape 62"/>
+        <p:cNvPr id="1" name="Shape 62"/>
         <p:cNvGrpSpPr/>
         <p:nvPr/>
       </p:nvGrpSpPr>
@@ -2320,9 +2415,11 @@
       <p:sp>
         <p:nvSpPr>
           <p:cNvPr id="63" name="Google Shape;63;g3f71289ebad_0_6:notes"/>
-          <p:cNvSpPr/>
+          <p:cNvSpPr>
+            <a:spLocks noGrp="1" noRot="1" noChangeAspect="1"/>
+          </p:cNvSpPr>
           <p:nvPr>
-            <p:ph idx="2" type="sldImg"/>
+            <p:ph type="sldImg" idx="2"/>
           </p:nvPr>
         </p:nvSpPr>
         <p:spPr>
@@ -2331,9 +2428,13 @@
             <a:ext cx="6096000" cy="3429000"/>
           </a:xfrm>
           <a:custGeom>
-            <a:rect b="b" l="l" r="r" t="t"/>
+            <a:avLst/>
+            <a:gdLst/>
+            <a:ahLst/>
+            <a:cxnLst/>
+            <a:rect l="l" t="t" r="r" b="b"/>
             <a:pathLst>
-              <a:path extrusionOk="0" h="120000" w="120000">
+              <a:path w="120000" h="120000" extrusionOk="0">
                 <a:moveTo>
                   <a:pt x="0" y="0"/>
                 </a:moveTo>
@@ -2355,9 +2456,11 @@
       <p:sp>
         <p:nvSpPr>
           <p:cNvPr id="64" name="Google Shape;64;g3f71289ebad_0_6:notes"/>
-          <p:cNvSpPr txBox="1"/>
+          <p:cNvSpPr txBox="1">
+            <a:spLocks noGrp="1"/>
+          </p:cNvSpPr>
           <p:nvPr>
-            <p:ph idx="1" type="body"/>
+            <p:ph type="body" idx="1"/>
           </p:nvPr>
         </p:nvSpPr>
         <p:spPr>
@@ -2370,12 +2473,12 @@
           </a:prstGeom>
         </p:spPr>
         <p:txBody>
-          <a:bodyPr anchorCtr="0" anchor="t" bIns="91425" lIns="91425" spcFirstLastPara="1" rIns="91425" wrap="square" tIns="91425">
+          <a:bodyPr spcFirstLastPara="1" wrap="square" lIns="91425" tIns="91425" rIns="91425" bIns="91425" anchor="t" anchorCtr="0">
             <a:noAutofit/>
           </a:bodyPr>
           <a:lstStyle/>
           <a:p>
-            <a:pPr indent="0" lvl="0" marL="0" rtl="0" algn="l">
+            <a:pPr marL="0" lvl="0" indent="0" algn="l" rtl="0">
               <a:spcBef>
                 <a:spcPts val="0"/>
               </a:spcBef>
@@ -2384,9 +2487,6 @@
               </a:spcAft>
               <a:buNone/>
             </a:pPr>
-            <a:r>
-              <a:t/>
-            </a:r>
             <a:endParaRPr/>
           </a:p>
         </p:txBody>
@@ -2400,11 +2500,11 @@
 </file>
 
 <file path=ppt/notesSlides/notesSlide5.xml><?xml version="1.0" encoding="utf-8"?>
-<p:notes xmlns:a="http://schemas.openxmlformats.org/drawingml/2006/main" xmlns:r="http://schemas.openxmlformats.org/officeDocument/2006/relationships" xmlns:mc="http://schemas.openxmlformats.org/markup-compatibility/2006" xmlns:mv="urn:schemas-microsoft-com:mac:vml" xmlns:p="http://schemas.openxmlformats.org/presentationml/2006/main" xmlns:c="http://schemas.openxmlformats.org/drawingml/2006/chart" xmlns:dgm="http://schemas.openxmlformats.org/drawingml/2006/diagram" xmlns:o="urn:schemas-microsoft-com:office:office" xmlns:v="urn:schemas-microsoft-com:vml" xmlns:pvml="urn:schemas-microsoft-com:office:powerpoint" xmlns:com="http://schemas.openxmlformats.org/drawingml/2006/compatibility" xmlns:p14="http://schemas.microsoft.com/office/powerpoint/2010/main" xmlns:p15="http://schemas.microsoft.com/office/powerpoint/2012/main" xmlns:ahyp="http://schemas.microsoft.com/office/drawing/2018/hyperlinkcolor" showMasterPhAnim="0" showMasterSp="0">
+<p:notes xmlns:a="http://schemas.openxmlformats.org/drawingml/2006/main" xmlns:r="http://schemas.openxmlformats.org/officeDocument/2006/relationships" xmlns:p="http://schemas.openxmlformats.org/presentationml/2006/main" showMasterSp="0" showMasterPhAnim="0">
   <p:cSld>
     <p:spTree>
       <p:nvGrpSpPr>
-        <p:cNvPr id="73" name="Shape 73"/>
+        <p:cNvPr id="1" name="Shape 73"/>
         <p:cNvGrpSpPr/>
         <p:nvPr/>
       </p:nvGrpSpPr>
@@ -2419,9 +2519,11 @@
       <p:sp>
         <p:nvSpPr>
           <p:cNvPr id="74" name="Google Shape;74;g3f71289ebad_0_16:notes"/>
-          <p:cNvSpPr/>
+          <p:cNvSpPr>
+            <a:spLocks noGrp="1" noRot="1" noChangeAspect="1"/>
+          </p:cNvSpPr>
           <p:nvPr>
-            <p:ph idx="2" type="sldImg"/>
+            <p:ph type="sldImg" idx="2"/>
           </p:nvPr>
         </p:nvSpPr>
         <p:spPr>
@@ -2430,9 +2532,13 @@
             <a:ext cx="6096000" cy="3429000"/>
           </a:xfrm>
           <a:custGeom>
-            <a:rect b="b" l="l" r="r" t="t"/>
+            <a:avLst/>
+            <a:gdLst/>
+            <a:ahLst/>
+            <a:cxnLst/>
+            <a:rect l="l" t="t" r="r" b="b"/>
             <a:pathLst>
-              <a:path extrusionOk="0" h="120000" w="120000">
+              <a:path w="120000" h="120000" extrusionOk="0">
                 <a:moveTo>
                   <a:pt x="0" y="0"/>
                 </a:moveTo>
@@ -2454,9 +2560,11 @@
       <p:sp>
         <p:nvSpPr>
           <p:cNvPr id="75" name="Google Shape;75;g3f71289ebad_0_16:notes"/>
-          <p:cNvSpPr txBox="1"/>
+          <p:cNvSpPr txBox="1">
+            <a:spLocks noGrp="1"/>
+          </p:cNvSpPr>
           <p:nvPr>
-            <p:ph idx="1" type="body"/>
+            <p:ph type="body" idx="1"/>
           </p:nvPr>
         </p:nvSpPr>
         <p:spPr>
@@ -2469,12 +2577,12 @@
           </a:prstGeom>
         </p:spPr>
         <p:txBody>
-          <a:bodyPr anchorCtr="0" anchor="t" bIns="91425" lIns="91425" spcFirstLastPara="1" rIns="91425" wrap="square" tIns="91425">
+          <a:bodyPr spcFirstLastPara="1" wrap="square" lIns="91425" tIns="91425" rIns="91425" bIns="91425" anchor="t" anchorCtr="0">
             <a:noAutofit/>
           </a:bodyPr>
           <a:lstStyle/>
           <a:p>
-            <a:pPr indent="0" lvl="0" marL="0" rtl="0" algn="l">
+            <a:pPr marL="0" lvl="0" indent="0" algn="l" rtl="0">
               <a:spcBef>
                 <a:spcPts val="0"/>
               </a:spcBef>
@@ -2483,9 +2591,6 @@
               </a:spcAft>
               <a:buNone/>
             </a:pPr>
-            <a:r>
-              <a:t/>
-            </a:r>
             <a:endParaRPr/>
           </a:p>
         </p:txBody>
@@ -2499,11 +2604,11 @@
 </file>
 
 <file path=ppt/notesSlides/notesSlide6.xml><?xml version="1.0" encoding="utf-8"?>
-<p:notes xmlns:a="http://schemas.openxmlformats.org/drawingml/2006/main" xmlns:r="http://schemas.openxmlformats.org/officeDocument/2006/relationships" xmlns:mc="http://schemas.openxmlformats.org/markup-compatibility/2006" xmlns:mv="urn:schemas-microsoft-com:mac:vml" xmlns:p="http://schemas.openxmlformats.org/presentationml/2006/main" xmlns:c="http://schemas.openxmlformats.org/drawingml/2006/chart" xmlns:dgm="http://schemas.openxmlformats.org/drawingml/2006/diagram" xmlns:o="urn:schemas-microsoft-com:office:office" xmlns:v="urn:schemas-microsoft-com:vml" xmlns:pvml="urn:schemas-microsoft-com:office:powerpoint" xmlns:com="http://schemas.openxmlformats.org/drawingml/2006/compatibility" xmlns:p14="http://schemas.microsoft.com/office/powerpoint/2010/main" xmlns:p15="http://schemas.microsoft.com/office/powerpoint/2012/main" xmlns:ahyp="http://schemas.microsoft.com/office/drawing/2018/hyperlinkcolor" showMasterPhAnim="0" showMasterSp="0">
+<p:notes xmlns:a="http://schemas.openxmlformats.org/drawingml/2006/main" xmlns:r="http://schemas.openxmlformats.org/officeDocument/2006/relationships" xmlns:p="http://schemas.openxmlformats.org/presentationml/2006/main" showMasterSp="0" showMasterPhAnim="0">
   <p:cSld>
     <p:spTree>
       <p:nvGrpSpPr>
-        <p:cNvPr id="80" name="Shape 80"/>
+        <p:cNvPr id="1" name="Shape 80"/>
         <p:cNvGrpSpPr/>
         <p:nvPr/>
       </p:nvGrpSpPr>
@@ -2518,20 +2623,26 @@
       <p:sp>
         <p:nvSpPr>
           <p:cNvPr id="81" name="Google Shape;81;g3f71289ebad_0_22:notes"/>
-          <p:cNvSpPr/>
+          <p:cNvSpPr>
+            <a:spLocks noGrp="1" noRot="1" noChangeAspect="1"/>
+          </p:cNvSpPr>
           <p:nvPr>
-            <p:ph idx="2" type="sldImg"/>
+            <p:ph type="sldImg" idx="2"/>
           </p:nvPr>
         </p:nvSpPr>
         <p:spPr>
           <a:xfrm>
-            <a:off x="381300" y="685800"/>
+            <a:off x="381000" y="685800"/>
             <a:ext cx="6096000" cy="3429000"/>
           </a:xfrm>
           <a:custGeom>
-            <a:rect b="b" l="l" r="r" t="t"/>
+            <a:avLst/>
+            <a:gdLst/>
+            <a:ahLst/>
+            <a:cxnLst/>
+            <a:rect l="l" t="t" r="r" b="b"/>
             <a:pathLst>
-              <a:path extrusionOk="0" h="120000" w="120000">
+              <a:path w="120000" h="120000" extrusionOk="0">
                 <a:moveTo>
                   <a:pt x="0" y="0"/>
                 </a:moveTo>
@@ -2553,9 +2664,11 @@
       <p:sp>
         <p:nvSpPr>
           <p:cNvPr id="82" name="Google Shape;82;g3f71289ebad_0_22:notes"/>
-          <p:cNvSpPr txBox="1"/>
+          <p:cNvSpPr txBox="1">
+            <a:spLocks noGrp="1"/>
+          </p:cNvSpPr>
           <p:nvPr>
-            <p:ph idx="1" type="body"/>
+            <p:ph type="body" idx="1"/>
           </p:nvPr>
         </p:nvSpPr>
         <p:spPr>
@@ -2568,12 +2681,12 @@
           </a:prstGeom>
         </p:spPr>
         <p:txBody>
-          <a:bodyPr anchorCtr="0" anchor="t" bIns="91425" lIns="91425" spcFirstLastPara="1" rIns="91425" wrap="square" tIns="91425">
+          <a:bodyPr spcFirstLastPara="1" wrap="square" lIns="91425" tIns="91425" rIns="91425" bIns="91425" anchor="t" anchorCtr="0">
             <a:noAutofit/>
           </a:bodyPr>
           <a:lstStyle/>
           <a:p>
-            <a:pPr indent="0" lvl="0" marL="0" rtl="0" algn="l">
+            <a:pPr marL="0" lvl="0" indent="0" algn="l" rtl="0">
               <a:spcBef>
                 <a:spcPts val="0"/>
               </a:spcBef>
@@ -2582,9 +2695,6 @@
               </a:spcAft>
               <a:buNone/>
             </a:pPr>
-            <a:r>
-              <a:t/>
-            </a:r>
             <a:endParaRPr/>
           </a:p>
         </p:txBody>
@@ -2598,11 +2708,11 @@
 </file>
 
 <file path=ppt/notesSlides/notesSlide7.xml><?xml version="1.0" encoding="utf-8"?>
-<p:notes xmlns:a="http://schemas.openxmlformats.org/drawingml/2006/main" xmlns:r="http://schemas.openxmlformats.org/officeDocument/2006/relationships" xmlns:mc="http://schemas.openxmlformats.org/markup-compatibility/2006" xmlns:mv="urn:schemas-microsoft-com:mac:vml" xmlns:p="http://schemas.openxmlformats.org/presentationml/2006/main" xmlns:c="http://schemas.openxmlformats.org/drawingml/2006/chart" xmlns:dgm="http://schemas.openxmlformats.org/drawingml/2006/diagram" xmlns:o="urn:schemas-microsoft-com:office:office" xmlns:v="urn:schemas-microsoft-com:vml" xmlns:pvml="urn:schemas-microsoft-com:office:powerpoint" xmlns:com="http://schemas.openxmlformats.org/drawingml/2006/compatibility" xmlns:p14="http://schemas.microsoft.com/office/powerpoint/2010/main" xmlns:p15="http://schemas.microsoft.com/office/powerpoint/2012/main" xmlns:ahyp="http://schemas.microsoft.com/office/drawing/2018/hyperlinkcolor" showMasterPhAnim="0" showMasterSp="0">
+<p:notes xmlns:a="http://schemas.openxmlformats.org/drawingml/2006/main" xmlns:r="http://schemas.openxmlformats.org/officeDocument/2006/relationships" xmlns:p="http://schemas.openxmlformats.org/presentationml/2006/main" showMasterSp="0" showMasterPhAnim="0">
   <p:cSld>
     <p:spTree>
       <p:nvGrpSpPr>
-        <p:cNvPr id="84" name="Shape 84"/>
+        <p:cNvPr id="1" name="Shape 84"/>
         <p:cNvGrpSpPr/>
         <p:nvPr/>
       </p:nvGrpSpPr>
@@ -2617,9 +2727,11 @@
       <p:sp>
         <p:nvSpPr>
           <p:cNvPr id="85" name="Google Shape;85;g3f71289ebad_0_25:notes"/>
-          <p:cNvSpPr/>
+          <p:cNvSpPr>
+            <a:spLocks noGrp="1" noRot="1" noChangeAspect="1"/>
+          </p:cNvSpPr>
           <p:nvPr>
-            <p:ph idx="2" type="sldImg"/>
+            <p:ph type="sldImg" idx="2"/>
           </p:nvPr>
         </p:nvSpPr>
         <p:spPr>
@@ -2628,9 +2740,13 @@
             <a:ext cx="6096000" cy="3429000"/>
           </a:xfrm>
           <a:custGeom>
-            <a:rect b="b" l="l" r="r" t="t"/>
+            <a:avLst/>
+            <a:gdLst/>
+            <a:ahLst/>
+            <a:cxnLst/>
+            <a:rect l="l" t="t" r="r" b="b"/>
             <a:pathLst>
-              <a:path extrusionOk="0" h="120000" w="120000">
+              <a:path w="120000" h="120000" extrusionOk="0">
                 <a:moveTo>
                   <a:pt x="0" y="0"/>
                 </a:moveTo>
@@ -2652,9 +2768,11 @@
       <p:sp>
         <p:nvSpPr>
           <p:cNvPr id="86" name="Google Shape;86;g3f71289ebad_0_25:notes"/>
-          <p:cNvSpPr txBox="1"/>
+          <p:cNvSpPr txBox="1">
+            <a:spLocks noGrp="1"/>
+          </p:cNvSpPr>
           <p:nvPr>
-            <p:ph idx="1" type="body"/>
+            <p:ph type="body" idx="1"/>
           </p:nvPr>
         </p:nvSpPr>
         <p:spPr>
@@ -2667,12 +2785,12 @@
           </a:prstGeom>
         </p:spPr>
         <p:txBody>
-          <a:bodyPr anchorCtr="0" anchor="t" bIns="91425" lIns="91425" spcFirstLastPara="1" rIns="91425" wrap="square" tIns="91425">
+          <a:bodyPr spcFirstLastPara="1" wrap="square" lIns="91425" tIns="91425" rIns="91425" bIns="91425" anchor="t" anchorCtr="0">
             <a:noAutofit/>
           </a:bodyPr>
           <a:lstStyle/>
           <a:p>
-            <a:pPr indent="0" lvl="0" marL="0" rtl="0" algn="l">
+            <a:pPr marL="0" lvl="0" indent="0" algn="l" rtl="0">
               <a:spcBef>
                 <a:spcPts val="0"/>
               </a:spcBef>
@@ -2681,9 +2799,6 @@
               </a:spcAft>
               <a:buNone/>
             </a:pPr>
-            <a:r>
-              <a:t/>
-            </a:r>
             <a:endParaRPr/>
           </a:p>
         </p:txBody>
@@ -2697,11 +2812,11 @@
 </file>
 
 <file path=ppt/notesSlides/notesSlide8.xml><?xml version="1.0" encoding="utf-8"?>
-<p:notes xmlns:a="http://schemas.openxmlformats.org/drawingml/2006/main" xmlns:r="http://schemas.openxmlformats.org/officeDocument/2006/relationships" xmlns:mc="http://schemas.openxmlformats.org/markup-compatibility/2006" xmlns:mv="urn:schemas-microsoft-com:mac:vml" xmlns:p="http://schemas.openxmlformats.org/presentationml/2006/main" xmlns:c="http://schemas.openxmlformats.org/drawingml/2006/chart" xmlns:dgm="http://schemas.openxmlformats.org/drawingml/2006/diagram" xmlns:o="urn:schemas-microsoft-com:office:office" xmlns:v="urn:schemas-microsoft-com:vml" xmlns:pvml="urn:schemas-microsoft-com:office:powerpoint" xmlns:com="http://schemas.openxmlformats.org/drawingml/2006/compatibility" xmlns:p14="http://schemas.microsoft.com/office/powerpoint/2010/main" xmlns:p15="http://schemas.microsoft.com/office/powerpoint/2012/main" xmlns:ahyp="http://schemas.microsoft.com/office/drawing/2018/hyperlinkcolor" showMasterPhAnim="0" showMasterSp="0">
+<p:notes xmlns:a="http://schemas.openxmlformats.org/drawingml/2006/main" xmlns:r="http://schemas.openxmlformats.org/officeDocument/2006/relationships" xmlns:p="http://schemas.openxmlformats.org/presentationml/2006/main" showMasterSp="0" showMasterPhAnim="0">
   <p:cSld>
     <p:spTree>
       <p:nvGrpSpPr>
-        <p:cNvPr id="88" name="Shape 88"/>
+        <p:cNvPr id="1" name="Shape 88"/>
         <p:cNvGrpSpPr/>
         <p:nvPr/>
       </p:nvGrpSpPr>
@@ -2716,9 +2831,11 @@
       <p:sp>
         <p:nvSpPr>
           <p:cNvPr id="89" name="Google Shape;89;g3f71289ebad_0_28:notes"/>
-          <p:cNvSpPr/>
+          <p:cNvSpPr>
+            <a:spLocks noGrp="1" noRot="1" noChangeAspect="1"/>
+          </p:cNvSpPr>
           <p:nvPr>
-            <p:ph idx="2" type="sldImg"/>
+            <p:ph type="sldImg" idx="2"/>
           </p:nvPr>
         </p:nvSpPr>
         <p:spPr>
@@ -2727,9 +2844,13 @@
             <a:ext cx="6096000" cy="3429000"/>
           </a:xfrm>
           <a:custGeom>
-            <a:rect b="b" l="l" r="r" t="t"/>
+            <a:avLst/>
+            <a:gdLst/>
+            <a:ahLst/>
+            <a:cxnLst/>
+            <a:rect l="l" t="t" r="r" b="b"/>
             <a:pathLst>
-              <a:path extrusionOk="0" h="120000" w="120000">
+              <a:path w="120000" h="120000" extrusionOk="0">
                 <a:moveTo>
                   <a:pt x="0" y="0"/>
                 </a:moveTo>
@@ -2751,9 +2872,11 @@
       <p:sp>
         <p:nvSpPr>
           <p:cNvPr id="90" name="Google Shape;90;g3f71289ebad_0_28:notes"/>
-          <p:cNvSpPr txBox="1"/>
+          <p:cNvSpPr txBox="1">
+            <a:spLocks noGrp="1"/>
+          </p:cNvSpPr>
           <p:nvPr>
-            <p:ph idx="1" type="body"/>
+            <p:ph type="body" idx="1"/>
           </p:nvPr>
         </p:nvSpPr>
         <p:spPr>
@@ -2766,12 +2889,12 @@
           </a:prstGeom>
         </p:spPr>
         <p:txBody>
-          <a:bodyPr anchorCtr="0" anchor="t" bIns="91425" lIns="91425" spcFirstLastPara="1" rIns="91425" wrap="square" tIns="91425">
+          <a:bodyPr spcFirstLastPara="1" wrap="square" lIns="91425" tIns="91425" rIns="91425" bIns="91425" anchor="t" anchorCtr="0">
             <a:noAutofit/>
           </a:bodyPr>
           <a:lstStyle/>
           <a:p>
-            <a:pPr indent="0" lvl="0" marL="0" rtl="0" algn="l">
+            <a:pPr marL="0" lvl="0" indent="0" algn="l" rtl="0">
               <a:spcBef>
                 <a:spcPts val="0"/>
               </a:spcBef>
@@ -2780,9 +2903,6 @@
               </a:spcAft>
               <a:buNone/>
             </a:pPr>
-            <a:r>
-              <a:t/>
-            </a:r>
             <a:endParaRPr/>
           </a:p>
         </p:txBody>
@@ -2796,11 +2916,11 @@
 </file>
 
 <file path=ppt/notesSlides/notesSlide9.xml><?xml version="1.0" encoding="utf-8"?>
-<p:notes xmlns:a="http://schemas.openxmlformats.org/drawingml/2006/main" xmlns:r="http://schemas.openxmlformats.org/officeDocument/2006/relationships" xmlns:mc="http://schemas.openxmlformats.org/markup-compatibility/2006" xmlns:mv="urn:schemas-microsoft-com:mac:vml" xmlns:p="http://schemas.openxmlformats.org/presentationml/2006/main" xmlns:c="http://schemas.openxmlformats.org/drawingml/2006/chart" xmlns:dgm="http://schemas.openxmlformats.org/drawingml/2006/diagram" xmlns:o="urn:schemas-microsoft-com:office:office" xmlns:v="urn:schemas-microsoft-com:vml" xmlns:pvml="urn:schemas-microsoft-com:office:powerpoint" xmlns:com="http://schemas.openxmlformats.org/drawingml/2006/compatibility" xmlns:p14="http://schemas.microsoft.com/office/powerpoint/2010/main" xmlns:p15="http://schemas.microsoft.com/office/powerpoint/2012/main" xmlns:ahyp="http://schemas.microsoft.com/office/drawing/2018/hyperlinkcolor" showMasterPhAnim="0" showMasterSp="0">
+<p:notes xmlns:a="http://schemas.openxmlformats.org/drawingml/2006/main" xmlns:r="http://schemas.openxmlformats.org/officeDocument/2006/relationships" xmlns:p="http://schemas.openxmlformats.org/presentationml/2006/main" showMasterSp="0" showMasterPhAnim="0">
   <p:cSld>
     <p:spTree>
       <p:nvGrpSpPr>
-        <p:cNvPr id="99" name="Shape 99"/>
+        <p:cNvPr id="1" name="Shape 99"/>
         <p:cNvGrpSpPr/>
         <p:nvPr/>
       </p:nvGrpSpPr>
@@ -2815,9 +2935,11 @@
       <p:sp>
         <p:nvSpPr>
           <p:cNvPr id="100" name="Google Shape;100;g3f71289ebad_0_38:notes"/>
-          <p:cNvSpPr/>
+          <p:cNvSpPr>
+            <a:spLocks noGrp="1" noRot="1" noChangeAspect="1"/>
+          </p:cNvSpPr>
           <p:nvPr>
-            <p:ph idx="2" type="sldImg"/>
+            <p:ph type="sldImg" idx="2"/>
           </p:nvPr>
         </p:nvSpPr>
         <p:spPr>
@@ -2826,9 +2948,13 @@
             <a:ext cx="6096000" cy="3429000"/>
           </a:xfrm>
           <a:custGeom>
-            <a:rect b="b" l="l" r="r" t="t"/>
+            <a:avLst/>
+            <a:gdLst/>
+            <a:ahLst/>
+            <a:cxnLst/>
+            <a:rect l="l" t="t" r="r" b="b"/>
             <a:pathLst>
-              <a:path extrusionOk="0" h="120000" w="120000">
+              <a:path w="120000" h="120000" extrusionOk="0">
                 <a:moveTo>
                   <a:pt x="0" y="0"/>
                 </a:moveTo>
@@ -2850,9 +2976,11 @@
       <p:sp>
         <p:nvSpPr>
           <p:cNvPr id="101" name="Google Shape;101;g3f71289ebad_0_38:notes"/>
-          <p:cNvSpPr txBox="1"/>
+          <p:cNvSpPr txBox="1">
+            <a:spLocks noGrp="1"/>
+          </p:cNvSpPr>
           <p:nvPr>
-            <p:ph idx="1" type="body"/>
+            <p:ph type="body" idx="1"/>
           </p:nvPr>
         </p:nvSpPr>
         <p:spPr>
@@ -2865,12 +2993,12 @@
           </a:prstGeom>
         </p:spPr>
         <p:txBody>
-          <a:bodyPr anchorCtr="0" anchor="t" bIns="91425" lIns="91425" spcFirstLastPara="1" rIns="91425" wrap="square" tIns="91425">
+          <a:bodyPr spcFirstLastPara="1" wrap="square" lIns="91425" tIns="91425" rIns="91425" bIns="91425" anchor="t" anchorCtr="0">
             <a:noAutofit/>
           </a:bodyPr>
           <a:lstStyle/>
           <a:p>
-            <a:pPr indent="0" lvl="0" marL="0" rtl="0" algn="l">
+            <a:pPr marL="0" lvl="0" indent="0" algn="l" rtl="0">
               <a:spcBef>
                 <a:spcPts val="0"/>
               </a:spcBef>
@@ -2879,9 +3007,6 @@
               </a:spcAft>
               <a:buNone/>
             </a:pPr>
-            <a:r>
-              <a:t/>
-            </a:r>
             <a:endParaRPr/>
           </a:p>
         </p:txBody>
@@ -2895,11 +3020,11 @@
 </file>
 
 <file path=ppt/slideLayouts/slideLayout1.xml><?xml version="1.0" encoding="utf-8"?>
-<p:sldLayout xmlns:a="http://schemas.openxmlformats.org/drawingml/2006/main" xmlns:r="http://schemas.openxmlformats.org/officeDocument/2006/relationships" xmlns:mc="http://schemas.openxmlformats.org/markup-compatibility/2006" xmlns:mv="urn:schemas-microsoft-com:mac:vml" xmlns:p="http://schemas.openxmlformats.org/presentationml/2006/main" xmlns:c="http://schemas.openxmlformats.org/drawingml/2006/chart" xmlns:dgm="http://schemas.openxmlformats.org/drawingml/2006/diagram" xmlns:o="urn:schemas-microsoft-com:office:office" xmlns:v="urn:schemas-microsoft-com:vml" xmlns:pvml="urn:schemas-microsoft-com:office:powerpoint" xmlns:com="http://schemas.openxmlformats.org/drawingml/2006/compatibility" xmlns:p14="http://schemas.microsoft.com/office/powerpoint/2010/main" xmlns:p15="http://schemas.microsoft.com/office/powerpoint/2012/main" xmlns:ahyp="http://schemas.microsoft.com/office/drawing/2018/hyperlinkcolor" matchingName="Title slide" type="title">
+<p:sldLayout xmlns:a="http://schemas.openxmlformats.org/drawingml/2006/main" xmlns:r="http://schemas.openxmlformats.org/officeDocument/2006/relationships" xmlns:p="http://schemas.openxmlformats.org/presentationml/2006/main" matchingName="Title slide" type="title">
   <p:cSld name="TITLE">
     <p:spTree>
       <p:nvGrpSpPr>
-        <p:cNvPr id="9" name="Shape 9"/>
+        <p:cNvPr id="1" name="Shape 9"/>
         <p:cNvGrpSpPr/>
         <p:nvPr/>
       </p:nvGrpSpPr>
@@ -2914,7 +3039,9 @@
       <p:sp>
         <p:nvSpPr>
           <p:cNvPr id="10" name="Google Shape;10;p2"/>
-          <p:cNvSpPr txBox="1"/>
+          <p:cNvSpPr txBox="1">
+            <a:spLocks noGrp="1"/>
+          </p:cNvSpPr>
           <p:nvPr>
             <p:ph type="ctrTitle"/>
           </p:nvPr>
@@ -2929,7 +3056,7 @@
           </a:prstGeom>
         </p:spPr>
         <p:txBody>
-          <a:bodyPr anchorCtr="0" anchor="b" bIns="91425" lIns="91425" spcFirstLastPara="1" rIns="91425" wrap="square" tIns="91425">
+          <a:bodyPr spcFirstLastPara="1" wrap="square" lIns="91425" tIns="91425" rIns="91425" bIns="91425" anchor="b" anchorCtr="0">
             <a:normAutofit/>
           </a:bodyPr>
           <a:lstStyle>
@@ -3033,15 +3160,19 @@
               <a:defRPr sz="5200"/>
             </a:lvl9pPr>
           </a:lstStyle>
-          <a:p/>
+          <a:p>
+            <a:endParaRPr/>
+          </a:p>
         </p:txBody>
       </p:sp>
       <p:sp>
         <p:nvSpPr>
           <p:cNvPr id="11" name="Google Shape;11;p2"/>
-          <p:cNvSpPr txBox="1"/>
+          <p:cNvSpPr txBox="1">
+            <a:spLocks noGrp="1"/>
+          </p:cNvSpPr>
           <p:nvPr>
-            <p:ph idx="1" type="subTitle"/>
+            <p:ph type="subTitle" idx="1"/>
           </p:nvPr>
         </p:nvSpPr>
         <p:spPr>
@@ -3054,7 +3185,7 @@
           </a:prstGeom>
         </p:spPr>
         <p:txBody>
-          <a:bodyPr anchorCtr="0" anchor="t" bIns="91425" lIns="91425" spcFirstLastPara="1" rIns="91425" wrap="square" tIns="91425">
+          <a:bodyPr spcFirstLastPara="1" wrap="square" lIns="91425" tIns="91425" rIns="91425" bIns="91425" anchor="t" anchorCtr="0">
             <a:normAutofit/>
           </a:bodyPr>
           <a:lstStyle>
@@ -3185,15 +3316,19 @@
               <a:defRPr sz="2800"/>
             </a:lvl9pPr>
           </a:lstStyle>
-          <a:p/>
+          <a:p>
+            <a:endParaRPr/>
+          </a:p>
         </p:txBody>
       </p:sp>
       <p:sp>
         <p:nvSpPr>
           <p:cNvPr id="12" name="Google Shape;12;p2"/>
-          <p:cNvSpPr txBox="1"/>
+          <p:cNvSpPr txBox="1">
+            <a:spLocks noGrp="1"/>
+          </p:cNvSpPr>
           <p:nvPr>
-            <p:ph idx="12" type="sldNum"/>
+            <p:ph type="sldNum" idx="12"/>
           </p:nvPr>
         </p:nvSpPr>
         <p:spPr>
@@ -3206,7 +3341,7 @@
           </a:prstGeom>
         </p:spPr>
         <p:txBody>
-          <a:bodyPr anchorCtr="0" anchor="ctr" bIns="91425" lIns="91425" spcFirstLastPara="1" rIns="91425" wrap="square" tIns="91425">
+          <a:bodyPr spcFirstLastPara="1" wrap="square" lIns="91425" tIns="91425" rIns="91425" bIns="91425" anchor="ctr" anchorCtr="0">
             <a:normAutofit/>
           </a:bodyPr>
           <a:lstStyle>
@@ -3248,7 +3383,7 @@
             </a:lvl9pPr>
           </a:lstStyle>
           <a:p>
-            <a:pPr indent="0" lvl="0" marL="0" rtl="0" algn="r">
+            <a:pPr marL="0" lvl="0" indent="0" algn="r" rtl="0">
               <a:spcBef>
                 <a:spcPts val="0"/>
               </a:spcBef>
@@ -3274,11 +3409,11 @@
 </file>
 
 <file path=ppt/slideLayouts/slideLayout10.xml><?xml version="1.0" encoding="utf-8"?>
-<p:sldLayout xmlns:a="http://schemas.openxmlformats.org/drawingml/2006/main" xmlns:r="http://schemas.openxmlformats.org/officeDocument/2006/relationships" xmlns:mc="http://schemas.openxmlformats.org/markup-compatibility/2006" xmlns:mv="urn:schemas-microsoft-com:mac:vml" xmlns:p="http://schemas.openxmlformats.org/presentationml/2006/main" xmlns:c="http://schemas.openxmlformats.org/drawingml/2006/chart" xmlns:dgm="http://schemas.openxmlformats.org/drawingml/2006/diagram" xmlns:o="urn:schemas-microsoft-com:office:office" xmlns:v="urn:schemas-microsoft-com:vml" xmlns:pvml="urn:schemas-microsoft-com:office:powerpoint" xmlns:com="http://schemas.openxmlformats.org/drawingml/2006/compatibility" xmlns:p14="http://schemas.microsoft.com/office/powerpoint/2010/main" xmlns:p15="http://schemas.microsoft.com/office/powerpoint/2012/main" xmlns:ahyp="http://schemas.microsoft.com/office/drawing/2018/hyperlinkcolor" matchingName="Big number">
+<p:sldLayout xmlns:a="http://schemas.openxmlformats.org/drawingml/2006/main" xmlns:r="http://schemas.openxmlformats.org/officeDocument/2006/relationships" xmlns:p="http://schemas.openxmlformats.org/presentationml/2006/main" matchingName="Big number">
   <p:cSld name="BIG_NUMBER">
     <p:spTree>
       <p:nvGrpSpPr>
-        <p:cNvPr id="44" name="Shape 44"/>
+        <p:cNvPr id="1" name="Shape 44"/>
         <p:cNvGrpSpPr/>
         <p:nvPr/>
       </p:nvGrpSpPr>
@@ -3293,9 +3428,11 @@
       <p:sp>
         <p:nvSpPr>
           <p:cNvPr id="45" name="Google Shape;45;p11"/>
-          <p:cNvSpPr txBox="1"/>
+          <p:cNvSpPr txBox="1">
+            <a:spLocks noGrp="1"/>
+          </p:cNvSpPr>
           <p:nvPr>
-            <p:ph hasCustomPrompt="1" type="title"/>
+            <p:ph type="title" hasCustomPrompt="1"/>
           </p:nvPr>
         </p:nvSpPr>
         <p:spPr>
@@ -3308,7 +3445,7 @@
           </a:prstGeom>
         </p:spPr>
         <p:txBody>
-          <a:bodyPr anchorCtr="0" anchor="b" bIns="91425" lIns="91425" spcFirstLastPara="1" rIns="91425" wrap="square" tIns="91425">
+          <a:bodyPr spcFirstLastPara="1" wrap="square" lIns="91425" tIns="91425" rIns="91425" bIns="91425" anchor="b" anchorCtr="0">
             <a:normAutofit/>
           </a:bodyPr>
           <a:lstStyle>
@@ -3422,9 +3559,11 @@
       <p:sp>
         <p:nvSpPr>
           <p:cNvPr id="46" name="Google Shape;46;p11"/>
-          <p:cNvSpPr txBox="1"/>
+          <p:cNvSpPr txBox="1">
+            <a:spLocks noGrp="1"/>
+          </p:cNvSpPr>
           <p:nvPr>
-            <p:ph idx="1" type="body"/>
+            <p:ph type="body" idx="1"/>
           </p:nvPr>
         </p:nvSpPr>
         <p:spPr>
@@ -3437,11 +3576,11 @@
           </a:prstGeom>
         </p:spPr>
         <p:txBody>
-          <a:bodyPr anchorCtr="0" anchor="t" bIns="91425" lIns="91425" spcFirstLastPara="1" rIns="91425" wrap="square" tIns="91425">
+          <a:bodyPr spcFirstLastPara="1" wrap="square" lIns="91425" tIns="91425" rIns="91425" bIns="91425" anchor="t" anchorCtr="0">
             <a:normAutofit/>
           </a:bodyPr>
           <a:lstStyle>
-            <a:lvl1pPr indent="-342900" lvl="0" marL="457200" algn="ctr">
+            <a:lvl1pPr marL="457200" lvl="0" indent="-342900" algn="ctr">
               <a:spcBef>
                 <a:spcPts val="0"/>
               </a:spcBef>
@@ -3452,7 +3591,7 @@
               <a:buChar char="●"/>
               <a:defRPr/>
             </a:lvl1pPr>
-            <a:lvl2pPr indent="-317500" lvl="1" marL="914400" algn="ctr">
+            <a:lvl2pPr marL="914400" lvl="1" indent="-317500" algn="ctr">
               <a:spcBef>
                 <a:spcPts val="0"/>
               </a:spcBef>
@@ -3463,7 +3602,7 @@
               <a:buChar char="○"/>
               <a:defRPr/>
             </a:lvl2pPr>
-            <a:lvl3pPr indent="-317500" lvl="2" marL="1371600" algn="ctr">
+            <a:lvl3pPr marL="1371600" lvl="2" indent="-317500" algn="ctr">
               <a:spcBef>
                 <a:spcPts val="0"/>
               </a:spcBef>
@@ -3474,7 +3613,7 @@
               <a:buChar char="■"/>
               <a:defRPr/>
             </a:lvl3pPr>
-            <a:lvl4pPr indent="-317500" lvl="3" marL="1828800" algn="ctr">
+            <a:lvl4pPr marL="1828800" lvl="3" indent="-317500" algn="ctr">
               <a:spcBef>
                 <a:spcPts val="0"/>
               </a:spcBef>
@@ -3485,7 +3624,7 @@
               <a:buChar char="●"/>
               <a:defRPr/>
             </a:lvl4pPr>
-            <a:lvl5pPr indent="-317500" lvl="4" marL="2286000" algn="ctr">
+            <a:lvl5pPr marL="2286000" lvl="4" indent="-317500" algn="ctr">
               <a:spcBef>
                 <a:spcPts val="0"/>
               </a:spcBef>
@@ -3496,7 +3635,7 @@
               <a:buChar char="○"/>
               <a:defRPr/>
             </a:lvl5pPr>
-            <a:lvl6pPr indent="-317500" lvl="5" marL="2743200" algn="ctr">
+            <a:lvl6pPr marL="2743200" lvl="5" indent="-317500" algn="ctr">
               <a:spcBef>
                 <a:spcPts val="0"/>
               </a:spcBef>
@@ -3507,7 +3646,7 @@
               <a:buChar char="■"/>
               <a:defRPr/>
             </a:lvl6pPr>
-            <a:lvl7pPr indent="-317500" lvl="6" marL="3200400" algn="ctr">
+            <a:lvl7pPr marL="3200400" lvl="6" indent="-317500" algn="ctr">
               <a:spcBef>
                 <a:spcPts val="0"/>
               </a:spcBef>
@@ -3518,7 +3657,7 @@
               <a:buChar char="●"/>
               <a:defRPr/>
             </a:lvl7pPr>
-            <a:lvl8pPr indent="-317500" lvl="7" marL="3657600" algn="ctr">
+            <a:lvl8pPr marL="3657600" lvl="7" indent="-317500" algn="ctr">
               <a:spcBef>
                 <a:spcPts val="0"/>
               </a:spcBef>
@@ -3529,7 +3668,7 @@
               <a:buChar char="○"/>
               <a:defRPr/>
             </a:lvl8pPr>
-            <a:lvl9pPr indent="-317500" lvl="8" marL="4114800" algn="ctr">
+            <a:lvl9pPr marL="4114800" lvl="8" indent="-317500" algn="ctr">
               <a:spcBef>
                 <a:spcPts val="0"/>
               </a:spcBef>
@@ -3541,15 +3680,19 @@
               <a:defRPr/>
             </a:lvl9pPr>
           </a:lstStyle>
-          <a:p/>
+          <a:p>
+            <a:endParaRPr/>
+          </a:p>
         </p:txBody>
       </p:sp>
       <p:sp>
         <p:nvSpPr>
           <p:cNvPr id="47" name="Google Shape;47;p11"/>
-          <p:cNvSpPr txBox="1"/>
+          <p:cNvSpPr txBox="1">
+            <a:spLocks noGrp="1"/>
+          </p:cNvSpPr>
           <p:nvPr>
-            <p:ph idx="12" type="sldNum"/>
+            <p:ph type="sldNum" idx="12"/>
           </p:nvPr>
         </p:nvSpPr>
         <p:spPr>
@@ -3562,7 +3705,7 @@
           </a:prstGeom>
         </p:spPr>
         <p:txBody>
-          <a:bodyPr anchorCtr="0" anchor="ctr" bIns="91425" lIns="91425" spcFirstLastPara="1" rIns="91425" wrap="square" tIns="91425">
+          <a:bodyPr spcFirstLastPara="1" wrap="square" lIns="91425" tIns="91425" rIns="91425" bIns="91425" anchor="ctr" anchorCtr="0">
             <a:normAutofit/>
           </a:bodyPr>
           <a:lstStyle>
@@ -3604,7 +3747,7 @@
             </a:lvl9pPr>
           </a:lstStyle>
           <a:p>
-            <a:pPr indent="0" lvl="0" marL="0" rtl="0" algn="r">
+            <a:pPr marL="0" lvl="0" indent="0" algn="r" rtl="0">
               <a:spcBef>
                 <a:spcPts val="0"/>
               </a:spcBef>
@@ -3630,11 +3773,11 @@
 </file>
 
 <file path=ppt/slideLayouts/slideLayout11.xml><?xml version="1.0" encoding="utf-8"?>
-<p:sldLayout xmlns:a="http://schemas.openxmlformats.org/drawingml/2006/main" xmlns:r="http://schemas.openxmlformats.org/officeDocument/2006/relationships" xmlns:mc="http://schemas.openxmlformats.org/markup-compatibility/2006" xmlns:mv="urn:schemas-microsoft-com:mac:vml" xmlns:p="http://schemas.openxmlformats.org/presentationml/2006/main" xmlns:c="http://schemas.openxmlformats.org/drawingml/2006/chart" xmlns:dgm="http://schemas.openxmlformats.org/drawingml/2006/diagram" xmlns:o="urn:schemas-microsoft-com:office:office" xmlns:v="urn:schemas-microsoft-com:vml" xmlns:pvml="urn:schemas-microsoft-com:office:powerpoint" xmlns:com="http://schemas.openxmlformats.org/drawingml/2006/compatibility" xmlns:p14="http://schemas.microsoft.com/office/powerpoint/2010/main" xmlns:p15="http://schemas.microsoft.com/office/powerpoint/2012/main" xmlns:ahyp="http://schemas.microsoft.com/office/drawing/2018/hyperlinkcolor" matchingName="Blank" type="blank">
+<p:sldLayout xmlns:a="http://schemas.openxmlformats.org/drawingml/2006/main" xmlns:r="http://schemas.openxmlformats.org/officeDocument/2006/relationships" xmlns:p="http://schemas.openxmlformats.org/presentationml/2006/main" matchingName="Blank" type="blank">
   <p:cSld name="BLANK">
     <p:spTree>
       <p:nvGrpSpPr>
-        <p:cNvPr id="48" name="Shape 48"/>
+        <p:cNvPr id="1" name="Shape 48"/>
         <p:cNvGrpSpPr/>
         <p:nvPr/>
       </p:nvGrpSpPr>
@@ -3649,9 +3792,11 @@
       <p:sp>
         <p:nvSpPr>
           <p:cNvPr id="49" name="Google Shape;49;p12"/>
-          <p:cNvSpPr txBox="1"/>
+          <p:cNvSpPr txBox="1">
+            <a:spLocks noGrp="1"/>
+          </p:cNvSpPr>
           <p:nvPr>
-            <p:ph idx="12" type="sldNum"/>
+            <p:ph type="sldNum" idx="12"/>
           </p:nvPr>
         </p:nvSpPr>
         <p:spPr>
@@ -3664,7 +3809,7 @@
           </a:prstGeom>
         </p:spPr>
         <p:txBody>
-          <a:bodyPr anchorCtr="0" anchor="ctr" bIns="91425" lIns="91425" spcFirstLastPara="1" rIns="91425" wrap="square" tIns="91425">
+          <a:bodyPr spcFirstLastPara="1" wrap="square" lIns="91425" tIns="91425" rIns="91425" bIns="91425" anchor="ctr" anchorCtr="0">
             <a:normAutofit/>
           </a:bodyPr>
           <a:lstStyle>
@@ -3706,7 +3851,7 @@
             </a:lvl9pPr>
           </a:lstStyle>
           <a:p>
-            <a:pPr indent="0" lvl="0" marL="0" rtl="0" algn="r">
+            <a:pPr marL="0" lvl="0" indent="0" algn="r" rtl="0">
               <a:spcBef>
                 <a:spcPts val="0"/>
               </a:spcBef>
@@ -3732,11 +3877,11 @@
 </file>
 
 <file path=ppt/slideLayouts/slideLayout2.xml><?xml version="1.0" encoding="utf-8"?>
-<p:sldLayout xmlns:a="http://schemas.openxmlformats.org/drawingml/2006/main" xmlns:r="http://schemas.openxmlformats.org/officeDocument/2006/relationships" xmlns:mc="http://schemas.openxmlformats.org/markup-compatibility/2006" xmlns:mv="urn:schemas-microsoft-com:mac:vml" xmlns:p="http://schemas.openxmlformats.org/presentationml/2006/main" xmlns:c="http://schemas.openxmlformats.org/drawingml/2006/chart" xmlns:dgm="http://schemas.openxmlformats.org/drawingml/2006/diagram" xmlns:o="urn:schemas-microsoft-com:office:office" xmlns:v="urn:schemas-microsoft-com:vml" xmlns:pvml="urn:schemas-microsoft-com:office:powerpoint" xmlns:com="http://schemas.openxmlformats.org/drawingml/2006/compatibility" xmlns:p14="http://schemas.microsoft.com/office/powerpoint/2010/main" xmlns:p15="http://schemas.microsoft.com/office/powerpoint/2012/main" xmlns:ahyp="http://schemas.microsoft.com/office/drawing/2018/hyperlinkcolor" matchingName="Section header" type="secHead">
+<p:sldLayout xmlns:a="http://schemas.openxmlformats.org/drawingml/2006/main" xmlns:r="http://schemas.openxmlformats.org/officeDocument/2006/relationships" xmlns:p="http://schemas.openxmlformats.org/presentationml/2006/main" matchingName="Section header" type="secHead">
   <p:cSld name="SECTION_HEADER">
     <p:spTree>
       <p:nvGrpSpPr>
-        <p:cNvPr id="13" name="Shape 13"/>
+        <p:cNvPr id="1" name="Shape 13"/>
         <p:cNvGrpSpPr/>
         <p:nvPr/>
       </p:nvGrpSpPr>
@@ -3751,7 +3896,9 @@
       <p:sp>
         <p:nvSpPr>
           <p:cNvPr id="14" name="Google Shape;14;p3"/>
-          <p:cNvSpPr txBox="1"/>
+          <p:cNvSpPr txBox="1">
+            <a:spLocks noGrp="1"/>
+          </p:cNvSpPr>
           <p:nvPr>
             <p:ph type="title"/>
           </p:nvPr>
@@ -3766,7 +3913,7 @@
           </a:prstGeom>
         </p:spPr>
         <p:txBody>
-          <a:bodyPr anchorCtr="0" anchor="ctr" bIns="91425" lIns="91425" spcFirstLastPara="1" rIns="91425" wrap="square" tIns="91425">
+          <a:bodyPr spcFirstLastPara="1" wrap="square" lIns="91425" tIns="91425" rIns="91425" bIns="91425" anchor="ctr" anchorCtr="0">
             <a:normAutofit/>
           </a:bodyPr>
           <a:lstStyle>
@@ -3870,15 +4017,19 @@
               <a:defRPr sz="3600"/>
             </a:lvl9pPr>
           </a:lstStyle>
-          <a:p/>
+          <a:p>
+            <a:endParaRPr/>
+          </a:p>
         </p:txBody>
       </p:sp>
       <p:sp>
         <p:nvSpPr>
           <p:cNvPr id="15" name="Google Shape;15;p3"/>
-          <p:cNvSpPr txBox="1"/>
+          <p:cNvSpPr txBox="1">
+            <a:spLocks noGrp="1"/>
+          </p:cNvSpPr>
           <p:nvPr>
-            <p:ph idx="12" type="sldNum"/>
+            <p:ph type="sldNum" idx="12"/>
           </p:nvPr>
         </p:nvSpPr>
         <p:spPr>
@@ -3891,7 +4042,7 @@
           </a:prstGeom>
         </p:spPr>
         <p:txBody>
-          <a:bodyPr anchorCtr="0" anchor="ctr" bIns="91425" lIns="91425" spcFirstLastPara="1" rIns="91425" wrap="square" tIns="91425">
+          <a:bodyPr spcFirstLastPara="1" wrap="square" lIns="91425" tIns="91425" rIns="91425" bIns="91425" anchor="ctr" anchorCtr="0">
             <a:normAutofit/>
           </a:bodyPr>
           <a:lstStyle>
@@ -3933,7 +4084,7 @@
             </a:lvl9pPr>
           </a:lstStyle>
           <a:p>
-            <a:pPr indent="0" lvl="0" marL="0" rtl="0" algn="r">
+            <a:pPr marL="0" lvl="0" indent="0" algn="r" rtl="0">
               <a:spcBef>
                 <a:spcPts val="0"/>
               </a:spcBef>
@@ -3959,11 +4110,11 @@
 </file>
 
 <file path=ppt/slideLayouts/slideLayout3.xml><?xml version="1.0" encoding="utf-8"?>
-<p:sldLayout xmlns:a="http://schemas.openxmlformats.org/drawingml/2006/main" xmlns:r="http://schemas.openxmlformats.org/officeDocument/2006/relationships" xmlns:mc="http://schemas.openxmlformats.org/markup-compatibility/2006" xmlns:mv="urn:schemas-microsoft-com:mac:vml" xmlns:p="http://schemas.openxmlformats.org/presentationml/2006/main" xmlns:c="http://schemas.openxmlformats.org/drawingml/2006/chart" xmlns:dgm="http://schemas.openxmlformats.org/drawingml/2006/diagram" xmlns:o="urn:schemas-microsoft-com:office:office" xmlns:v="urn:schemas-microsoft-com:vml" xmlns:pvml="urn:schemas-microsoft-com:office:powerpoint" xmlns:com="http://schemas.openxmlformats.org/drawingml/2006/compatibility" xmlns:p14="http://schemas.microsoft.com/office/powerpoint/2010/main" xmlns:p15="http://schemas.microsoft.com/office/powerpoint/2012/main" xmlns:ahyp="http://schemas.microsoft.com/office/drawing/2018/hyperlinkcolor" matchingName="Title and body" type="tx">
+<p:sldLayout xmlns:a="http://schemas.openxmlformats.org/drawingml/2006/main" xmlns:r="http://schemas.openxmlformats.org/officeDocument/2006/relationships" xmlns:p="http://schemas.openxmlformats.org/presentationml/2006/main" matchingName="Title and body" type="tx">
   <p:cSld name="TITLE_AND_BODY">
     <p:spTree>
       <p:nvGrpSpPr>
-        <p:cNvPr id="16" name="Shape 16"/>
+        <p:cNvPr id="1" name="Shape 16"/>
         <p:cNvGrpSpPr/>
         <p:nvPr/>
       </p:nvGrpSpPr>
@@ -3978,7 +4129,9 @@
       <p:sp>
         <p:nvSpPr>
           <p:cNvPr id="17" name="Google Shape;17;p4"/>
-          <p:cNvSpPr txBox="1"/>
+          <p:cNvSpPr txBox="1">
+            <a:spLocks noGrp="1"/>
+          </p:cNvSpPr>
           <p:nvPr>
             <p:ph type="title"/>
           </p:nvPr>
@@ -3993,7 +4146,7 @@
           </a:prstGeom>
         </p:spPr>
         <p:txBody>
-          <a:bodyPr anchorCtr="0" anchor="t" bIns="91425" lIns="91425" spcFirstLastPara="1" rIns="91425" wrap="square" tIns="91425">
+          <a:bodyPr spcFirstLastPara="1" wrap="square" lIns="91425" tIns="91425" rIns="91425" bIns="91425" anchor="t" anchorCtr="0">
             <a:normAutofit/>
           </a:bodyPr>
           <a:lstStyle>
@@ -4097,15 +4250,19 @@
               <a:defRPr/>
             </a:lvl9pPr>
           </a:lstStyle>
-          <a:p/>
+          <a:p>
+            <a:endParaRPr/>
+          </a:p>
         </p:txBody>
       </p:sp>
       <p:sp>
         <p:nvSpPr>
           <p:cNvPr id="18" name="Google Shape;18;p4"/>
-          <p:cNvSpPr txBox="1"/>
+          <p:cNvSpPr txBox="1">
+            <a:spLocks noGrp="1"/>
+          </p:cNvSpPr>
           <p:nvPr>
-            <p:ph idx="1" type="body"/>
+            <p:ph type="body" idx="1"/>
           </p:nvPr>
         </p:nvSpPr>
         <p:spPr>
@@ -4118,11 +4275,11 @@
           </a:prstGeom>
         </p:spPr>
         <p:txBody>
-          <a:bodyPr anchorCtr="0" anchor="t" bIns="91425" lIns="91425" spcFirstLastPara="1" rIns="91425" wrap="square" tIns="91425">
+          <a:bodyPr spcFirstLastPara="1" wrap="square" lIns="91425" tIns="91425" rIns="91425" bIns="91425" anchor="t" anchorCtr="0">
             <a:normAutofit/>
           </a:bodyPr>
           <a:lstStyle>
-            <a:lvl1pPr indent="-342900" lvl="0" marL="457200">
+            <a:lvl1pPr marL="457200" lvl="0" indent="-342900">
               <a:spcBef>
                 <a:spcPts val="0"/>
               </a:spcBef>
@@ -4133,7 +4290,7 @@
               <a:buChar char="●"/>
               <a:defRPr/>
             </a:lvl1pPr>
-            <a:lvl2pPr indent="-317500" lvl="1" marL="914400">
+            <a:lvl2pPr marL="914400" lvl="1" indent="-317500">
               <a:spcBef>
                 <a:spcPts val="0"/>
               </a:spcBef>
@@ -4144,7 +4301,7 @@
               <a:buChar char="○"/>
               <a:defRPr/>
             </a:lvl2pPr>
-            <a:lvl3pPr indent="-317500" lvl="2" marL="1371600">
+            <a:lvl3pPr marL="1371600" lvl="2" indent="-317500">
               <a:spcBef>
                 <a:spcPts val="0"/>
               </a:spcBef>
@@ -4155,7 +4312,7 @@
               <a:buChar char="■"/>
               <a:defRPr/>
             </a:lvl3pPr>
-            <a:lvl4pPr indent="-317500" lvl="3" marL="1828800">
+            <a:lvl4pPr marL="1828800" lvl="3" indent="-317500">
               <a:spcBef>
                 <a:spcPts val="0"/>
               </a:spcBef>
@@ -4166,7 +4323,7 @@
               <a:buChar char="●"/>
               <a:defRPr/>
             </a:lvl4pPr>
-            <a:lvl5pPr indent="-317500" lvl="4" marL="2286000">
+            <a:lvl5pPr marL="2286000" lvl="4" indent="-317500">
               <a:spcBef>
                 <a:spcPts val="0"/>
               </a:spcBef>
@@ -4177,7 +4334,7 @@
               <a:buChar char="○"/>
               <a:defRPr/>
             </a:lvl5pPr>
-            <a:lvl6pPr indent="-317500" lvl="5" marL="2743200">
+            <a:lvl6pPr marL="2743200" lvl="5" indent="-317500">
               <a:spcBef>
                 <a:spcPts val="0"/>
               </a:spcBef>
@@ -4188,7 +4345,7 @@
               <a:buChar char="■"/>
               <a:defRPr/>
             </a:lvl6pPr>
-            <a:lvl7pPr indent="-317500" lvl="6" marL="3200400">
+            <a:lvl7pPr marL="3200400" lvl="6" indent="-317500">
               <a:spcBef>
                 <a:spcPts val="0"/>
               </a:spcBef>
@@ -4199,7 +4356,7 @@
               <a:buChar char="●"/>
               <a:defRPr/>
             </a:lvl7pPr>
-            <a:lvl8pPr indent="-317500" lvl="7" marL="3657600">
+            <a:lvl8pPr marL="3657600" lvl="7" indent="-317500">
               <a:spcBef>
                 <a:spcPts val="0"/>
               </a:spcBef>
@@ -4210,7 +4367,7 @@
               <a:buChar char="○"/>
               <a:defRPr/>
             </a:lvl8pPr>
-            <a:lvl9pPr indent="-317500" lvl="8" marL="4114800">
+            <a:lvl9pPr marL="4114800" lvl="8" indent="-317500">
               <a:spcBef>
                 <a:spcPts val="0"/>
               </a:spcBef>
@@ -4222,15 +4379,19 @@
               <a:defRPr/>
             </a:lvl9pPr>
           </a:lstStyle>
-          <a:p/>
+          <a:p>
+            <a:endParaRPr/>
+          </a:p>
         </p:txBody>
       </p:sp>
       <p:sp>
         <p:nvSpPr>
           <p:cNvPr id="19" name="Google Shape;19;p4"/>
-          <p:cNvSpPr txBox="1"/>
+          <p:cNvSpPr txBox="1">
+            <a:spLocks noGrp="1"/>
+          </p:cNvSpPr>
           <p:nvPr>
-            <p:ph idx="12" type="sldNum"/>
+            <p:ph type="sldNum" idx="12"/>
           </p:nvPr>
         </p:nvSpPr>
         <p:spPr>
@@ -4243,7 +4404,7 @@
           </a:prstGeom>
         </p:spPr>
         <p:txBody>
-          <a:bodyPr anchorCtr="0" anchor="ctr" bIns="91425" lIns="91425" spcFirstLastPara="1" rIns="91425" wrap="square" tIns="91425">
+          <a:bodyPr spcFirstLastPara="1" wrap="square" lIns="91425" tIns="91425" rIns="91425" bIns="91425" anchor="ctr" anchorCtr="0">
             <a:normAutofit/>
           </a:bodyPr>
           <a:lstStyle>
@@ -4285,7 +4446,7 @@
             </a:lvl9pPr>
           </a:lstStyle>
           <a:p>
-            <a:pPr indent="0" lvl="0" marL="0" rtl="0" algn="r">
+            <a:pPr marL="0" lvl="0" indent="0" algn="r" rtl="0">
               <a:spcBef>
                 <a:spcPts val="0"/>
               </a:spcBef>
@@ -4311,11 +4472,11 @@
 </file>
 
 <file path=ppt/slideLayouts/slideLayout4.xml><?xml version="1.0" encoding="utf-8"?>
-<p:sldLayout xmlns:a="http://schemas.openxmlformats.org/drawingml/2006/main" xmlns:r="http://schemas.openxmlformats.org/officeDocument/2006/relationships" xmlns:mc="http://schemas.openxmlformats.org/markup-compatibility/2006" xmlns:mv="urn:schemas-microsoft-com:mac:vml" xmlns:p="http://schemas.openxmlformats.org/presentationml/2006/main" xmlns:c="http://schemas.openxmlformats.org/drawingml/2006/chart" xmlns:dgm="http://schemas.openxmlformats.org/drawingml/2006/diagram" xmlns:o="urn:schemas-microsoft-com:office:office" xmlns:v="urn:schemas-microsoft-com:vml" xmlns:pvml="urn:schemas-microsoft-com:office:powerpoint" xmlns:com="http://schemas.openxmlformats.org/drawingml/2006/compatibility" xmlns:p14="http://schemas.microsoft.com/office/powerpoint/2010/main" xmlns:p15="http://schemas.microsoft.com/office/powerpoint/2012/main" xmlns:ahyp="http://schemas.microsoft.com/office/drawing/2018/hyperlinkcolor" matchingName="Title and two columns" type="twoColTx">
+<p:sldLayout xmlns:a="http://schemas.openxmlformats.org/drawingml/2006/main" xmlns:r="http://schemas.openxmlformats.org/officeDocument/2006/relationships" xmlns:p="http://schemas.openxmlformats.org/presentationml/2006/main" matchingName="Title and two columns" type="twoColTx">
   <p:cSld name="TITLE_AND_TWO_COLUMNS">
     <p:spTree>
       <p:nvGrpSpPr>
-        <p:cNvPr id="20" name="Shape 20"/>
+        <p:cNvPr id="1" name="Shape 20"/>
         <p:cNvGrpSpPr/>
         <p:nvPr/>
       </p:nvGrpSpPr>
@@ -4330,7 +4491,9 @@
       <p:sp>
         <p:nvSpPr>
           <p:cNvPr id="21" name="Google Shape;21;p5"/>
-          <p:cNvSpPr txBox="1"/>
+          <p:cNvSpPr txBox="1">
+            <a:spLocks noGrp="1"/>
+          </p:cNvSpPr>
           <p:nvPr>
             <p:ph type="title"/>
           </p:nvPr>
@@ -4345,7 +4508,7 @@
           </a:prstGeom>
         </p:spPr>
         <p:txBody>
-          <a:bodyPr anchorCtr="0" anchor="t" bIns="91425" lIns="91425" spcFirstLastPara="1" rIns="91425" wrap="square" tIns="91425">
+          <a:bodyPr spcFirstLastPara="1" wrap="square" lIns="91425" tIns="91425" rIns="91425" bIns="91425" anchor="t" anchorCtr="0">
             <a:normAutofit/>
           </a:bodyPr>
           <a:lstStyle>
@@ -4449,15 +4612,19 @@
               <a:defRPr/>
             </a:lvl9pPr>
           </a:lstStyle>
-          <a:p/>
+          <a:p>
+            <a:endParaRPr/>
+          </a:p>
         </p:txBody>
       </p:sp>
       <p:sp>
         <p:nvSpPr>
           <p:cNvPr id="22" name="Google Shape;22;p5"/>
-          <p:cNvSpPr txBox="1"/>
+          <p:cNvSpPr txBox="1">
+            <a:spLocks noGrp="1"/>
+          </p:cNvSpPr>
           <p:nvPr>
-            <p:ph idx="1" type="body"/>
+            <p:ph type="body" idx="1"/>
           </p:nvPr>
         </p:nvSpPr>
         <p:spPr>
@@ -4470,11 +4637,11 @@
           </a:prstGeom>
         </p:spPr>
         <p:txBody>
-          <a:bodyPr anchorCtr="0" anchor="t" bIns="91425" lIns="91425" spcFirstLastPara="1" rIns="91425" wrap="square" tIns="91425">
+          <a:bodyPr spcFirstLastPara="1" wrap="square" lIns="91425" tIns="91425" rIns="91425" bIns="91425" anchor="t" anchorCtr="0">
             <a:normAutofit/>
           </a:bodyPr>
           <a:lstStyle>
-            <a:lvl1pPr indent="-317500" lvl="0" marL="457200">
+            <a:lvl1pPr marL="457200" lvl="0" indent="-317500">
               <a:spcBef>
                 <a:spcPts val="0"/>
               </a:spcBef>
@@ -4485,7 +4652,7 @@
               <a:buChar char="●"/>
               <a:defRPr sz="1400"/>
             </a:lvl1pPr>
-            <a:lvl2pPr indent="-304800" lvl="1" marL="914400">
+            <a:lvl2pPr marL="914400" lvl="1" indent="-304800">
               <a:spcBef>
                 <a:spcPts val="0"/>
               </a:spcBef>
@@ -4496,7 +4663,7 @@
               <a:buChar char="○"/>
               <a:defRPr sz="1200"/>
             </a:lvl2pPr>
-            <a:lvl3pPr indent="-304800" lvl="2" marL="1371600">
+            <a:lvl3pPr marL="1371600" lvl="2" indent="-304800">
               <a:spcBef>
                 <a:spcPts val="0"/>
               </a:spcBef>
@@ -4507,7 +4674,7 @@
               <a:buChar char="■"/>
               <a:defRPr sz="1200"/>
             </a:lvl3pPr>
-            <a:lvl4pPr indent="-304800" lvl="3" marL="1828800">
+            <a:lvl4pPr marL="1828800" lvl="3" indent="-304800">
               <a:spcBef>
                 <a:spcPts val="0"/>
               </a:spcBef>
@@ -4518,7 +4685,7 @@
               <a:buChar char="●"/>
               <a:defRPr sz="1200"/>
             </a:lvl4pPr>
-            <a:lvl5pPr indent="-304800" lvl="4" marL="2286000">
+            <a:lvl5pPr marL="2286000" lvl="4" indent="-304800">
               <a:spcBef>
                 <a:spcPts val="0"/>
               </a:spcBef>
@@ -4529,7 +4696,7 @@
               <a:buChar char="○"/>
               <a:defRPr sz="1200"/>
             </a:lvl5pPr>
-            <a:lvl6pPr indent="-304800" lvl="5" marL="2743200">
+            <a:lvl6pPr marL="2743200" lvl="5" indent="-304800">
               <a:spcBef>
                 <a:spcPts val="0"/>
               </a:spcBef>
@@ -4540,7 +4707,7 @@
               <a:buChar char="■"/>
               <a:defRPr sz="1200"/>
             </a:lvl6pPr>
-            <a:lvl7pPr indent="-304800" lvl="6" marL="3200400">
+            <a:lvl7pPr marL="3200400" lvl="6" indent="-304800">
               <a:spcBef>
                 <a:spcPts val="0"/>
               </a:spcBef>
@@ -4551,7 +4718,7 @@
               <a:buChar char="●"/>
               <a:defRPr sz="1200"/>
             </a:lvl7pPr>
-            <a:lvl8pPr indent="-304800" lvl="7" marL="3657600">
+            <a:lvl8pPr marL="3657600" lvl="7" indent="-304800">
               <a:spcBef>
                 <a:spcPts val="0"/>
               </a:spcBef>
@@ -4562,7 +4729,7 @@
               <a:buChar char="○"/>
               <a:defRPr sz="1200"/>
             </a:lvl8pPr>
-            <a:lvl9pPr indent="-304800" lvl="8" marL="4114800">
+            <a:lvl9pPr marL="4114800" lvl="8" indent="-304800">
               <a:spcBef>
                 <a:spcPts val="0"/>
               </a:spcBef>
@@ -4574,15 +4741,19 @@
               <a:defRPr sz="1200"/>
             </a:lvl9pPr>
           </a:lstStyle>
-          <a:p/>
+          <a:p>
+            <a:endParaRPr/>
+          </a:p>
         </p:txBody>
       </p:sp>
       <p:sp>
         <p:nvSpPr>
           <p:cNvPr id="23" name="Google Shape;23;p5"/>
-          <p:cNvSpPr txBox="1"/>
+          <p:cNvSpPr txBox="1">
+            <a:spLocks noGrp="1"/>
+          </p:cNvSpPr>
           <p:nvPr>
-            <p:ph idx="2" type="body"/>
+            <p:ph type="body" idx="2"/>
           </p:nvPr>
         </p:nvSpPr>
         <p:spPr>
@@ -4595,11 +4766,11 @@
           </a:prstGeom>
         </p:spPr>
         <p:txBody>
-          <a:bodyPr anchorCtr="0" anchor="t" bIns="91425" lIns="91425" spcFirstLastPara="1" rIns="91425" wrap="square" tIns="91425">
+          <a:bodyPr spcFirstLastPara="1" wrap="square" lIns="91425" tIns="91425" rIns="91425" bIns="91425" anchor="t" anchorCtr="0">
             <a:normAutofit/>
           </a:bodyPr>
           <a:lstStyle>
-            <a:lvl1pPr indent="-317500" lvl="0" marL="457200">
+            <a:lvl1pPr marL="457200" lvl="0" indent="-317500">
               <a:spcBef>
                 <a:spcPts val="0"/>
               </a:spcBef>
@@ -4610,7 +4781,7 @@
               <a:buChar char="●"/>
               <a:defRPr sz="1400"/>
             </a:lvl1pPr>
-            <a:lvl2pPr indent="-304800" lvl="1" marL="914400">
+            <a:lvl2pPr marL="914400" lvl="1" indent="-304800">
               <a:spcBef>
                 <a:spcPts val="0"/>
               </a:spcBef>
@@ -4621,7 +4792,7 @@
               <a:buChar char="○"/>
               <a:defRPr sz="1200"/>
             </a:lvl2pPr>
-            <a:lvl3pPr indent="-304800" lvl="2" marL="1371600">
+            <a:lvl3pPr marL="1371600" lvl="2" indent="-304800">
               <a:spcBef>
                 <a:spcPts val="0"/>
               </a:spcBef>
@@ -4632,7 +4803,7 @@
               <a:buChar char="■"/>
               <a:defRPr sz="1200"/>
             </a:lvl3pPr>
-            <a:lvl4pPr indent="-304800" lvl="3" marL="1828800">
+            <a:lvl4pPr marL="1828800" lvl="3" indent="-304800">
               <a:spcBef>
                 <a:spcPts val="0"/>
               </a:spcBef>
@@ -4643,7 +4814,7 @@
               <a:buChar char="●"/>
               <a:defRPr sz="1200"/>
             </a:lvl4pPr>
-            <a:lvl5pPr indent="-304800" lvl="4" marL="2286000">
+            <a:lvl5pPr marL="2286000" lvl="4" indent="-304800">
               <a:spcBef>
                 <a:spcPts val="0"/>
               </a:spcBef>
@@ -4654,7 +4825,7 @@
               <a:buChar char="○"/>
               <a:defRPr sz="1200"/>
             </a:lvl5pPr>
-            <a:lvl6pPr indent="-304800" lvl="5" marL="2743200">
+            <a:lvl6pPr marL="2743200" lvl="5" indent="-304800">
               <a:spcBef>
                 <a:spcPts val="0"/>
               </a:spcBef>
@@ -4665,7 +4836,7 @@
               <a:buChar char="■"/>
               <a:defRPr sz="1200"/>
             </a:lvl6pPr>
-            <a:lvl7pPr indent="-304800" lvl="6" marL="3200400">
+            <a:lvl7pPr marL="3200400" lvl="6" indent="-304800">
               <a:spcBef>
                 <a:spcPts val="0"/>
               </a:spcBef>
@@ -4676,7 +4847,7 @@
               <a:buChar char="●"/>
               <a:defRPr sz="1200"/>
             </a:lvl7pPr>
-            <a:lvl8pPr indent="-304800" lvl="7" marL="3657600">
+            <a:lvl8pPr marL="3657600" lvl="7" indent="-304800">
               <a:spcBef>
                 <a:spcPts val="0"/>
               </a:spcBef>
@@ -4687,7 +4858,7 @@
               <a:buChar char="○"/>
               <a:defRPr sz="1200"/>
             </a:lvl8pPr>
-            <a:lvl9pPr indent="-304800" lvl="8" marL="4114800">
+            <a:lvl9pPr marL="4114800" lvl="8" indent="-304800">
               <a:spcBef>
                 <a:spcPts val="0"/>
               </a:spcBef>
@@ -4699,15 +4870,19 @@
               <a:defRPr sz="1200"/>
             </a:lvl9pPr>
           </a:lstStyle>
-          <a:p/>
+          <a:p>
+            <a:endParaRPr/>
+          </a:p>
         </p:txBody>
       </p:sp>
       <p:sp>
         <p:nvSpPr>
           <p:cNvPr id="24" name="Google Shape;24;p5"/>
-          <p:cNvSpPr txBox="1"/>
+          <p:cNvSpPr txBox="1">
+            <a:spLocks noGrp="1"/>
+          </p:cNvSpPr>
           <p:nvPr>
-            <p:ph idx="12" type="sldNum"/>
+            <p:ph type="sldNum" idx="12"/>
           </p:nvPr>
         </p:nvSpPr>
         <p:spPr>
@@ -4720,7 +4895,7 @@
           </a:prstGeom>
         </p:spPr>
         <p:txBody>
-          <a:bodyPr anchorCtr="0" anchor="ctr" bIns="91425" lIns="91425" spcFirstLastPara="1" rIns="91425" wrap="square" tIns="91425">
+          <a:bodyPr spcFirstLastPara="1" wrap="square" lIns="91425" tIns="91425" rIns="91425" bIns="91425" anchor="ctr" anchorCtr="0">
             <a:normAutofit/>
           </a:bodyPr>
           <a:lstStyle>
@@ -4762,7 +4937,7 @@
             </a:lvl9pPr>
           </a:lstStyle>
           <a:p>
-            <a:pPr indent="0" lvl="0" marL="0" rtl="0" algn="r">
+            <a:pPr marL="0" lvl="0" indent="0" algn="r" rtl="0">
               <a:spcBef>
                 <a:spcPts val="0"/>
               </a:spcBef>
@@ -4788,11 +4963,11 @@
 </file>
 
 <file path=ppt/slideLayouts/slideLayout5.xml><?xml version="1.0" encoding="utf-8"?>
-<p:sldLayout xmlns:a="http://schemas.openxmlformats.org/drawingml/2006/main" xmlns:r="http://schemas.openxmlformats.org/officeDocument/2006/relationships" xmlns:mc="http://schemas.openxmlformats.org/markup-compatibility/2006" xmlns:mv="urn:schemas-microsoft-com:mac:vml" xmlns:p="http://schemas.openxmlformats.org/presentationml/2006/main" xmlns:c="http://schemas.openxmlformats.org/drawingml/2006/chart" xmlns:dgm="http://schemas.openxmlformats.org/drawingml/2006/diagram" xmlns:o="urn:schemas-microsoft-com:office:office" xmlns:v="urn:schemas-microsoft-com:vml" xmlns:pvml="urn:schemas-microsoft-com:office:powerpoint" xmlns:com="http://schemas.openxmlformats.org/drawingml/2006/compatibility" xmlns:p14="http://schemas.microsoft.com/office/powerpoint/2010/main" xmlns:p15="http://schemas.microsoft.com/office/powerpoint/2012/main" xmlns:ahyp="http://schemas.microsoft.com/office/drawing/2018/hyperlinkcolor" matchingName="Title only" type="titleOnly">
+<p:sldLayout xmlns:a="http://schemas.openxmlformats.org/drawingml/2006/main" xmlns:r="http://schemas.openxmlformats.org/officeDocument/2006/relationships" xmlns:p="http://schemas.openxmlformats.org/presentationml/2006/main" matchingName="Title only" type="titleOnly">
   <p:cSld name="TITLE_ONLY">
     <p:spTree>
       <p:nvGrpSpPr>
-        <p:cNvPr id="25" name="Shape 25"/>
+        <p:cNvPr id="1" name="Shape 25"/>
         <p:cNvGrpSpPr/>
         <p:nvPr/>
       </p:nvGrpSpPr>
@@ -4807,7 +4982,9 @@
       <p:sp>
         <p:nvSpPr>
           <p:cNvPr id="26" name="Google Shape;26;p6"/>
-          <p:cNvSpPr txBox="1"/>
+          <p:cNvSpPr txBox="1">
+            <a:spLocks noGrp="1"/>
+          </p:cNvSpPr>
           <p:nvPr>
             <p:ph type="title"/>
           </p:nvPr>
@@ -4822,7 +4999,7 @@
           </a:prstGeom>
         </p:spPr>
         <p:txBody>
-          <a:bodyPr anchorCtr="0" anchor="t" bIns="91425" lIns="91425" spcFirstLastPara="1" rIns="91425" wrap="square" tIns="91425">
+          <a:bodyPr spcFirstLastPara="1" wrap="square" lIns="91425" tIns="91425" rIns="91425" bIns="91425" anchor="t" anchorCtr="0">
             <a:normAutofit/>
           </a:bodyPr>
           <a:lstStyle>
@@ -4926,15 +5103,19 @@
               <a:defRPr/>
             </a:lvl9pPr>
           </a:lstStyle>
-          <a:p/>
+          <a:p>
+            <a:endParaRPr/>
+          </a:p>
         </p:txBody>
       </p:sp>
       <p:sp>
         <p:nvSpPr>
           <p:cNvPr id="27" name="Google Shape;27;p6"/>
-          <p:cNvSpPr txBox="1"/>
+          <p:cNvSpPr txBox="1">
+            <a:spLocks noGrp="1"/>
+          </p:cNvSpPr>
           <p:nvPr>
-            <p:ph idx="12" type="sldNum"/>
+            <p:ph type="sldNum" idx="12"/>
           </p:nvPr>
         </p:nvSpPr>
         <p:spPr>
@@ -4947,7 +5128,7 @@
           </a:prstGeom>
         </p:spPr>
         <p:txBody>
-          <a:bodyPr anchorCtr="0" anchor="ctr" bIns="91425" lIns="91425" spcFirstLastPara="1" rIns="91425" wrap="square" tIns="91425">
+          <a:bodyPr spcFirstLastPara="1" wrap="square" lIns="91425" tIns="91425" rIns="91425" bIns="91425" anchor="ctr" anchorCtr="0">
             <a:normAutofit/>
           </a:bodyPr>
           <a:lstStyle>
@@ -4989,7 +5170,7 @@
             </a:lvl9pPr>
           </a:lstStyle>
           <a:p>
-            <a:pPr indent="0" lvl="0" marL="0" rtl="0" algn="r">
+            <a:pPr marL="0" lvl="0" indent="0" algn="r" rtl="0">
               <a:spcBef>
                 <a:spcPts val="0"/>
               </a:spcBef>
@@ -5015,11 +5196,11 @@
 </file>
 
 <file path=ppt/slideLayouts/slideLayout6.xml><?xml version="1.0" encoding="utf-8"?>
-<p:sldLayout xmlns:a="http://schemas.openxmlformats.org/drawingml/2006/main" xmlns:r="http://schemas.openxmlformats.org/officeDocument/2006/relationships" xmlns:mc="http://schemas.openxmlformats.org/markup-compatibility/2006" xmlns:mv="urn:schemas-microsoft-com:mac:vml" xmlns:p="http://schemas.openxmlformats.org/presentationml/2006/main" xmlns:c="http://schemas.openxmlformats.org/drawingml/2006/chart" xmlns:dgm="http://schemas.openxmlformats.org/drawingml/2006/diagram" xmlns:o="urn:schemas-microsoft-com:office:office" xmlns:v="urn:schemas-microsoft-com:vml" xmlns:pvml="urn:schemas-microsoft-com:office:powerpoint" xmlns:com="http://schemas.openxmlformats.org/drawingml/2006/compatibility" xmlns:p14="http://schemas.microsoft.com/office/powerpoint/2010/main" xmlns:p15="http://schemas.microsoft.com/office/powerpoint/2012/main" xmlns:ahyp="http://schemas.microsoft.com/office/drawing/2018/hyperlinkcolor" matchingName="One column text">
+<p:sldLayout xmlns:a="http://schemas.openxmlformats.org/drawingml/2006/main" xmlns:r="http://schemas.openxmlformats.org/officeDocument/2006/relationships" xmlns:p="http://schemas.openxmlformats.org/presentationml/2006/main" matchingName="One column text">
   <p:cSld name="ONE_COLUMN_TEXT">
     <p:spTree>
       <p:nvGrpSpPr>
-        <p:cNvPr id="28" name="Shape 28"/>
+        <p:cNvPr id="1" name="Shape 28"/>
         <p:cNvGrpSpPr/>
         <p:nvPr/>
       </p:nvGrpSpPr>
@@ -5034,7 +5215,9 @@
       <p:sp>
         <p:nvSpPr>
           <p:cNvPr id="29" name="Google Shape;29;p7"/>
-          <p:cNvSpPr txBox="1"/>
+          <p:cNvSpPr txBox="1">
+            <a:spLocks noGrp="1"/>
+          </p:cNvSpPr>
           <p:nvPr>
             <p:ph type="title"/>
           </p:nvPr>
@@ -5049,7 +5232,7 @@
           </a:prstGeom>
         </p:spPr>
         <p:txBody>
-          <a:bodyPr anchorCtr="0" anchor="b" bIns="91425" lIns="91425" spcFirstLastPara="1" rIns="91425" wrap="square" tIns="91425">
+          <a:bodyPr spcFirstLastPara="1" wrap="square" lIns="91425" tIns="91425" rIns="91425" bIns="91425" anchor="b" anchorCtr="0">
             <a:normAutofit/>
           </a:bodyPr>
           <a:lstStyle>
@@ -5153,15 +5336,19 @@
               <a:defRPr sz="2400"/>
             </a:lvl9pPr>
           </a:lstStyle>
-          <a:p/>
+          <a:p>
+            <a:endParaRPr/>
+          </a:p>
         </p:txBody>
       </p:sp>
       <p:sp>
         <p:nvSpPr>
           <p:cNvPr id="30" name="Google Shape;30;p7"/>
-          <p:cNvSpPr txBox="1"/>
+          <p:cNvSpPr txBox="1">
+            <a:spLocks noGrp="1"/>
+          </p:cNvSpPr>
           <p:nvPr>
-            <p:ph idx="1" type="body"/>
+            <p:ph type="body" idx="1"/>
           </p:nvPr>
         </p:nvSpPr>
         <p:spPr>
@@ -5174,11 +5361,11 @@
           </a:prstGeom>
         </p:spPr>
         <p:txBody>
-          <a:bodyPr anchorCtr="0" anchor="t" bIns="91425" lIns="91425" spcFirstLastPara="1" rIns="91425" wrap="square" tIns="91425">
+          <a:bodyPr spcFirstLastPara="1" wrap="square" lIns="91425" tIns="91425" rIns="91425" bIns="91425" anchor="t" anchorCtr="0">
             <a:normAutofit/>
           </a:bodyPr>
           <a:lstStyle>
-            <a:lvl1pPr indent="-304800" lvl="0" marL="457200">
+            <a:lvl1pPr marL="457200" lvl="0" indent="-304800">
               <a:spcBef>
                 <a:spcPts val="0"/>
               </a:spcBef>
@@ -5189,7 +5376,7 @@
               <a:buChar char="●"/>
               <a:defRPr sz="1200"/>
             </a:lvl1pPr>
-            <a:lvl2pPr indent="-304800" lvl="1" marL="914400">
+            <a:lvl2pPr marL="914400" lvl="1" indent="-304800">
               <a:spcBef>
                 <a:spcPts val="0"/>
               </a:spcBef>
@@ -5200,7 +5387,7 @@
               <a:buChar char="○"/>
               <a:defRPr sz="1200"/>
             </a:lvl2pPr>
-            <a:lvl3pPr indent="-304800" lvl="2" marL="1371600">
+            <a:lvl3pPr marL="1371600" lvl="2" indent="-304800">
               <a:spcBef>
                 <a:spcPts val="0"/>
               </a:spcBef>
@@ -5211,7 +5398,7 @@
               <a:buChar char="■"/>
               <a:defRPr sz="1200"/>
             </a:lvl3pPr>
-            <a:lvl4pPr indent="-304800" lvl="3" marL="1828800">
+            <a:lvl4pPr marL="1828800" lvl="3" indent="-304800">
               <a:spcBef>
                 <a:spcPts val="0"/>
               </a:spcBef>
@@ -5222,7 +5409,7 @@
               <a:buChar char="●"/>
               <a:defRPr sz="1200"/>
             </a:lvl4pPr>
-            <a:lvl5pPr indent="-304800" lvl="4" marL="2286000">
+            <a:lvl5pPr marL="2286000" lvl="4" indent="-304800">
               <a:spcBef>
                 <a:spcPts val="0"/>
               </a:spcBef>
@@ -5233,7 +5420,7 @@
               <a:buChar char="○"/>
               <a:defRPr sz="1200"/>
             </a:lvl5pPr>
-            <a:lvl6pPr indent="-304800" lvl="5" marL="2743200">
+            <a:lvl6pPr marL="2743200" lvl="5" indent="-304800">
               <a:spcBef>
                 <a:spcPts val="0"/>
               </a:spcBef>
@@ -5244,7 +5431,7 @@
               <a:buChar char="■"/>
               <a:defRPr sz="1200"/>
             </a:lvl6pPr>
-            <a:lvl7pPr indent="-304800" lvl="6" marL="3200400">
+            <a:lvl7pPr marL="3200400" lvl="6" indent="-304800">
               <a:spcBef>
                 <a:spcPts val="0"/>
               </a:spcBef>
@@ -5255,7 +5442,7 @@
               <a:buChar char="●"/>
               <a:defRPr sz="1200"/>
             </a:lvl7pPr>
-            <a:lvl8pPr indent="-304800" lvl="7" marL="3657600">
+            <a:lvl8pPr marL="3657600" lvl="7" indent="-304800">
               <a:spcBef>
                 <a:spcPts val="0"/>
               </a:spcBef>
@@ -5266,7 +5453,7 @@
               <a:buChar char="○"/>
               <a:defRPr sz="1200"/>
             </a:lvl8pPr>
-            <a:lvl9pPr indent="-304800" lvl="8" marL="4114800">
+            <a:lvl9pPr marL="4114800" lvl="8" indent="-304800">
               <a:spcBef>
                 <a:spcPts val="0"/>
               </a:spcBef>
@@ -5278,15 +5465,19 @@
               <a:defRPr sz="1200"/>
             </a:lvl9pPr>
           </a:lstStyle>
-          <a:p/>
+          <a:p>
+            <a:endParaRPr/>
+          </a:p>
         </p:txBody>
       </p:sp>
       <p:sp>
         <p:nvSpPr>
           <p:cNvPr id="31" name="Google Shape;31;p7"/>
-          <p:cNvSpPr txBox="1"/>
+          <p:cNvSpPr txBox="1">
+            <a:spLocks noGrp="1"/>
+          </p:cNvSpPr>
           <p:nvPr>
-            <p:ph idx="12" type="sldNum"/>
+            <p:ph type="sldNum" idx="12"/>
           </p:nvPr>
         </p:nvSpPr>
         <p:spPr>
@@ -5299,7 +5490,7 @@
           </a:prstGeom>
         </p:spPr>
         <p:txBody>
-          <a:bodyPr anchorCtr="0" anchor="ctr" bIns="91425" lIns="91425" spcFirstLastPara="1" rIns="91425" wrap="square" tIns="91425">
+          <a:bodyPr spcFirstLastPara="1" wrap="square" lIns="91425" tIns="91425" rIns="91425" bIns="91425" anchor="ctr" anchorCtr="0">
             <a:normAutofit/>
           </a:bodyPr>
           <a:lstStyle>
@@ -5341,7 +5532,7 @@
             </a:lvl9pPr>
           </a:lstStyle>
           <a:p>
-            <a:pPr indent="0" lvl="0" marL="0" rtl="0" algn="r">
+            <a:pPr marL="0" lvl="0" indent="0" algn="r" rtl="0">
               <a:spcBef>
                 <a:spcPts val="0"/>
               </a:spcBef>
@@ -5367,11 +5558,11 @@
 </file>
 
 <file path=ppt/slideLayouts/slideLayout7.xml><?xml version="1.0" encoding="utf-8"?>
-<p:sldLayout xmlns:a="http://schemas.openxmlformats.org/drawingml/2006/main" xmlns:r="http://schemas.openxmlformats.org/officeDocument/2006/relationships" xmlns:mc="http://schemas.openxmlformats.org/markup-compatibility/2006" xmlns:mv="urn:schemas-microsoft-com:mac:vml" xmlns:p="http://schemas.openxmlformats.org/presentationml/2006/main" xmlns:c="http://schemas.openxmlformats.org/drawingml/2006/chart" xmlns:dgm="http://schemas.openxmlformats.org/drawingml/2006/diagram" xmlns:o="urn:schemas-microsoft-com:office:office" xmlns:v="urn:schemas-microsoft-com:vml" xmlns:pvml="urn:schemas-microsoft-com:office:powerpoint" xmlns:com="http://schemas.openxmlformats.org/drawingml/2006/compatibility" xmlns:p14="http://schemas.microsoft.com/office/powerpoint/2010/main" xmlns:p15="http://schemas.microsoft.com/office/powerpoint/2012/main" xmlns:ahyp="http://schemas.microsoft.com/office/drawing/2018/hyperlinkcolor" matchingName="Main point">
+<p:sldLayout xmlns:a="http://schemas.openxmlformats.org/drawingml/2006/main" xmlns:r="http://schemas.openxmlformats.org/officeDocument/2006/relationships" xmlns:p="http://schemas.openxmlformats.org/presentationml/2006/main" matchingName="Main point">
   <p:cSld name="MAIN_POINT">
     <p:spTree>
       <p:nvGrpSpPr>
-        <p:cNvPr id="32" name="Shape 32"/>
+        <p:cNvPr id="1" name="Shape 32"/>
         <p:cNvGrpSpPr/>
         <p:nvPr/>
       </p:nvGrpSpPr>
@@ -5386,7 +5577,9 @@
       <p:sp>
         <p:nvSpPr>
           <p:cNvPr id="33" name="Google Shape;33;p8"/>
-          <p:cNvSpPr txBox="1"/>
+          <p:cNvSpPr txBox="1">
+            <a:spLocks noGrp="1"/>
+          </p:cNvSpPr>
           <p:nvPr>
             <p:ph type="title"/>
           </p:nvPr>
@@ -5401,7 +5594,7 @@
           </a:prstGeom>
         </p:spPr>
         <p:txBody>
-          <a:bodyPr anchorCtr="0" anchor="ctr" bIns="91425" lIns="91425" spcFirstLastPara="1" rIns="91425" wrap="square" tIns="91425">
+          <a:bodyPr spcFirstLastPara="1" wrap="square" lIns="91425" tIns="91425" rIns="91425" bIns="91425" anchor="ctr" anchorCtr="0">
             <a:normAutofit/>
           </a:bodyPr>
           <a:lstStyle>
@@ -5505,15 +5698,19 @@
               <a:defRPr sz="4800"/>
             </a:lvl9pPr>
           </a:lstStyle>
-          <a:p/>
+          <a:p>
+            <a:endParaRPr/>
+          </a:p>
         </p:txBody>
       </p:sp>
       <p:sp>
         <p:nvSpPr>
           <p:cNvPr id="34" name="Google Shape;34;p8"/>
-          <p:cNvSpPr txBox="1"/>
+          <p:cNvSpPr txBox="1">
+            <a:spLocks noGrp="1"/>
+          </p:cNvSpPr>
           <p:nvPr>
-            <p:ph idx="12" type="sldNum"/>
+            <p:ph type="sldNum" idx="12"/>
           </p:nvPr>
         </p:nvSpPr>
         <p:spPr>
@@ -5526,7 +5723,7 @@
           </a:prstGeom>
         </p:spPr>
         <p:txBody>
-          <a:bodyPr anchorCtr="0" anchor="ctr" bIns="91425" lIns="91425" spcFirstLastPara="1" rIns="91425" wrap="square" tIns="91425">
+          <a:bodyPr spcFirstLastPara="1" wrap="square" lIns="91425" tIns="91425" rIns="91425" bIns="91425" anchor="ctr" anchorCtr="0">
             <a:normAutofit/>
           </a:bodyPr>
           <a:lstStyle>
@@ -5568,7 +5765,7 @@
             </a:lvl9pPr>
           </a:lstStyle>
           <a:p>
-            <a:pPr indent="0" lvl="0" marL="0" rtl="0" algn="r">
+            <a:pPr marL="0" lvl="0" indent="0" algn="r" rtl="0">
               <a:spcBef>
                 <a:spcPts val="0"/>
               </a:spcBef>
@@ -5594,11 +5791,11 @@
 </file>
 
 <file path=ppt/slideLayouts/slideLayout8.xml><?xml version="1.0" encoding="utf-8"?>
-<p:sldLayout xmlns:a="http://schemas.openxmlformats.org/drawingml/2006/main" xmlns:r="http://schemas.openxmlformats.org/officeDocument/2006/relationships" xmlns:mc="http://schemas.openxmlformats.org/markup-compatibility/2006" xmlns:mv="urn:schemas-microsoft-com:mac:vml" xmlns:p="http://schemas.openxmlformats.org/presentationml/2006/main" xmlns:c="http://schemas.openxmlformats.org/drawingml/2006/chart" xmlns:dgm="http://schemas.openxmlformats.org/drawingml/2006/diagram" xmlns:o="urn:schemas-microsoft-com:office:office" xmlns:v="urn:schemas-microsoft-com:vml" xmlns:pvml="urn:schemas-microsoft-com:office:powerpoint" xmlns:com="http://schemas.openxmlformats.org/drawingml/2006/compatibility" xmlns:p14="http://schemas.microsoft.com/office/powerpoint/2010/main" xmlns:p15="http://schemas.microsoft.com/office/powerpoint/2012/main" xmlns:ahyp="http://schemas.microsoft.com/office/drawing/2018/hyperlinkcolor" matchingName="Section title and description">
+<p:sldLayout xmlns:a="http://schemas.openxmlformats.org/drawingml/2006/main" xmlns:r="http://schemas.openxmlformats.org/officeDocument/2006/relationships" xmlns:p="http://schemas.openxmlformats.org/presentationml/2006/main" matchingName="Section title and description">
   <p:cSld name="SECTION_TITLE_AND_DESCRIPTION">
     <p:spTree>
       <p:nvGrpSpPr>
-        <p:cNvPr id="35" name="Shape 35"/>
+        <p:cNvPr id="1" name="Shape 35"/>
         <p:cNvGrpSpPr/>
         <p:nvPr/>
       </p:nvGrpSpPr>
@@ -5632,12 +5829,12 @@
           </a:ln>
         </p:spPr>
         <p:txBody>
-          <a:bodyPr anchorCtr="0" anchor="ctr" bIns="91425" lIns="91425" spcFirstLastPara="1" rIns="91425" wrap="square" tIns="91425">
+          <a:bodyPr spcFirstLastPara="1" wrap="square" lIns="91425" tIns="91425" rIns="91425" bIns="91425" anchor="ctr" anchorCtr="0">
             <a:noAutofit/>
           </a:bodyPr>
           <a:lstStyle/>
           <a:p>
-            <a:pPr indent="0" lvl="0" marL="0" rtl="0" algn="l">
+            <a:pPr marL="0" lvl="0" indent="0" algn="l" rtl="0">
               <a:spcBef>
                 <a:spcPts val="0"/>
               </a:spcBef>
@@ -5646,9 +5843,6 @@
               </a:spcAft>
               <a:buNone/>
             </a:pPr>
-            <a:r>
-              <a:t/>
-            </a:r>
             <a:endParaRPr/>
           </a:p>
         </p:txBody>
@@ -5656,7 +5850,9 @@
       <p:sp>
         <p:nvSpPr>
           <p:cNvPr id="37" name="Google Shape;37;p9"/>
-          <p:cNvSpPr txBox="1"/>
+          <p:cNvSpPr txBox="1">
+            <a:spLocks noGrp="1"/>
+          </p:cNvSpPr>
           <p:nvPr>
             <p:ph type="title"/>
           </p:nvPr>
@@ -5671,7 +5867,7 @@
           </a:prstGeom>
         </p:spPr>
         <p:txBody>
-          <a:bodyPr anchorCtr="0" anchor="b" bIns="91425" lIns="91425" spcFirstLastPara="1" rIns="91425" wrap="square" tIns="91425">
+          <a:bodyPr spcFirstLastPara="1" wrap="square" lIns="91425" tIns="91425" rIns="91425" bIns="91425" anchor="b" anchorCtr="0">
             <a:normAutofit/>
           </a:bodyPr>
           <a:lstStyle>
@@ -5775,15 +5971,19 @@
               <a:defRPr sz="4200"/>
             </a:lvl9pPr>
           </a:lstStyle>
-          <a:p/>
+          <a:p>
+            <a:endParaRPr/>
+          </a:p>
         </p:txBody>
       </p:sp>
       <p:sp>
         <p:nvSpPr>
           <p:cNvPr id="38" name="Google Shape;38;p9"/>
-          <p:cNvSpPr txBox="1"/>
+          <p:cNvSpPr txBox="1">
+            <a:spLocks noGrp="1"/>
+          </p:cNvSpPr>
           <p:nvPr>
-            <p:ph idx="1" type="subTitle"/>
+            <p:ph type="subTitle" idx="1"/>
           </p:nvPr>
         </p:nvSpPr>
         <p:spPr>
@@ -5796,7 +5996,7 @@
           </a:prstGeom>
         </p:spPr>
         <p:txBody>
-          <a:bodyPr anchorCtr="0" anchor="t" bIns="91425" lIns="91425" spcFirstLastPara="1" rIns="91425" wrap="square" tIns="91425">
+          <a:bodyPr spcFirstLastPara="1" wrap="square" lIns="91425" tIns="91425" rIns="91425" bIns="91425" anchor="t" anchorCtr="0">
             <a:normAutofit/>
           </a:bodyPr>
           <a:lstStyle>
@@ -5927,15 +6127,19 @@
               <a:defRPr sz="2100"/>
             </a:lvl9pPr>
           </a:lstStyle>
-          <a:p/>
+          <a:p>
+            <a:endParaRPr/>
+          </a:p>
         </p:txBody>
       </p:sp>
       <p:sp>
         <p:nvSpPr>
           <p:cNvPr id="39" name="Google Shape;39;p9"/>
-          <p:cNvSpPr txBox="1"/>
+          <p:cNvSpPr txBox="1">
+            <a:spLocks noGrp="1"/>
+          </p:cNvSpPr>
           <p:nvPr>
-            <p:ph idx="2" type="body"/>
+            <p:ph type="body" idx="2"/>
           </p:nvPr>
         </p:nvSpPr>
         <p:spPr>
@@ -5948,11 +6152,11 @@
           </a:prstGeom>
         </p:spPr>
         <p:txBody>
-          <a:bodyPr anchorCtr="0" anchor="ctr" bIns="91425" lIns="91425" spcFirstLastPara="1" rIns="91425" wrap="square" tIns="91425">
+          <a:bodyPr spcFirstLastPara="1" wrap="square" lIns="91425" tIns="91425" rIns="91425" bIns="91425" anchor="ctr" anchorCtr="0">
             <a:normAutofit/>
           </a:bodyPr>
           <a:lstStyle>
-            <a:lvl1pPr indent="-342900" lvl="0" marL="457200">
+            <a:lvl1pPr marL="457200" lvl="0" indent="-342900">
               <a:spcBef>
                 <a:spcPts val="0"/>
               </a:spcBef>
@@ -5963,7 +6167,7 @@
               <a:buChar char="●"/>
               <a:defRPr/>
             </a:lvl1pPr>
-            <a:lvl2pPr indent="-317500" lvl="1" marL="914400">
+            <a:lvl2pPr marL="914400" lvl="1" indent="-317500">
               <a:spcBef>
                 <a:spcPts val="0"/>
               </a:spcBef>
@@ -5974,7 +6178,7 @@
               <a:buChar char="○"/>
               <a:defRPr/>
             </a:lvl2pPr>
-            <a:lvl3pPr indent="-317500" lvl="2" marL="1371600">
+            <a:lvl3pPr marL="1371600" lvl="2" indent="-317500">
               <a:spcBef>
                 <a:spcPts val="0"/>
               </a:spcBef>
@@ -5985,7 +6189,7 @@
               <a:buChar char="■"/>
               <a:defRPr/>
             </a:lvl3pPr>
-            <a:lvl4pPr indent="-317500" lvl="3" marL="1828800">
+            <a:lvl4pPr marL="1828800" lvl="3" indent="-317500">
               <a:spcBef>
                 <a:spcPts val="0"/>
               </a:spcBef>
@@ -5996,7 +6200,7 @@
               <a:buChar char="●"/>
               <a:defRPr/>
             </a:lvl4pPr>
-            <a:lvl5pPr indent="-317500" lvl="4" marL="2286000">
+            <a:lvl5pPr marL="2286000" lvl="4" indent="-317500">
               <a:spcBef>
                 <a:spcPts val="0"/>
               </a:spcBef>
@@ -6007,7 +6211,7 @@
               <a:buChar char="○"/>
               <a:defRPr/>
             </a:lvl5pPr>
-            <a:lvl6pPr indent="-317500" lvl="5" marL="2743200">
+            <a:lvl6pPr marL="2743200" lvl="5" indent="-317500">
               <a:spcBef>
                 <a:spcPts val="0"/>
               </a:spcBef>
@@ -6018,7 +6222,7 @@
               <a:buChar char="■"/>
               <a:defRPr/>
             </a:lvl6pPr>
-            <a:lvl7pPr indent="-317500" lvl="6" marL="3200400">
+            <a:lvl7pPr marL="3200400" lvl="6" indent="-317500">
               <a:spcBef>
                 <a:spcPts val="0"/>
               </a:spcBef>
@@ -6029,7 +6233,7 @@
               <a:buChar char="●"/>
               <a:defRPr/>
             </a:lvl7pPr>
-            <a:lvl8pPr indent="-317500" lvl="7" marL="3657600">
+            <a:lvl8pPr marL="3657600" lvl="7" indent="-317500">
               <a:spcBef>
                 <a:spcPts val="0"/>
               </a:spcBef>
@@ -6040,7 +6244,7 @@
               <a:buChar char="○"/>
               <a:defRPr/>
             </a:lvl8pPr>
-            <a:lvl9pPr indent="-317500" lvl="8" marL="4114800">
+            <a:lvl9pPr marL="4114800" lvl="8" indent="-317500">
               <a:spcBef>
                 <a:spcPts val="0"/>
               </a:spcBef>
@@ -6052,15 +6256,19 @@
               <a:defRPr/>
             </a:lvl9pPr>
           </a:lstStyle>
-          <a:p/>
+          <a:p>
+            <a:endParaRPr/>
+          </a:p>
         </p:txBody>
       </p:sp>
       <p:sp>
         <p:nvSpPr>
           <p:cNvPr id="40" name="Google Shape;40;p9"/>
-          <p:cNvSpPr txBox="1"/>
+          <p:cNvSpPr txBox="1">
+            <a:spLocks noGrp="1"/>
+          </p:cNvSpPr>
           <p:nvPr>
-            <p:ph idx="12" type="sldNum"/>
+            <p:ph type="sldNum" idx="12"/>
           </p:nvPr>
         </p:nvSpPr>
         <p:spPr>
@@ -6073,7 +6281,7 @@
           </a:prstGeom>
         </p:spPr>
         <p:txBody>
-          <a:bodyPr anchorCtr="0" anchor="ctr" bIns="91425" lIns="91425" spcFirstLastPara="1" rIns="91425" wrap="square" tIns="91425">
+          <a:bodyPr spcFirstLastPara="1" wrap="square" lIns="91425" tIns="91425" rIns="91425" bIns="91425" anchor="ctr" anchorCtr="0">
             <a:normAutofit/>
           </a:bodyPr>
           <a:lstStyle>
@@ -6115,7 +6323,7 @@
             </a:lvl9pPr>
           </a:lstStyle>
           <a:p>
-            <a:pPr indent="0" lvl="0" marL="0" rtl="0" algn="r">
+            <a:pPr marL="0" lvl="0" indent="0" algn="r" rtl="0">
               <a:spcBef>
                 <a:spcPts val="0"/>
               </a:spcBef>
@@ -6141,11 +6349,11 @@
 </file>
 
 <file path=ppt/slideLayouts/slideLayout9.xml><?xml version="1.0" encoding="utf-8"?>
-<p:sldLayout xmlns:a="http://schemas.openxmlformats.org/drawingml/2006/main" xmlns:r="http://schemas.openxmlformats.org/officeDocument/2006/relationships" xmlns:mc="http://schemas.openxmlformats.org/markup-compatibility/2006" xmlns:mv="urn:schemas-microsoft-com:mac:vml" xmlns:p="http://schemas.openxmlformats.org/presentationml/2006/main" xmlns:c="http://schemas.openxmlformats.org/drawingml/2006/chart" xmlns:dgm="http://schemas.openxmlformats.org/drawingml/2006/diagram" xmlns:o="urn:schemas-microsoft-com:office:office" xmlns:v="urn:schemas-microsoft-com:vml" xmlns:pvml="urn:schemas-microsoft-com:office:powerpoint" xmlns:com="http://schemas.openxmlformats.org/drawingml/2006/compatibility" xmlns:p14="http://schemas.microsoft.com/office/powerpoint/2010/main" xmlns:p15="http://schemas.microsoft.com/office/powerpoint/2012/main" xmlns:ahyp="http://schemas.microsoft.com/office/drawing/2018/hyperlinkcolor" matchingName="Caption">
+<p:sldLayout xmlns:a="http://schemas.openxmlformats.org/drawingml/2006/main" xmlns:r="http://schemas.openxmlformats.org/officeDocument/2006/relationships" xmlns:p="http://schemas.openxmlformats.org/presentationml/2006/main" matchingName="Caption">
   <p:cSld name="CAPTION_ONLY">
     <p:spTree>
       <p:nvGrpSpPr>
-        <p:cNvPr id="41" name="Shape 41"/>
+        <p:cNvPr id="1" name="Shape 41"/>
         <p:cNvGrpSpPr/>
         <p:nvPr/>
       </p:nvGrpSpPr>
@@ -6160,9 +6368,11 @@
       <p:sp>
         <p:nvSpPr>
           <p:cNvPr id="42" name="Google Shape;42;p10"/>
-          <p:cNvSpPr txBox="1"/>
+          <p:cNvSpPr txBox="1">
+            <a:spLocks noGrp="1"/>
+          </p:cNvSpPr>
           <p:nvPr>
-            <p:ph idx="1" type="body"/>
+            <p:ph type="body" idx="1"/>
           </p:nvPr>
         </p:nvSpPr>
         <p:spPr>
@@ -6175,11 +6385,11 @@
           </a:prstGeom>
         </p:spPr>
         <p:txBody>
-          <a:bodyPr anchorCtr="0" anchor="ctr" bIns="91425" lIns="91425" spcFirstLastPara="1" rIns="91425" wrap="square" tIns="91425">
+          <a:bodyPr spcFirstLastPara="1" wrap="square" lIns="91425" tIns="91425" rIns="91425" bIns="91425" anchor="ctr" anchorCtr="0">
             <a:normAutofit/>
           </a:bodyPr>
           <a:lstStyle>
-            <a:lvl1pPr indent="-228600" lvl="0" marL="457200">
+            <a:lvl1pPr marL="457200" lvl="0" indent="-228600">
               <a:lnSpc>
                 <a:spcPct val="100000"/>
               </a:lnSpc>
@@ -6194,15 +6404,19 @@
               <a:defRPr/>
             </a:lvl1pPr>
           </a:lstStyle>
-          <a:p/>
+          <a:p>
+            <a:endParaRPr/>
+          </a:p>
         </p:txBody>
       </p:sp>
       <p:sp>
         <p:nvSpPr>
           <p:cNvPr id="43" name="Google Shape;43;p10"/>
-          <p:cNvSpPr txBox="1"/>
+          <p:cNvSpPr txBox="1">
+            <a:spLocks noGrp="1"/>
+          </p:cNvSpPr>
           <p:nvPr>
-            <p:ph idx="12" type="sldNum"/>
+            <p:ph type="sldNum" idx="12"/>
           </p:nvPr>
         </p:nvSpPr>
         <p:spPr>
@@ -6215,7 +6429,7 @@
           </a:prstGeom>
         </p:spPr>
         <p:txBody>
-          <a:bodyPr anchorCtr="0" anchor="ctr" bIns="91425" lIns="91425" spcFirstLastPara="1" rIns="91425" wrap="square" tIns="91425">
+          <a:bodyPr spcFirstLastPara="1" wrap="square" lIns="91425" tIns="91425" rIns="91425" bIns="91425" anchor="ctr" anchorCtr="0">
             <a:normAutofit/>
           </a:bodyPr>
           <a:lstStyle>
@@ -6257,7 +6471,7 @@
             </a:lvl9pPr>
           </a:lstStyle>
           <a:p>
-            <a:pPr indent="0" lvl="0" marL="0" rtl="0" algn="r">
+            <a:pPr marL="0" lvl="0" indent="0" algn="r" rtl="0">
               <a:spcBef>
                 <a:spcPts val="0"/>
               </a:spcBef>
@@ -6283,18 +6497,19 @@
 </file>
 
 <file path=ppt/slideMasters/slideMaster1.xml><?xml version="1.0" encoding="utf-8"?>
-<p:sldMaster xmlns:a="http://schemas.openxmlformats.org/drawingml/2006/main" xmlns:r="http://schemas.openxmlformats.org/officeDocument/2006/relationships" xmlns:mc="http://schemas.openxmlformats.org/markup-compatibility/2006" xmlns:mv="urn:schemas-microsoft-com:mac:vml" xmlns:p="http://schemas.openxmlformats.org/presentationml/2006/main" xmlns:c="http://schemas.openxmlformats.org/drawingml/2006/chart" xmlns:dgm="http://schemas.openxmlformats.org/drawingml/2006/diagram" xmlns:o="urn:schemas-microsoft-com:office:office" xmlns:v="urn:schemas-microsoft-com:vml" xmlns:pvml="urn:schemas-microsoft-com:office:powerpoint" xmlns:com="http://schemas.openxmlformats.org/drawingml/2006/compatibility" xmlns:p14="http://schemas.microsoft.com/office/powerpoint/2010/main" xmlns:p15="http://schemas.microsoft.com/office/powerpoint/2012/main" xmlns:ahyp="http://schemas.microsoft.com/office/drawing/2018/hyperlinkcolor">
+<p:sldMaster xmlns:a="http://schemas.openxmlformats.org/drawingml/2006/main" xmlns:r="http://schemas.openxmlformats.org/officeDocument/2006/relationships" xmlns:p="http://schemas.openxmlformats.org/presentationml/2006/main">
   <p:cSld name="simple-light-2">
     <p:bg>
       <p:bgPr>
         <a:solidFill>
           <a:schemeClr val="lt1"/>
         </a:solidFill>
+        <a:effectLst/>
       </p:bgPr>
     </p:bg>
     <p:spTree>
       <p:nvGrpSpPr>
-        <p:cNvPr id="5" name="Shape 5"/>
+        <p:cNvPr id="1" name="Shape 5"/>
         <p:cNvGrpSpPr/>
         <p:nvPr/>
       </p:nvGrpSpPr>
@@ -6309,7 +6524,9 @@
       <p:sp>
         <p:nvSpPr>
           <p:cNvPr id="6" name="Google Shape;6;p1"/>
-          <p:cNvSpPr txBox="1"/>
+          <p:cNvSpPr txBox="1">
+            <a:spLocks noGrp="1"/>
+          </p:cNvSpPr>
           <p:nvPr>
             <p:ph type="title"/>
           </p:nvPr>
@@ -6328,7 +6545,7 @@
           </a:ln>
         </p:spPr>
         <p:txBody>
-          <a:bodyPr anchorCtr="0" anchor="t" bIns="91425" lIns="91425" spcFirstLastPara="1" rIns="91425" wrap="square" tIns="91425">
+          <a:bodyPr spcFirstLastPara="1" wrap="square" lIns="91425" tIns="91425" rIns="91425" bIns="91425" anchor="t" anchorCtr="0">
             <a:normAutofit/>
           </a:bodyPr>
           <a:lstStyle>
@@ -6495,15 +6712,19 @@
               </a:defRPr>
             </a:lvl9pPr>
           </a:lstStyle>
-          <a:p/>
+          <a:p>
+            <a:endParaRPr/>
+          </a:p>
         </p:txBody>
       </p:sp>
       <p:sp>
         <p:nvSpPr>
           <p:cNvPr id="7" name="Google Shape;7;p1"/>
-          <p:cNvSpPr txBox="1"/>
+          <p:cNvSpPr txBox="1">
+            <a:spLocks noGrp="1"/>
+          </p:cNvSpPr>
           <p:nvPr>
-            <p:ph idx="1" type="body"/>
+            <p:ph type="body" idx="1"/>
           </p:nvPr>
         </p:nvSpPr>
         <p:spPr>
@@ -6520,11 +6741,11 @@
           </a:ln>
         </p:spPr>
         <p:txBody>
-          <a:bodyPr anchorCtr="0" anchor="t" bIns="91425" lIns="91425" spcFirstLastPara="1" rIns="91425" wrap="square" tIns="91425">
+          <a:bodyPr spcFirstLastPara="1" wrap="square" lIns="91425" tIns="91425" rIns="91425" bIns="91425" anchor="t" anchorCtr="0">
             <a:normAutofit/>
           </a:bodyPr>
           <a:lstStyle>
-            <a:lvl1pPr indent="-342900" lvl="0" marL="457200">
+            <a:lvl1pPr marL="457200" lvl="0" indent="-342900">
               <a:lnSpc>
                 <a:spcPct val="115000"/>
               </a:lnSpc>
@@ -6545,7 +6766,7 @@
                 </a:solidFill>
               </a:defRPr>
             </a:lvl1pPr>
-            <a:lvl2pPr indent="-317500" lvl="1" marL="914400">
+            <a:lvl2pPr marL="914400" lvl="1" indent="-317500">
               <a:lnSpc>
                 <a:spcPct val="115000"/>
               </a:lnSpc>
@@ -6566,7 +6787,7 @@
                 </a:solidFill>
               </a:defRPr>
             </a:lvl2pPr>
-            <a:lvl3pPr indent="-317500" lvl="2" marL="1371600">
+            <a:lvl3pPr marL="1371600" lvl="2" indent="-317500">
               <a:lnSpc>
                 <a:spcPct val="115000"/>
               </a:lnSpc>
@@ -6587,7 +6808,7 @@
                 </a:solidFill>
               </a:defRPr>
             </a:lvl3pPr>
-            <a:lvl4pPr indent="-317500" lvl="3" marL="1828800">
+            <a:lvl4pPr marL="1828800" lvl="3" indent="-317500">
               <a:lnSpc>
                 <a:spcPct val="115000"/>
               </a:lnSpc>
@@ -6608,7 +6829,7 @@
                 </a:solidFill>
               </a:defRPr>
             </a:lvl4pPr>
-            <a:lvl5pPr indent="-317500" lvl="4" marL="2286000">
+            <a:lvl5pPr marL="2286000" lvl="4" indent="-317500">
               <a:lnSpc>
                 <a:spcPct val="115000"/>
               </a:lnSpc>
@@ -6629,7 +6850,7 @@
                 </a:solidFill>
               </a:defRPr>
             </a:lvl5pPr>
-            <a:lvl6pPr indent="-317500" lvl="5" marL="2743200">
+            <a:lvl6pPr marL="2743200" lvl="5" indent="-317500">
               <a:lnSpc>
                 <a:spcPct val="115000"/>
               </a:lnSpc>
@@ -6650,7 +6871,7 @@
                 </a:solidFill>
               </a:defRPr>
             </a:lvl6pPr>
-            <a:lvl7pPr indent="-317500" lvl="6" marL="3200400">
+            <a:lvl7pPr marL="3200400" lvl="6" indent="-317500">
               <a:lnSpc>
                 <a:spcPct val="115000"/>
               </a:lnSpc>
@@ -6671,7 +6892,7 @@
                 </a:solidFill>
               </a:defRPr>
             </a:lvl7pPr>
-            <a:lvl8pPr indent="-317500" lvl="7" marL="3657600">
+            <a:lvl8pPr marL="3657600" lvl="7" indent="-317500">
               <a:lnSpc>
                 <a:spcPct val="115000"/>
               </a:lnSpc>
@@ -6692,7 +6913,7 @@
                 </a:solidFill>
               </a:defRPr>
             </a:lvl8pPr>
-            <a:lvl9pPr indent="-317500" lvl="8" marL="4114800">
+            <a:lvl9pPr marL="4114800" lvl="8" indent="-317500">
               <a:lnSpc>
                 <a:spcPct val="115000"/>
               </a:lnSpc>
@@ -6714,15 +6935,19 @@
               </a:defRPr>
             </a:lvl9pPr>
           </a:lstStyle>
-          <a:p/>
+          <a:p>
+            <a:endParaRPr/>
+          </a:p>
         </p:txBody>
       </p:sp>
       <p:sp>
         <p:nvSpPr>
           <p:cNvPr id="8" name="Google Shape;8;p1"/>
-          <p:cNvSpPr txBox="1"/>
+          <p:cNvSpPr txBox="1">
+            <a:spLocks noGrp="1"/>
+          </p:cNvSpPr>
           <p:nvPr>
-            <p:ph idx="12" type="sldNum"/>
+            <p:ph type="sldNum" idx="12"/>
           </p:nvPr>
         </p:nvSpPr>
         <p:spPr>
@@ -6739,7 +6964,7 @@
           </a:ln>
         </p:spPr>
         <p:txBody>
-          <a:bodyPr anchorCtr="0" anchor="ctr" bIns="91425" lIns="91425" spcFirstLastPara="1" rIns="91425" wrap="square" tIns="91425">
+          <a:bodyPr spcFirstLastPara="1" wrap="square" lIns="91425" tIns="91425" rIns="91425" bIns="91425" anchor="ctr" anchorCtr="0">
             <a:normAutofit/>
           </a:bodyPr>
           <a:lstStyle>
@@ -6817,7 +7042,7 @@
             </a:lvl9pPr>
           </a:lstStyle>
           <a:p>
-            <a:pPr indent="0" lvl="0" marL="0" rtl="0" algn="r">
+            <a:pPr marL="0" lvl="0" indent="0" algn="r" rtl="0">
               <a:spcBef>
                 <a:spcPts val="0"/>
               </a:spcBef>
@@ -6836,7 +7061,7 @@
       </p:sp>
     </p:spTree>
   </p:cSld>
-  <p:clrMap accent1="accent1" accent2="accent2" accent3="accent3" accent4="accent4" accent5="accent5" accent6="accent6" bg1="lt1" bg2="dk2" tx1="dk1" tx2="lt2" folHlink="folHlink" hlink="hlink"/>
+  <p:clrMap bg1="lt1" tx1="dk1" bg2="dk2" tx2="lt2" accent1="accent1" accent2="accent2" accent3="accent3" accent4="accent4" accent5="accent5" accent6="accent6" hlink="hlink" folHlink="folHlink"/>
   <p:sldLayoutIdLst>
     <p:sldLayoutId id="2147483648" r:id="rId1"/>
     <p:sldLayoutId id="2147483649" r:id="rId2"/>
@@ -6850,10 +7075,10 @@
     <p:sldLayoutId id="2147483657" r:id="rId10"/>
     <p:sldLayoutId id="2147483658" r:id="rId11"/>
   </p:sldLayoutIdLst>
-  <p:hf dt="0" ftr="0" hdr="0" sldNum="0"/>
+  <p:hf sldNum="0" hdr="0" ftr="0" dt="0"/>
   <p:txStyles>
     <p:titleStyle>
-      <a:defPPr lvl="0" marR="0" rtl="0" algn="l">
+      <a:defPPr marR="0" lvl="0" algn="l" rtl="0">
         <a:lnSpc>
           <a:spcPct val="100000"/>
         </a:lnSpc>
@@ -6864,7 +7089,7 @@
           <a:spcPts val="0"/>
         </a:spcAft>
       </a:defPPr>
-      <a:lvl1pPr lvl="0" marR="0" rtl="0" algn="l">
+      <a:lvl1pPr marR="0" lvl="0" algn="l" rtl="0">
         <a:lnSpc>
           <a:spcPct val="100000"/>
         </a:lnSpc>
@@ -6878,7 +7103,7 @@
           <a:srgbClr val="000000"/>
         </a:buClr>
         <a:buFont typeface="Arial"/>
-        <a:defRPr b="0" i="0" spc="0" sz="1400" u="none" cap="none" strike="noStrike">
+        <a:defRPr sz="1400" b="0" i="0" u="none" strike="noStrike" cap="none" spc="0">
           <a:solidFill>
             <a:srgbClr val="000000"/>
           </a:solidFill>
@@ -6888,7 +7113,7 @@
           <a:sym typeface="Arial"/>
         </a:defRPr>
       </a:lvl1pPr>
-      <a:lvl2pPr lvl="1" marR="0" rtl="0" algn="l">
+      <a:lvl2pPr marR="0" lvl="1" algn="l" rtl="0">
         <a:lnSpc>
           <a:spcPct val="100000"/>
         </a:lnSpc>
@@ -6902,7 +7127,7 @@
           <a:srgbClr val="000000"/>
         </a:buClr>
         <a:buFont typeface="Arial"/>
-        <a:defRPr b="0" i="0" spc="0" sz="1400" u="none" cap="none" strike="noStrike">
+        <a:defRPr sz="1400" b="0" i="0" u="none" strike="noStrike" cap="none" spc="0">
           <a:solidFill>
             <a:srgbClr val="000000"/>
           </a:solidFill>
@@ -6912,7 +7137,7 @@
           <a:sym typeface="Arial"/>
         </a:defRPr>
       </a:lvl2pPr>
-      <a:lvl3pPr lvl="2" marR="0" rtl="0" algn="l">
+      <a:lvl3pPr marR="0" lvl="2" algn="l" rtl="0">
         <a:lnSpc>
           <a:spcPct val="100000"/>
         </a:lnSpc>
@@ -6926,7 +7151,7 @@
           <a:srgbClr val="000000"/>
         </a:buClr>
         <a:buFont typeface="Arial"/>
-        <a:defRPr b="0" i="0" spc="0" sz="1400" u="none" cap="none" strike="noStrike">
+        <a:defRPr sz="1400" b="0" i="0" u="none" strike="noStrike" cap="none" spc="0">
           <a:solidFill>
             <a:srgbClr val="000000"/>
           </a:solidFill>
@@ -6936,7 +7161,7 @@
           <a:sym typeface="Arial"/>
         </a:defRPr>
       </a:lvl3pPr>
-      <a:lvl4pPr lvl="3" marR="0" rtl="0" algn="l">
+      <a:lvl4pPr marR="0" lvl="3" algn="l" rtl="0">
         <a:lnSpc>
           <a:spcPct val="100000"/>
         </a:lnSpc>
@@ -6950,7 +7175,7 @@
           <a:srgbClr val="000000"/>
         </a:buClr>
         <a:buFont typeface="Arial"/>
-        <a:defRPr b="0" i="0" spc="0" sz="1400" u="none" cap="none" strike="noStrike">
+        <a:defRPr sz="1400" b="0" i="0" u="none" strike="noStrike" cap="none" spc="0">
           <a:solidFill>
             <a:srgbClr val="000000"/>
           </a:solidFill>
@@ -6960,7 +7185,7 @@
           <a:sym typeface="Arial"/>
         </a:defRPr>
       </a:lvl4pPr>
-      <a:lvl5pPr lvl="4" marR="0" rtl="0" algn="l">
+      <a:lvl5pPr marR="0" lvl="4" algn="l" rtl="0">
         <a:lnSpc>
           <a:spcPct val="100000"/>
         </a:lnSpc>
@@ -6974,7 +7199,7 @@
           <a:srgbClr val="000000"/>
         </a:buClr>
         <a:buFont typeface="Arial"/>
-        <a:defRPr b="0" i="0" spc="0" sz="1400" u="none" cap="none" strike="noStrike">
+        <a:defRPr sz="1400" b="0" i="0" u="none" strike="noStrike" cap="none" spc="0">
           <a:solidFill>
             <a:srgbClr val="000000"/>
           </a:solidFill>
@@ -6984,7 +7209,7 @@
           <a:sym typeface="Arial"/>
         </a:defRPr>
       </a:lvl5pPr>
-      <a:lvl6pPr lvl="5" marR="0" rtl="0" algn="l">
+      <a:lvl6pPr marR="0" lvl="5" algn="l" rtl="0">
         <a:lnSpc>
           <a:spcPct val="100000"/>
         </a:lnSpc>
@@ -6998,7 +7223,7 @@
           <a:srgbClr val="000000"/>
         </a:buClr>
         <a:buFont typeface="Arial"/>
-        <a:defRPr b="0" i="0" spc="0" sz="1400" u="none" cap="none" strike="noStrike">
+        <a:defRPr sz="1400" b="0" i="0" u="none" strike="noStrike" cap="none" spc="0">
           <a:solidFill>
             <a:srgbClr val="000000"/>
           </a:solidFill>
@@ -7008,7 +7233,7 @@
           <a:sym typeface="Arial"/>
         </a:defRPr>
       </a:lvl6pPr>
-      <a:lvl7pPr lvl="6" marR="0" rtl="0" algn="l">
+      <a:lvl7pPr marR="0" lvl="6" algn="l" rtl="0">
         <a:lnSpc>
           <a:spcPct val="100000"/>
         </a:lnSpc>
@@ -7022,7 +7247,7 @@
           <a:srgbClr val="000000"/>
         </a:buClr>
         <a:buFont typeface="Arial"/>
-        <a:defRPr b="0" i="0" spc="0" sz="1400" u="none" cap="none" strike="noStrike">
+        <a:defRPr sz="1400" b="0" i="0" u="none" strike="noStrike" cap="none" spc="0">
           <a:solidFill>
             <a:srgbClr val="000000"/>
           </a:solidFill>
@@ -7032,7 +7257,7 @@
           <a:sym typeface="Arial"/>
         </a:defRPr>
       </a:lvl7pPr>
-      <a:lvl8pPr lvl="7" marR="0" rtl="0" algn="l">
+      <a:lvl8pPr marR="0" lvl="7" algn="l" rtl="0">
         <a:lnSpc>
           <a:spcPct val="100000"/>
         </a:lnSpc>
@@ -7046,7 +7271,7 @@
           <a:srgbClr val="000000"/>
         </a:buClr>
         <a:buFont typeface="Arial"/>
-        <a:defRPr b="0" i="0" spc="0" sz="1400" u="none" cap="none" strike="noStrike">
+        <a:defRPr sz="1400" b="0" i="0" u="none" strike="noStrike" cap="none" spc="0">
           <a:solidFill>
             <a:srgbClr val="000000"/>
           </a:solidFill>
@@ -7056,7 +7281,7 @@
           <a:sym typeface="Arial"/>
         </a:defRPr>
       </a:lvl8pPr>
-      <a:lvl9pPr lvl="8" marR="0" rtl="0" algn="l">
+      <a:lvl9pPr marR="0" lvl="8" algn="l" rtl="0">
         <a:lnSpc>
           <a:spcPct val="100000"/>
         </a:lnSpc>
@@ -7070,7 +7295,7 @@
           <a:srgbClr val="000000"/>
         </a:buClr>
         <a:buFont typeface="Arial"/>
-        <a:defRPr b="0" i="0" spc="0" sz="1400" u="none" cap="none" strike="noStrike">
+        <a:defRPr sz="1400" b="0" i="0" u="none" strike="noStrike" cap="none" spc="0">
           <a:solidFill>
             <a:srgbClr val="000000"/>
           </a:solidFill>
@@ -7082,7 +7307,7 @@
       </a:lvl9pPr>
     </p:titleStyle>
     <p:bodyStyle>
-      <a:defPPr lvl="0" marR="0" rtl="0" algn="l">
+      <a:defPPr marR="0" lvl="0" algn="l" rtl="0">
         <a:lnSpc>
           <a:spcPct val="100000"/>
         </a:lnSpc>
@@ -7093,7 +7318,7 @@
           <a:spcPts val="0"/>
         </a:spcAft>
       </a:defPPr>
-      <a:lvl1pPr lvl="0" marR="0" rtl="0" algn="l">
+      <a:lvl1pPr marR="0" lvl="0" algn="l" rtl="0">
         <a:lnSpc>
           <a:spcPct val="100000"/>
         </a:lnSpc>
@@ -7107,7 +7332,7 @@
           <a:srgbClr val="000000"/>
         </a:buClr>
         <a:buFont typeface="Arial"/>
-        <a:defRPr b="0" i="0" spc="0" sz="1400" u="none" cap="none" strike="noStrike">
+        <a:defRPr sz="1400" b="0" i="0" u="none" strike="noStrike" cap="none" spc="0">
           <a:solidFill>
             <a:srgbClr val="000000"/>
           </a:solidFill>
@@ -7117,7 +7342,7 @@
           <a:sym typeface="Arial"/>
         </a:defRPr>
       </a:lvl1pPr>
-      <a:lvl2pPr lvl="1" marR="0" rtl="0" algn="l">
+      <a:lvl2pPr marR="0" lvl="1" algn="l" rtl="0">
         <a:lnSpc>
           <a:spcPct val="100000"/>
         </a:lnSpc>
@@ -7131,7 +7356,7 @@
           <a:srgbClr val="000000"/>
         </a:buClr>
         <a:buFont typeface="Arial"/>
-        <a:defRPr b="0" i="0" spc="0" sz="1400" u="none" cap="none" strike="noStrike">
+        <a:defRPr sz="1400" b="0" i="0" u="none" strike="noStrike" cap="none" spc="0">
           <a:solidFill>
             <a:srgbClr val="000000"/>
           </a:solidFill>
@@ -7141,7 +7366,7 @@
           <a:sym typeface="Arial"/>
         </a:defRPr>
       </a:lvl2pPr>
-      <a:lvl3pPr lvl="2" marR="0" rtl="0" algn="l">
+      <a:lvl3pPr marR="0" lvl="2" algn="l" rtl="0">
         <a:lnSpc>
           <a:spcPct val="100000"/>
         </a:lnSpc>
@@ -7155,7 +7380,7 @@
           <a:srgbClr val="000000"/>
         </a:buClr>
         <a:buFont typeface="Arial"/>
-        <a:defRPr b="0" i="0" spc="0" sz="1400" u="none" cap="none" strike="noStrike">
+        <a:defRPr sz="1400" b="0" i="0" u="none" strike="noStrike" cap="none" spc="0">
           <a:solidFill>
             <a:srgbClr val="000000"/>
           </a:solidFill>
@@ -7165,7 +7390,7 @@
           <a:sym typeface="Arial"/>
         </a:defRPr>
       </a:lvl3pPr>
-      <a:lvl4pPr lvl="3" marR="0" rtl="0" algn="l">
+      <a:lvl4pPr marR="0" lvl="3" algn="l" rtl="0">
         <a:lnSpc>
           <a:spcPct val="100000"/>
         </a:lnSpc>
@@ -7179,7 +7404,7 @@
           <a:srgbClr val="000000"/>
         </a:buClr>
         <a:buFont typeface="Arial"/>
-        <a:defRPr b="0" i="0" spc="0" sz="1400" u="none" cap="none" strike="noStrike">
+        <a:defRPr sz="1400" b="0" i="0" u="none" strike="noStrike" cap="none" spc="0">
           <a:solidFill>
             <a:srgbClr val="000000"/>
           </a:solidFill>
@@ -7189,7 +7414,7 @@
           <a:sym typeface="Arial"/>
         </a:defRPr>
       </a:lvl4pPr>
-      <a:lvl5pPr lvl="4" marR="0" rtl="0" algn="l">
+      <a:lvl5pPr marR="0" lvl="4" algn="l" rtl="0">
         <a:lnSpc>
           <a:spcPct val="100000"/>
         </a:lnSpc>
@@ -7203,7 +7428,7 @@
           <a:srgbClr val="000000"/>
         </a:buClr>
         <a:buFont typeface="Arial"/>
-        <a:defRPr b="0" i="0" spc="0" sz="1400" u="none" cap="none" strike="noStrike">
+        <a:defRPr sz="1400" b="0" i="0" u="none" strike="noStrike" cap="none" spc="0">
           <a:solidFill>
             <a:srgbClr val="000000"/>
           </a:solidFill>
@@ -7213,7 +7438,7 @@
           <a:sym typeface="Arial"/>
         </a:defRPr>
       </a:lvl5pPr>
-      <a:lvl6pPr lvl="5" marR="0" rtl="0" algn="l">
+      <a:lvl6pPr marR="0" lvl="5" algn="l" rtl="0">
         <a:lnSpc>
           <a:spcPct val="100000"/>
         </a:lnSpc>
@@ -7227,7 +7452,7 @@
           <a:srgbClr val="000000"/>
         </a:buClr>
         <a:buFont typeface="Arial"/>
-        <a:defRPr b="0" i="0" spc="0" sz="1400" u="none" cap="none" strike="noStrike">
+        <a:defRPr sz="1400" b="0" i="0" u="none" strike="noStrike" cap="none" spc="0">
           <a:solidFill>
             <a:srgbClr val="000000"/>
           </a:solidFill>
@@ -7237,7 +7462,7 @@
           <a:sym typeface="Arial"/>
         </a:defRPr>
       </a:lvl6pPr>
-      <a:lvl7pPr lvl="6" marR="0" rtl="0" algn="l">
+      <a:lvl7pPr marR="0" lvl="6" algn="l" rtl="0">
         <a:lnSpc>
           <a:spcPct val="100000"/>
         </a:lnSpc>
@@ -7251,7 +7476,7 @@
           <a:srgbClr val="000000"/>
         </a:buClr>
         <a:buFont typeface="Arial"/>
-        <a:defRPr b="0" i="0" spc="0" sz="1400" u="none" cap="none" strike="noStrike">
+        <a:defRPr sz="1400" b="0" i="0" u="none" strike="noStrike" cap="none" spc="0">
           <a:solidFill>
             <a:srgbClr val="000000"/>
           </a:solidFill>
@@ -7261,7 +7486,7 @@
           <a:sym typeface="Arial"/>
         </a:defRPr>
       </a:lvl7pPr>
-      <a:lvl8pPr lvl="7" marR="0" rtl="0" algn="l">
+      <a:lvl8pPr marR="0" lvl="7" algn="l" rtl="0">
         <a:lnSpc>
           <a:spcPct val="100000"/>
         </a:lnSpc>
@@ -7275,7 +7500,7 @@
           <a:srgbClr val="000000"/>
         </a:buClr>
         <a:buFont typeface="Arial"/>
-        <a:defRPr b="0" i="0" spc="0" sz="1400" u="none" cap="none" strike="noStrike">
+        <a:defRPr sz="1400" b="0" i="0" u="none" strike="noStrike" cap="none" spc="0">
           <a:solidFill>
             <a:srgbClr val="000000"/>
           </a:solidFill>
@@ -7285,7 +7510,7 @@
           <a:sym typeface="Arial"/>
         </a:defRPr>
       </a:lvl8pPr>
-      <a:lvl9pPr lvl="8" marR="0" rtl="0" algn="l">
+      <a:lvl9pPr marR="0" lvl="8" algn="l" rtl="0">
         <a:lnSpc>
           <a:spcPct val="100000"/>
         </a:lnSpc>
@@ -7299,7 +7524,7 @@
           <a:srgbClr val="000000"/>
         </a:buClr>
         <a:buFont typeface="Arial"/>
-        <a:defRPr b="0" i="0" spc="0" sz="1400" u="none" cap="none" strike="noStrike">
+        <a:defRPr sz="1400" b="0" i="0" u="none" strike="noStrike" cap="none" spc="0">
           <a:solidFill>
             <a:srgbClr val="000000"/>
           </a:solidFill>
@@ -7311,7 +7536,7 @@
       </a:lvl9pPr>
     </p:bodyStyle>
     <p:otherStyle>
-      <a:defPPr lvl="0" marR="0" rtl="0" algn="l">
+      <a:defPPr marR="0" lvl="0" algn="l" rtl="0">
         <a:lnSpc>
           <a:spcPct val="100000"/>
         </a:lnSpc>
@@ -7322,7 +7547,7 @@
           <a:spcPts val="0"/>
         </a:spcAft>
       </a:defPPr>
-      <a:lvl1pPr lvl="0" marR="0" rtl="0" algn="l">
+      <a:lvl1pPr marR="0" lvl="0" algn="l" rtl="0">
         <a:lnSpc>
           <a:spcPct val="100000"/>
         </a:lnSpc>
@@ -7336,7 +7561,7 @@
           <a:srgbClr val="000000"/>
         </a:buClr>
         <a:buFont typeface="Arial"/>
-        <a:defRPr b="0" i="0" spc="0" sz="1400" u="none" cap="none" strike="noStrike">
+        <a:defRPr sz="1400" b="0" i="0" u="none" strike="noStrike" cap="none" spc="0">
           <a:solidFill>
             <a:srgbClr val="000000"/>
           </a:solidFill>
@@ -7346,7 +7571,7 @@
           <a:sym typeface="Arial"/>
         </a:defRPr>
       </a:lvl1pPr>
-      <a:lvl2pPr lvl="1" marR="0" rtl="0" algn="l">
+      <a:lvl2pPr marR="0" lvl="1" algn="l" rtl="0">
         <a:lnSpc>
           <a:spcPct val="100000"/>
         </a:lnSpc>
@@ -7360,7 +7585,7 @@
           <a:srgbClr val="000000"/>
         </a:buClr>
         <a:buFont typeface="Arial"/>
-        <a:defRPr b="0" i="0" spc="0" sz="1400" u="none" cap="none" strike="noStrike">
+        <a:defRPr sz="1400" b="0" i="0" u="none" strike="noStrike" cap="none" spc="0">
           <a:solidFill>
             <a:srgbClr val="000000"/>
           </a:solidFill>
@@ -7370,7 +7595,7 @@
           <a:sym typeface="Arial"/>
         </a:defRPr>
       </a:lvl2pPr>
-      <a:lvl3pPr lvl="2" marR="0" rtl="0" algn="l">
+      <a:lvl3pPr marR="0" lvl="2" algn="l" rtl="0">
         <a:lnSpc>
           <a:spcPct val="100000"/>
         </a:lnSpc>
@@ -7384,7 +7609,7 @@
           <a:srgbClr val="000000"/>
         </a:buClr>
         <a:buFont typeface="Arial"/>
-        <a:defRPr b="0" i="0" spc="0" sz="1400" u="none" cap="none" strike="noStrike">
+        <a:defRPr sz="1400" b="0" i="0" u="none" strike="noStrike" cap="none" spc="0">
           <a:solidFill>
             <a:srgbClr val="000000"/>
           </a:solidFill>
@@ -7394,7 +7619,7 @@
           <a:sym typeface="Arial"/>
         </a:defRPr>
       </a:lvl3pPr>
-      <a:lvl4pPr lvl="3" marR="0" rtl="0" algn="l">
+      <a:lvl4pPr marR="0" lvl="3" algn="l" rtl="0">
         <a:lnSpc>
           <a:spcPct val="100000"/>
         </a:lnSpc>
@@ -7408,7 +7633,7 @@
           <a:srgbClr val="000000"/>
         </a:buClr>
         <a:buFont typeface="Arial"/>
-        <a:defRPr b="0" i="0" spc="0" sz="1400" u="none" cap="none" strike="noStrike">
+        <a:defRPr sz="1400" b="0" i="0" u="none" strike="noStrike" cap="none" spc="0">
           <a:solidFill>
             <a:srgbClr val="000000"/>
           </a:solidFill>
@@ -7418,7 +7643,7 @@
           <a:sym typeface="Arial"/>
         </a:defRPr>
       </a:lvl4pPr>
-      <a:lvl5pPr lvl="4" marR="0" rtl="0" algn="l">
+      <a:lvl5pPr marR="0" lvl="4" algn="l" rtl="0">
         <a:lnSpc>
           <a:spcPct val="100000"/>
         </a:lnSpc>
@@ -7432,7 +7657,7 @@
           <a:srgbClr val="000000"/>
         </a:buClr>
         <a:buFont typeface="Arial"/>
-        <a:defRPr b="0" i="0" spc="0" sz="1400" u="none" cap="none" strike="noStrike">
+        <a:defRPr sz="1400" b="0" i="0" u="none" strike="noStrike" cap="none" spc="0">
           <a:solidFill>
             <a:srgbClr val="000000"/>
           </a:solidFill>
@@ -7442,7 +7667,7 @@
           <a:sym typeface="Arial"/>
         </a:defRPr>
       </a:lvl5pPr>
-      <a:lvl6pPr lvl="5" marR="0" rtl="0" algn="l">
+      <a:lvl6pPr marR="0" lvl="5" algn="l" rtl="0">
         <a:lnSpc>
           <a:spcPct val="100000"/>
         </a:lnSpc>
@@ -7456,7 +7681,7 @@
           <a:srgbClr val="000000"/>
         </a:buClr>
         <a:buFont typeface="Arial"/>
-        <a:defRPr b="0" i="0" spc="0" sz="1400" u="none" cap="none" strike="noStrike">
+        <a:defRPr sz="1400" b="0" i="0" u="none" strike="noStrike" cap="none" spc="0">
           <a:solidFill>
             <a:srgbClr val="000000"/>
           </a:solidFill>
@@ -7466,7 +7691,7 @@
           <a:sym typeface="Arial"/>
         </a:defRPr>
       </a:lvl6pPr>
-      <a:lvl7pPr lvl="6" marR="0" rtl="0" algn="l">
+      <a:lvl7pPr marR="0" lvl="6" algn="l" rtl="0">
         <a:lnSpc>
           <a:spcPct val="100000"/>
         </a:lnSpc>
@@ -7480,7 +7705,7 @@
           <a:srgbClr val="000000"/>
         </a:buClr>
         <a:buFont typeface="Arial"/>
-        <a:defRPr b="0" i="0" spc="0" sz="1400" u="none" cap="none" strike="noStrike">
+        <a:defRPr sz="1400" b="0" i="0" u="none" strike="noStrike" cap="none" spc="0">
           <a:solidFill>
             <a:srgbClr val="000000"/>
           </a:solidFill>
@@ -7490,7 +7715,7 @@
           <a:sym typeface="Arial"/>
         </a:defRPr>
       </a:lvl7pPr>
-      <a:lvl8pPr lvl="7" marR="0" rtl="0" algn="l">
+      <a:lvl8pPr marR="0" lvl="7" algn="l" rtl="0">
         <a:lnSpc>
           <a:spcPct val="100000"/>
         </a:lnSpc>
@@ -7504,7 +7729,7 @@
           <a:srgbClr val="000000"/>
         </a:buClr>
         <a:buFont typeface="Arial"/>
-        <a:defRPr b="0" i="0" spc="0" sz="1400" u="none" cap="none" strike="noStrike">
+        <a:defRPr sz="1400" b="0" i="0" u="none" strike="noStrike" cap="none" spc="0">
           <a:solidFill>
             <a:srgbClr val="000000"/>
           </a:solidFill>
@@ -7514,7 +7739,7 @@
           <a:sym typeface="Arial"/>
         </a:defRPr>
       </a:lvl8pPr>
-      <a:lvl9pPr lvl="8" marR="0" rtl="0" algn="l">
+      <a:lvl9pPr marR="0" lvl="8" algn="l" rtl="0">
         <a:lnSpc>
           <a:spcPct val="100000"/>
         </a:lnSpc>
@@ -7528,7 +7753,7 @@
           <a:srgbClr val="000000"/>
         </a:buClr>
         <a:buFont typeface="Arial"/>
-        <a:defRPr b="0" i="0" spc="0" sz="1400" u="none" cap="none" strike="noStrike">
+        <a:defRPr sz="1400" b="0" i="0" u="none" strike="noStrike" cap="none" spc="0">
           <a:solidFill>
             <a:srgbClr val="000000"/>
           </a:solidFill>
@@ -7544,7 +7769,7 @@
 </file>
 
 <file path=ppt/slides/slide1.xml><?xml version="1.0" encoding="utf-8"?>
-<p:sld xmlns:a="http://schemas.openxmlformats.org/drawingml/2006/main" xmlns:r="http://schemas.openxmlformats.org/officeDocument/2006/relationships" xmlns:mc="http://schemas.openxmlformats.org/markup-compatibility/2006" xmlns:mv="urn:schemas-microsoft-com:mac:vml" xmlns:p="http://schemas.openxmlformats.org/presentationml/2006/main" xmlns:c="http://schemas.openxmlformats.org/drawingml/2006/chart" xmlns:dgm="http://schemas.openxmlformats.org/drawingml/2006/diagram" xmlns:o="urn:schemas-microsoft-com:office:office" xmlns:v="urn:schemas-microsoft-com:vml" xmlns:pvml="urn:schemas-microsoft-com:office:powerpoint" xmlns:com="http://schemas.openxmlformats.org/drawingml/2006/compatibility" xmlns:p14="http://schemas.microsoft.com/office/powerpoint/2010/main" xmlns:p15="http://schemas.microsoft.com/office/powerpoint/2012/main" xmlns:ahyp="http://schemas.microsoft.com/office/drawing/2018/hyperlinkcolor">
+<p:sld xmlns:a="http://schemas.openxmlformats.org/drawingml/2006/main" xmlns:r="http://schemas.openxmlformats.org/officeDocument/2006/relationships" xmlns:p="http://schemas.openxmlformats.org/presentationml/2006/main">
   <p:cSld>
     <p:bg>
       <p:bgPr>
@@ -7556,11 +7781,12 @@
             <a:fillRect/>
           </a:stretch>
         </a:blipFill>
+        <a:effectLst/>
       </p:bgPr>
     </p:bg>
     <p:spTree>
       <p:nvGrpSpPr>
-        <p:cNvPr id="53" name="Shape 53"/>
+        <p:cNvPr id="1" name="Shape 53"/>
         <p:cNvGrpSpPr/>
         <p:nvPr/>
       </p:nvGrpSpPr>
@@ -7581,7 +7807,7 @@
 </file>
 
 <file path=ppt/slides/slide10.xml><?xml version="1.0" encoding="utf-8"?>
-<p:sld xmlns:a="http://schemas.openxmlformats.org/drawingml/2006/main" xmlns:r="http://schemas.openxmlformats.org/officeDocument/2006/relationships" xmlns:mc="http://schemas.openxmlformats.org/markup-compatibility/2006" xmlns:mv="urn:schemas-microsoft-com:mac:vml" xmlns:p="http://schemas.openxmlformats.org/presentationml/2006/main" xmlns:c="http://schemas.openxmlformats.org/drawingml/2006/chart" xmlns:dgm="http://schemas.openxmlformats.org/drawingml/2006/diagram" xmlns:o="urn:schemas-microsoft-com:office:office" xmlns:v="urn:schemas-microsoft-com:vml" xmlns:pvml="urn:schemas-microsoft-com:office:powerpoint" xmlns:com="http://schemas.openxmlformats.org/drawingml/2006/compatibility" xmlns:p14="http://schemas.microsoft.com/office/powerpoint/2010/main" xmlns:p15="http://schemas.microsoft.com/office/powerpoint/2012/main" xmlns:ahyp="http://schemas.microsoft.com/office/drawing/2018/hyperlinkcolor">
+<p:sld xmlns:a="http://schemas.openxmlformats.org/drawingml/2006/main" xmlns:r="http://schemas.openxmlformats.org/officeDocument/2006/relationships" xmlns:p="http://schemas.openxmlformats.org/presentationml/2006/main">
   <p:cSld>
     <p:bg>
       <p:bgPr>
@@ -7593,11 +7819,12 @@
             <a:fillRect/>
           </a:stretch>
         </a:blipFill>
+        <a:effectLst/>
       </p:bgPr>
     </p:bg>
     <p:spTree>
       <p:nvGrpSpPr>
-        <p:cNvPr id="109" name="Shape 109"/>
+        <p:cNvPr id="1" name="Shape 109"/>
         <p:cNvGrpSpPr/>
         <p:nvPr/>
       </p:nvGrpSpPr>
@@ -7609,6 +7836,36 @@
           <a:chExt cx="0" cy="0"/>
         </a:xfrm>
       </p:grpSpPr>
+      <p:pic>
+        <p:nvPicPr>
+          <p:cNvPr id="3" name="Picture 2">
+            <a:extLst>
+              <a:ext uri="{FF2B5EF4-FFF2-40B4-BE49-F238E27FC236}">
+                <a16:creationId xmlns:a16="http://schemas.microsoft.com/office/drawing/2014/main" id="{67FF2369-610B-C5B6-440E-FC51DAAB5E3B}"/>
+              </a:ext>
+            </a:extLst>
+          </p:cNvPr>
+          <p:cNvPicPr>
+            <a:picLocks noChangeAspect="1"/>
+          </p:cNvPicPr>
+          <p:nvPr/>
+        </p:nvPicPr>
+        <p:blipFill>
+          <a:blip r:embed="rId4"/>
+          <a:stretch>
+            <a:fillRect/>
+          </a:stretch>
+        </p:blipFill>
+        <p:spPr>
+          <a:xfrm>
+            <a:off x="6707903" y="144816"/>
+            <a:ext cx="2263537" cy="488784"/>
+          </a:xfrm>
+          <a:prstGeom prst="rect">
+            <a:avLst/>
+          </a:prstGeom>
+        </p:spPr>
+      </p:pic>
     </p:spTree>
   </p:cSld>
   <p:clrMapOvr>
@@ -7618,7 +7875,7 @@
 </file>
 
 <file path=ppt/slides/slide11.xml><?xml version="1.0" encoding="utf-8"?>
-<p:sld xmlns:a="http://schemas.openxmlformats.org/drawingml/2006/main" xmlns:r="http://schemas.openxmlformats.org/officeDocument/2006/relationships" xmlns:mc="http://schemas.openxmlformats.org/markup-compatibility/2006" xmlns:mv="urn:schemas-microsoft-com:mac:vml" xmlns:p="http://schemas.openxmlformats.org/presentationml/2006/main" xmlns:c="http://schemas.openxmlformats.org/drawingml/2006/chart" xmlns:dgm="http://schemas.openxmlformats.org/drawingml/2006/diagram" xmlns:o="urn:schemas-microsoft-com:office:office" xmlns:v="urn:schemas-microsoft-com:vml" xmlns:pvml="urn:schemas-microsoft-com:office:powerpoint" xmlns:com="http://schemas.openxmlformats.org/drawingml/2006/compatibility" xmlns:p14="http://schemas.microsoft.com/office/powerpoint/2010/main" xmlns:p15="http://schemas.microsoft.com/office/powerpoint/2012/main" xmlns:ahyp="http://schemas.microsoft.com/office/drawing/2018/hyperlinkcolor">
+<p:sld xmlns:a="http://schemas.openxmlformats.org/drawingml/2006/main" xmlns:r="http://schemas.openxmlformats.org/officeDocument/2006/relationships" xmlns:p="http://schemas.openxmlformats.org/presentationml/2006/main">
   <p:cSld>
     <p:bg>
       <p:bgPr>
@@ -7630,11 +7887,12 @@
             <a:fillRect/>
           </a:stretch>
         </a:blipFill>
+        <a:effectLst/>
       </p:bgPr>
     </p:bg>
     <p:spTree>
       <p:nvGrpSpPr>
-        <p:cNvPr id="113" name="Shape 113"/>
+        <p:cNvPr id="1" name="Shape 113"/>
         <p:cNvGrpSpPr/>
         <p:nvPr/>
       </p:nvGrpSpPr>
@@ -7655,7 +7913,7 @@
 </file>
 
 <file path=ppt/slides/slide12.xml><?xml version="1.0" encoding="utf-8"?>
-<p:sld xmlns:a="http://schemas.openxmlformats.org/drawingml/2006/main" xmlns:r="http://schemas.openxmlformats.org/officeDocument/2006/relationships" xmlns:mc="http://schemas.openxmlformats.org/markup-compatibility/2006" xmlns:mv="urn:schemas-microsoft-com:mac:vml" xmlns:p="http://schemas.openxmlformats.org/presentationml/2006/main" xmlns:c="http://schemas.openxmlformats.org/drawingml/2006/chart" xmlns:dgm="http://schemas.openxmlformats.org/drawingml/2006/diagram" xmlns:o="urn:schemas-microsoft-com:office:office" xmlns:v="urn:schemas-microsoft-com:vml" xmlns:pvml="urn:schemas-microsoft-com:office:powerpoint" xmlns:com="http://schemas.openxmlformats.org/drawingml/2006/compatibility" xmlns:p14="http://schemas.microsoft.com/office/powerpoint/2010/main" xmlns:p15="http://schemas.microsoft.com/office/powerpoint/2012/main" xmlns:ahyp="http://schemas.microsoft.com/office/drawing/2018/hyperlinkcolor">
+<p:sld xmlns:a="http://schemas.openxmlformats.org/drawingml/2006/main" xmlns:r="http://schemas.openxmlformats.org/officeDocument/2006/relationships" xmlns:p="http://schemas.openxmlformats.org/presentationml/2006/main">
   <p:cSld>
     <p:bg>
       <p:bgPr>
@@ -7667,11 +7925,12 @@
             <a:fillRect/>
           </a:stretch>
         </a:blipFill>
+        <a:effectLst/>
       </p:bgPr>
     </p:bg>
     <p:spTree>
       <p:nvGrpSpPr>
-        <p:cNvPr id="117" name="Shape 117"/>
+        <p:cNvPr id="1" name="Shape 117"/>
         <p:cNvGrpSpPr/>
         <p:nvPr/>
       </p:nvGrpSpPr>
@@ -7703,12 +7962,12 @@
           </a:ln>
         </p:spPr>
         <p:txBody>
-          <a:bodyPr anchorCtr="0" anchor="t" bIns="91425" lIns="91425" spcFirstLastPara="1" rIns="91425" wrap="square" tIns="91425">
+          <a:bodyPr spcFirstLastPara="1" wrap="square" lIns="91425" tIns="91425" rIns="91425" bIns="91425" anchor="t" anchorCtr="0">
             <a:normAutofit/>
           </a:bodyPr>
           <a:lstStyle/>
           <a:p>
-            <a:pPr indent="0" lvl="0" marL="0" rtl="0" algn="l">
+            <a:pPr marL="0" lvl="0" indent="0" algn="l" rtl="0">
               <a:spcBef>
                 <a:spcPts val="0"/>
               </a:spcBef>
@@ -7761,12 +8020,12 @@
           </a:ln>
         </p:spPr>
         <p:txBody>
-          <a:bodyPr anchorCtr="0" anchor="t" bIns="91425" lIns="91425" spcFirstLastPara="1" rIns="91425" wrap="square" tIns="91425">
+          <a:bodyPr spcFirstLastPara="1" wrap="square" lIns="91425" tIns="91425" rIns="91425" bIns="91425" anchor="t" anchorCtr="0">
             <a:normAutofit/>
           </a:bodyPr>
           <a:lstStyle/>
           <a:p>
-            <a:pPr indent="0" lvl="0" marL="0" rtl="0" algn="l">
+            <a:pPr marL="0" lvl="0" indent="0" algn="l" rtl="0">
               <a:spcBef>
                 <a:spcPts val="0"/>
               </a:spcBef>
@@ -7819,12 +8078,12 @@
           </a:ln>
         </p:spPr>
         <p:txBody>
-          <a:bodyPr anchorCtr="0" anchor="t" bIns="91425" lIns="91425" spcFirstLastPara="1" rIns="91425" wrap="square" tIns="91425">
+          <a:bodyPr spcFirstLastPara="1" wrap="square" lIns="91425" tIns="91425" rIns="91425" bIns="91425" anchor="t" anchorCtr="0">
             <a:normAutofit/>
           </a:bodyPr>
           <a:lstStyle/>
           <a:p>
-            <a:pPr indent="0" lvl="0" marL="0" rtl="0" algn="l">
+            <a:pPr marL="0" lvl="0" indent="0" algn="l" rtl="0">
               <a:spcBef>
                 <a:spcPts val="0"/>
               </a:spcBef>
@@ -7877,12 +8136,12 @@
           </a:ln>
         </p:spPr>
         <p:txBody>
-          <a:bodyPr anchorCtr="0" anchor="t" bIns="91425" lIns="91425" spcFirstLastPara="1" rIns="91425" wrap="square" tIns="91425">
+          <a:bodyPr spcFirstLastPara="1" wrap="square" lIns="91425" tIns="91425" rIns="91425" bIns="91425" anchor="t" anchorCtr="0">
             <a:normAutofit/>
           </a:bodyPr>
           <a:lstStyle/>
           <a:p>
-            <a:pPr indent="0" lvl="0" marL="0" rtl="0" algn="l">
+            <a:pPr marL="0" lvl="0" indent="0" algn="l" rtl="0">
               <a:spcBef>
                 <a:spcPts val="0"/>
               </a:spcBef>
@@ -7935,12 +8194,12 @@
           </a:ln>
         </p:spPr>
         <p:txBody>
-          <a:bodyPr anchorCtr="0" anchor="t" bIns="91425" lIns="91425" spcFirstLastPara="1" rIns="91425" wrap="square" tIns="91425">
+          <a:bodyPr spcFirstLastPara="1" wrap="square" lIns="91425" tIns="91425" rIns="91425" bIns="91425" anchor="t" anchorCtr="0">
             <a:normAutofit/>
           </a:bodyPr>
           <a:lstStyle/>
           <a:p>
-            <a:pPr indent="0" lvl="0" marL="0" rtl="0" algn="l">
+            <a:pPr marL="0" lvl="0" indent="0" algn="l" rtl="0">
               <a:spcBef>
                 <a:spcPts val="0"/>
               </a:spcBef>
@@ -7993,12 +8252,12 @@
           </a:ln>
         </p:spPr>
         <p:txBody>
-          <a:bodyPr anchorCtr="0" anchor="t" bIns="91425" lIns="91425" spcFirstLastPara="1" rIns="91425" wrap="square" tIns="91425">
+          <a:bodyPr spcFirstLastPara="1" wrap="square" lIns="91425" tIns="91425" rIns="91425" bIns="91425" anchor="t" anchorCtr="0">
             <a:normAutofit/>
           </a:bodyPr>
           <a:lstStyle/>
           <a:p>
-            <a:pPr indent="0" lvl="0" marL="0" rtl="0" algn="l">
+            <a:pPr marL="0" lvl="0" indent="0" algn="l" rtl="0">
               <a:spcBef>
                 <a:spcPts val="0"/>
               </a:spcBef>
@@ -8051,12 +8310,12 @@
           </a:ln>
         </p:spPr>
         <p:txBody>
-          <a:bodyPr anchorCtr="0" anchor="t" bIns="91425" lIns="91425" spcFirstLastPara="1" rIns="91425" wrap="square" tIns="91425">
+          <a:bodyPr spcFirstLastPara="1" wrap="square" lIns="91425" tIns="91425" rIns="91425" bIns="91425" anchor="t" anchorCtr="0">
             <a:normAutofit/>
           </a:bodyPr>
           <a:lstStyle/>
           <a:p>
-            <a:pPr indent="0" lvl="0" marL="0" rtl="0" algn="l">
+            <a:pPr marL="0" lvl="0" indent="0" algn="l" rtl="0">
               <a:spcBef>
                 <a:spcPts val="0"/>
               </a:spcBef>
@@ -8098,7 +8357,7 @@
 </file>
 
 <file path=ppt/slides/slide13.xml><?xml version="1.0" encoding="utf-8"?>
-<p:sld xmlns:a="http://schemas.openxmlformats.org/drawingml/2006/main" xmlns:r="http://schemas.openxmlformats.org/officeDocument/2006/relationships" xmlns:mc="http://schemas.openxmlformats.org/markup-compatibility/2006" xmlns:mv="urn:schemas-microsoft-com:mac:vml" xmlns:p="http://schemas.openxmlformats.org/presentationml/2006/main" xmlns:c="http://schemas.openxmlformats.org/drawingml/2006/chart" xmlns:dgm="http://schemas.openxmlformats.org/drawingml/2006/diagram" xmlns:o="urn:schemas-microsoft-com:office:office" xmlns:v="urn:schemas-microsoft-com:vml" xmlns:pvml="urn:schemas-microsoft-com:office:powerpoint" xmlns:com="http://schemas.openxmlformats.org/drawingml/2006/compatibility" xmlns:p14="http://schemas.microsoft.com/office/powerpoint/2010/main" xmlns:p15="http://schemas.microsoft.com/office/powerpoint/2012/main" xmlns:ahyp="http://schemas.microsoft.com/office/drawing/2018/hyperlinkcolor">
+<p:sld xmlns:a="http://schemas.openxmlformats.org/drawingml/2006/main" xmlns:r="http://schemas.openxmlformats.org/officeDocument/2006/relationships" xmlns:p="http://schemas.openxmlformats.org/presentationml/2006/main">
   <p:cSld>
     <p:bg>
       <p:bgPr>
@@ -8110,11 +8369,12 @@
             <a:fillRect/>
           </a:stretch>
         </a:blipFill>
+        <a:effectLst/>
       </p:bgPr>
     </p:bg>
     <p:spTree>
       <p:nvGrpSpPr>
-        <p:cNvPr id="128" name="Shape 128"/>
+        <p:cNvPr id="1" name="Shape 128"/>
         <p:cNvGrpSpPr/>
         <p:nvPr/>
       </p:nvGrpSpPr>
@@ -8146,12 +8406,12 @@
           </a:ln>
         </p:spPr>
         <p:txBody>
-          <a:bodyPr anchorCtr="0" anchor="t" bIns="91425" lIns="91425" spcFirstLastPara="1" rIns="91425" wrap="square" tIns="91425">
+          <a:bodyPr spcFirstLastPara="1" wrap="square" lIns="91425" tIns="91425" rIns="91425" bIns="91425" anchor="t" anchorCtr="0">
             <a:normAutofit/>
           </a:bodyPr>
           <a:lstStyle/>
           <a:p>
-            <a:pPr indent="0" lvl="0" marL="0" rtl="0" algn="l">
+            <a:pPr marL="0" lvl="0" indent="0" algn="l" rtl="0">
               <a:spcBef>
                 <a:spcPts val="0"/>
               </a:spcBef>
@@ -8204,12 +8464,12 @@
           </a:ln>
         </p:spPr>
         <p:txBody>
-          <a:bodyPr anchorCtr="0" anchor="t" bIns="91425" lIns="91425" spcFirstLastPara="1" rIns="91425" wrap="square" tIns="91425">
+          <a:bodyPr spcFirstLastPara="1" wrap="square" lIns="91425" tIns="91425" rIns="91425" bIns="91425" anchor="t" anchorCtr="0">
             <a:normAutofit/>
           </a:bodyPr>
           <a:lstStyle/>
           <a:p>
-            <a:pPr indent="0" lvl="0" marL="0" rtl="0" algn="l">
+            <a:pPr marL="0" lvl="0" indent="0" algn="l" rtl="0">
               <a:spcBef>
                 <a:spcPts val="0"/>
               </a:spcBef>
@@ -8262,12 +8522,12 @@
           </a:ln>
         </p:spPr>
         <p:txBody>
-          <a:bodyPr anchorCtr="0" anchor="t" bIns="91425" lIns="91425" spcFirstLastPara="1" rIns="91425" wrap="square" tIns="91425">
+          <a:bodyPr spcFirstLastPara="1" wrap="square" lIns="91425" tIns="91425" rIns="91425" bIns="91425" anchor="t" anchorCtr="0">
             <a:normAutofit/>
           </a:bodyPr>
           <a:lstStyle/>
           <a:p>
-            <a:pPr indent="0" lvl="0" marL="0" rtl="0" algn="l">
+            <a:pPr marL="0" lvl="0" indent="0" algn="l" rtl="0">
               <a:spcBef>
                 <a:spcPts val="0"/>
               </a:spcBef>
@@ -8309,7 +8569,7 @@
 </file>
 
 <file path=ppt/slides/slide14.xml><?xml version="1.0" encoding="utf-8"?>
-<p:sld xmlns:a="http://schemas.openxmlformats.org/drawingml/2006/main" xmlns:r="http://schemas.openxmlformats.org/officeDocument/2006/relationships" xmlns:mc="http://schemas.openxmlformats.org/markup-compatibility/2006" xmlns:mv="urn:schemas-microsoft-com:mac:vml" xmlns:p="http://schemas.openxmlformats.org/presentationml/2006/main" xmlns:c="http://schemas.openxmlformats.org/drawingml/2006/chart" xmlns:dgm="http://schemas.openxmlformats.org/drawingml/2006/diagram" xmlns:o="urn:schemas-microsoft-com:office:office" xmlns:v="urn:schemas-microsoft-com:vml" xmlns:pvml="urn:schemas-microsoft-com:office:powerpoint" xmlns:com="http://schemas.openxmlformats.org/drawingml/2006/compatibility" xmlns:p14="http://schemas.microsoft.com/office/powerpoint/2010/main" xmlns:p15="http://schemas.microsoft.com/office/powerpoint/2012/main" xmlns:ahyp="http://schemas.microsoft.com/office/drawing/2018/hyperlinkcolor">
+<p:sld xmlns:a="http://schemas.openxmlformats.org/drawingml/2006/main" xmlns:r="http://schemas.openxmlformats.org/officeDocument/2006/relationships" xmlns:p="http://schemas.openxmlformats.org/presentationml/2006/main">
   <p:cSld>
     <p:bg>
       <p:bgPr>
@@ -8321,11 +8581,12 @@
             <a:fillRect/>
           </a:stretch>
         </a:blipFill>
+        <a:effectLst/>
       </p:bgPr>
     </p:bg>
     <p:spTree>
       <p:nvGrpSpPr>
-        <p:cNvPr id="135" name="Shape 135"/>
+        <p:cNvPr id="1" name="Shape 135"/>
         <p:cNvGrpSpPr/>
         <p:nvPr/>
       </p:nvGrpSpPr>
@@ -8337,6 +8598,36 @@
           <a:chExt cx="0" cy="0"/>
         </a:xfrm>
       </p:grpSpPr>
+      <p:pic>
+        <p:nvPicPr>
+          <p:cNvPr id="3" name="Picture 2">
+            <a:extLst>
+              <a:ext uri="{FF2B5EF4-FFF2-40B4-BE49-F238E27FC236}">
+                <a16:creationId xmlns:a16="http://schemas.microsoft.com/office/drawing/2014/main" id="{4A0787E9-9E25-4F8A-03D5-C8941E9ADA7F}"/>
+              </a:ext>
+            </a:extLst>
+          </p:cNvPr>
+          <p:cNvPicPr>
+            <a:picLocks noChangeAspect="1"/>
+          </p:cNvPicPr>
+          <p:nvPr/>
+        </p:nvPicPr>
+        <p:blipFill>
+          <a:blip r:embed="rId4"/>
+          <a:stretch>
+            <a:fillRect/>
+          </a:stretch>
+        </p:blipFill>
+        <p:spPr>
+          <a:xfrm>
+            <a:off x="6707903" y="144816"/>
+            <a:ext cx="2263537" cy="488784"/>
+          </a:xfrm>
+          <a:prstGeom prst="rect">
+            <a:avLst/>
+          </a:prstGeom>
+        </p:spPr>
+      </p:pic>
     </p:spTree>
   </p:cSld>
   <p:clrMapOvr>
@@ -8346,7 +8637,7 @@
 </file>
 
 <file path=ppt/slides/slide15.xml><?xml version="1.0" encoding="utf-8"?>
-<p:sld xmlns:a="http://schemas.openxmlformats.org/drawingml/2006/main" xmlns:r="http://schemas.openxmlformats.org/officeDocument/2006/relationships" xmlns:mc="http://schemas.openxmlformats.org/markup-compatibility/2006" xmlns:mv="urn:schemas-microsoft-com:mac:vml" xmlns:p="http://schemas.openxmlformats.org/presentationml/2006/main" xmlns:c="http://schemas.openxmlformats.org/drawingml/2006/chart" xmlns:dgm="http://schemas.openxmlformats.org/drawingml/2006/diagram" xmlns:o="urn:schemas-microsoft-com:office:office" xmlns:v="urn:schemas-microsoft-com:vml" xmlns:pvml="urn:schemas-microsoft-com:office:powerpoint" xmlns:com="http://schemas.openxmlformats.org/drawingml/2006/compatibility" xmlns:p14="http://schemas.microsoft.com/office/powerpoint/2010/main" xmlns:p15="http://schemas.microsoft.com/office/powerpoint/2012/main" xmlns:ahyp="http://schemas.microsoft.com/office/drawing/2018/hyperlinkcolor">
+<p:sld xmlns:a="http://schemas.openxmlformats.org/drawingml/2006/main" xmlns:r="http://schemas.openxmlformats.org/officeDocument/2006/relationships" xmlns:p="http://schemas.openxmlformats.org/presentationml/2006/main">
   <p:cSld>
     <p:bg>
       <p:bgPr>
@@ -8358,11 +8649,12 @@
             <a:fillRect/>
           </a:stretch>
         </a:blipFill>
+        <a:effectLst/>
       </p:bgPr>
     </p:bg>
     <p:spTree>
       <p:nvGrpSpPr>
-        <p:cNvPr id="139" name="Shape 139"/>
+        <p:cNvPr id="1" name="Shape 139"/>
         <p:cNvGrpSpPr/>
         <p:nvPr/>
       </p:nvGrpSpPr>
@@ -8383,7 +8675,7 @@
 </file>
 
 <file path=ppt/slides/slide16.xml><?xml version="1.0" encoding="utf-8"?>
-<p:sld xmlns:a="http://schemas.openxmlformats.org/drawingml/2006/main" xmlns:r="http://schemas.openxmlformats.org/officeDocument/2006/relationships" xmlns:mc="http://schemas.openxmlformats.org/markup-compatibility/2006" xmlns:mv="urn:schemas-microsoft-com:mac:vml" xmlns:p="http://schemas.openxmlformats.org/presentationml/2006/main" xmlns:c="http://schemas.openxmlformats.org/drawingml/2006/chart" xmlns:dgm="http://schemas.openxmlformats.org/drawingml/2006/diagram" xmlns:o="urn:schemas-microsoft-com:office:office" xmlns:v="urn:schemas-microsoft-com:vml" xmlns:pvml="urn:schemas-microsoft-com:office:powerpoint" xmlns:com="http://schemas.openxmlformats.org/drawingml/2006/compatibility" xmlns:p14="http://schemas.microsoft.com/office/powerpoint/2010/main" xmlns:p15="http://schemas.microsoft.com/office/powerpoint/2012/main" xmlns:ahyp="http://schemas.microsoft.com/office/drawing/2018/hyperlinkcolor">
+<p:sld xmlns:a="http://schemas.openxmlformats.org/drawingml/2006/main" xmlns:r="http://schemas.openxmlformats.org/officeDocument/2006/relationships" xmlns:p="http://schemas.openxmlformats.org/presentationml/2006/main">
   <p:cSld>
     <p:bg>
       <p:bgPr>
@@ -8395,11 +8687,12 @@
             <a:fillRect/>
           </a:stretch>
         </a:blipFill>
+        <a:effectLst/>
       </p:bgPr>
     </p:bg>
     <p:spTree>
       <p:nvGrpSpPr>
-        <p:cNvPr id="143" name="Shape 143"/>
+        <p:cNvPr id="1" name="Shape 143"/>
         <p:cNvGrpSpPr/>
         <p:nvPr/>
       </p:nvGrpSpPr>
@@ -8431,12 +8724,12 @@
           </a:ln>
         </p:spPr>
         <p:txBody>
-          <a:bodyPr anchorCtr="0" anchor="t" bIns="91425" lIns="91425" spcFirstLastPara="1" rIns="91425" wrap="square" tIns="91425">
+          <a:bodyPr spcFirstLastPara="1" wrap="square" lIns="91425" tIns="91425" rIns="91425" bIns="91425" anchor="t" anchorCtr="0">
             <a:normAutofit/>
           </a:bodyPr>
           <a:lstStyle/>
           <a:p>
-            <a:pPr indent="0" lvl="0" marL="0" rtl="0" algn="l">
+            <a:pPr marL="0" lvl="0" indent="0" algn="l" rtl="0">
               <a:spcBef>
                 <a:spcPts val="0"/>
               </a:spcBef>
@@ -8489,12 +8782,12 @@
           </a:ln>
         </p:spPr>
         <p:txBody>
-          <a:bodyPr anchorCtr="0" anchor="t" bIns="91425" lIns="91425" spcFirstLastPara="1" rIns="91425" wrap="square" tIns="91425">
+          <a:bodyPr spcFirstLastPara="1" wrap="square" lIns="91425" tIns="91425" rIns="91425" bIns="91425" anchor="t" anchorCtr="0">
             <a:normAutofit/>
           </a:bodyPr>
           <a:lstStyle/>
           <a:p>
-            <a:pPr indent="0" lvl="0" marL="0" rtl="0" algn="l">
+            <a:pPr marL="0" lvl="0" indent="0" algn="l" rtl="0">
               <a:spcBef>
                 <a:spcPts val="0"/>
               </a:spcBef>
@@ -8547,12 +8840,12 @@
           </a:ln>
         </p:spPr>
         <p:txBody>
-          <a:bodyPr anchorCtr="0" anchor="t" bIns="91425" lIns="91425" spcFirstLastPara="1" rIns="91425" wrap="square" tIns="91425">
+          <a:bodyPr spcFirstLastPara="1" wrap="square" lIns="91425" tIns="91425" rIns="91425" bIns="91425" anchor="t" anchorCtr="0">
             <a:normAutofit/>
           </a:bodyPr>
           <a:lstStyle/>
           <a:p>
-            <a:pPr indent="0" lvl="0" marL="0" rtl="0" algn="l">
+            <a:pPr marL="0" lvl="0" indent="0" algn="l" rtl="0">
               <a:spcBef>
                 <a:spcPts val="0"/>
               </a:spcBef>
@@ -8605,12 +8898,12 @@
           </a:ln>
         </p:spPr>
         <p:txBody>
-          <a:bodyPr anchorCtr="0" anchor="t" bIns="91425" lIns="91425" spcFirstLastPara="1" rIns="91425" wrap="square" tIns="91425">
+          <a:bodyPr spcFirstLastPara="1" wrap="square" lIns="91425" tIns="91425" rIns="91425" bIns="91425" anchor="t" anchorCtr="0">
             <a:normAutofit/>
           </a:bodyPr>
           <a:lstStyle/>
           <a:p>
-            <a:pPr indent="0" lvl="0" marL="0" rtl="0" algn="l">
+            <a:pPr marL="0" lvl="0" indent="0" algn="l" rtl="0">
               <a:spcBef>
                 <a:spcPts val="0"/>
               </a:spcBef>
@@ -8663,12 +8956,12 @@
           </a:ln>
         </p:spPr>
         <p:txBody>
-          <a:bodyPr anchorCtr="0" anchor="t" bIns="91425" lIns="91425" spcFirstLastPara="1" rIns="91425" wrap="square" tIns="91425">
+          <a:bodyPr spcFirstLastPara="1" wrap="square" lIns="91425" tIns="91425" rIns="91425" bIns="91425" anchor="t" anchorCtr="0">
             <a:normAutofit/>
           </a:bodyPr>
           <a:lstStyle/>
           <a:p>
-            <a:pPr indent="0" lvl="0" marL="0" rtl="0" algn="l">
+            <a:pPr marL="0" lvl="0" indent="0" algn="l" rtl="0">
               <a:spcBef>
                 <a:spcPts val="0"/>
               </a:spcBef>
@@ -8721,12 +9014,12 @@
           </a:ln>
         </p:spPr>
         <p:txBody>
-          <a:bodyPr anchorCtr="0" anchor="t" bIns="91425" lIns="91425" spcFirstLastPara="1" rIns="91425" wrap="square" tIns="91425">
+          <a:bodyPr spcFirstLastPara="1" wrap="square" lIns="91425" tIns="91425" rIns="91425" bIns="91425" anchor="t" anchorCtr="0">
             <a:normAutofit/>
           </a:bodyPr>
           <a:lstStyle/>
           <a:p>
-            <a:pPr indent="0" lvl="0" marL="0" rtl="0" algn="l">
+            <a:pPr marL="0" lvl="0" indent="0" algn="l" rtl="0">
               <a:spcBef>
                 <a:spcPts val="0"/>
               </a:spcBef>
@@ -8779,12 +9072,12 @@
           </a:ln>
         </p:spPr>
         <p:txBody>
-          <a:bodyPr anchorCtr="0" anchor="t" bIns="91425" lIns="91425" spcFirstLastPara="1" rIns="91425" wrap="square" tIns="91425">
+          <a:bodyPr spcFirstLastPara="1" wrap="square" lIns="91425" tIns="91425" rIns="91425" bIns="91425" anchor="t" anchorCtr="0">
             <a:normAutofit/>
           </a:bodyPr>
           <a:lstStyle/>
           <a:p>
-            <a:pPr indent="0" lvl="0" marL="0" rtl="0" algn="l">
+            <a:pPr marL="0" lvl="0" indent="0" algn="l" rtl="0">
               <a:spcBef>
                 <a:spcPts val="0"/>
               </a:spcBef>
@@ -8826,7 +9119,7 @@
 </file>
 
 <file path=ppt/slides/slide17.xml><?xml version="1.0" encoding="utf-8"?>
-<p:sld xmlns:a="http://schemas.openxmlformats.org/drawingml/2006/main" xmlns:r="http://schemas.openxmlformats.org/officeDocument/2006/relationships" xmlns:mc="http://schemas.openxmlformats.org/markup-compatibility/2006" xmlns:mv="urn:schemas-microsoft-com:mac:vml" xmlns:p="http://schemas.openxmlformats.org/presentationml/2006/main" xmlns:c="http://schemas.openxmlformats.org/drawingml/2006/chart" xmlns:dgm="http://schemas.openxmlformats.org/drawingml/2006/diagram" xmlns:o="urn:schemas-microsoft-com:office:office" xmlns:v="urn:schemas-microsoft-com:vml" xmlns:pvml="urn:schemas-microsoft-com:office:powerpoint" xmlns:com="http://schemas.openxmlformats.org/drawingml/2006/compatibility" xmlns:p14="http://schemas.microsoft.com/office/powerpoint/2010/main" xmlns:p15="http://schemas.microsoft.com/office/powerpoint/2012/main" xmlns:ahyp="http://schemas.microsoft.com/office/drawing/2018/hyperlinkcolor">
+<p:sld xmlns:a="http://schemas.openxmlformats.org/drawingml/2006/main" xmlns:r="http://schemas.openxmlformats.org/officeDocument/2006/relationships" xmlns:p="http://schemas.openxmlformats.org/presentationml/2006/main">
   <p:cSld>
     <p:bg>
       <p:bgPr>
@@ -8838,11 +9131,12 @@
             <a:fillRect/>
           </a:stretch>
         </a:blipFill>
+        <a:effectLst/>
       </p:bgPr>
     </p:bg>
     <p:spTree>
       <p:nvGrpSpPr>
-        <p:cNvPr id="154" name="Shape 154"/>
+        <p:cNvPr id="1" name="Shape 154"/>
         <p:cNvGrpSpPr/>
         <p:nvPr/>
       </p:nvGrpSpPr>
@@ -8874,12 +9168,12 @@
           </a:ln>
         </p:spPr>
         <p:txBody>
-          <a:bodyPr anchorCtr="0" anchor="t" bIns="91425" lIns="91425" spcFirstLastPara="1" rIns="91425" wrap="square" tIns="91425">
+          <a:bodyPr spcFirstLastPara="1" wrap="square" lIns="91425" tIns="91425" rIns="91425" bIns="91425" anchor="t" anchorCtr="0">
             <a:normAutofit/>
           </a:bodyPr>
           <a:lstStyle/>
           <a:p>
-            <a:pPr indent="0" lvl="0" marL="0" rtl="0" algn="l">
+            <a:pPr marL="0" lvl="0" indent="0" algn="l" rtl="0">
               <a:spcBef>
                 <a:spcPts val="0"/>
               </a:spcBef>
@@ -8932,12 +9226,12 @@
           </a:ln>
         </p:spPr>
         <p:txBody>
-          <a:bodyPr anchorCtr="0" anchor="t" bIns="91425" lIns="91425" spcFirstLastPara="1" rIns="91425" wrap="square" tIns="91425">
+          <a:bodyPr spcFirstLastPara="1" wrap="square" lIns="91425" tIns="91425" rIns="91425" bIns="91425" anchor="t" anchorCtr="0">
             <a:normAutofit/>
           </a:bodyPr>
           <a:lstStyle/>
           <a:p>
-            <a:pPr indent="0" lvl="0" marL="0" rtl="0" algn="l">
+            <a:pPr marL="0" lvl="0" indent="0" algn="l" rtl="0">
               <a:spcBef>
                 <a:spcPts val="0"/>
               </a:spcBef>
@@ -8990,12 +9284,12 @@
           </a:ln>
         </p:spPr>
         <p:txBody>
-          <a:bodyPr anchorCtr="0" anchor="t" bIns="91425" lIns="91425" spcFirstLastPara="1" rIns="91425" wrap="square" tIns="91425">
+          <a:bodyPr spcFirstLastPara="1" wrap="square" lIns="91425" tIns="91425" rIns="91425" bIns="91425" anchor="t" anchorCtr="0">
             <a:normAutofit/>
           </a:bodyPr>
           <a:lstStyle/>
           <a:p>
-            <a:pPr indent="0" lvl="0" marL="0" rtl="0" algn="l">
+            <a:pPr marL="0" lvl="0" indent="0" algn="l" rtl="0">
               <a:spcBef>
                 <a:spcPts val="0"/>
               </a:spcBef>
@@ -9037,7 +9331,7 @@
 </file>
 
 <file path=ppt/slides/slide18.xml><?xml version="1.0" encoding="utf-8"?>
-<p:sld xmlns:a="http://schemas.openxmlformats.org/drawingml/2006/main" xmlns:r="http://schemas.openxmlformats.org/officeDocument/2006/relationships" xmlns:mc="http://schemas.openxmlformats.org/markup-compatibility/2006" xmlns:mv="urn:schemas-microsoft-com:mac:vml" xmlns:p="http://schemas.openxmlformats.org/presentationml/2006/main" xmlns:c="http://schemas.openxmlformats.org/drawingml/2006/chart" xmlns:dgm="http://schemas.openxmlformats.org/drawingml/2006/diagram" xmlns:o="urn:schemas-microsoft-com:office:office" xmlns:v="urn:schemas-microsoft-com:vml" xmlns:pvml="urn:schemas-microsoft-com:office:powerpoint" xmlns:com="http://schemas.openxmlformats.org/drawingml/2006/compatibility" xmlns:p14="http://schemas.microsoft.com/office/powerpoint/2010/main" xmlns:p15="http://schemas.microsoft.com/office/powerpoint/2012/main" xmlns:ahyp="http://schemas.microsoft.com/office/drawing/2018/hyperlinkcolor">
+<p:sld xmlns:a="http://schemas.openxmlformats.org/drawingml/2006/main" xmlns:r="http://schemas.openxmlformats.org/officeDocument/2006/relationships" xmlns:p="http://schemas.openxmlformats.org/presentationml/2006/main">
   <p:cSld>
     <p:bg>
       <p:bgPr>
@@ -9049,11 +9343,12 @@
             <a:fillRect/>
           </a:stretch>
         </a:blipFill>
+        <a:effectLst/>
       </p:bgPr>
     </p:bg>
     <p:spTree>
       <p:nvGrpSpPr>
-        <p:cNvPr id="161" name="Shape 161"/>
+        <p:cNvPr id="1" name="Shape 161"/>
         <p:cNvGrpSpPr/>
         <p:nvPr/>
       </p:nvGrpSpPr>
@@ -9065,6 +9360,36 @@
           <a:chExt cx="0" cy="0"/>
         </a:xfrm>
       </p:grpSpPr>
+      <p:pic>
+        <p:nvPicPr>
+          <p:cNvPr id="3" name="Picture 2">
+            <a:extLst>
+              <a:ext uri="{FF2B5EF4-FFF2-40B4-BE49-F238E27FC236}">
+                <a16:creationId xmlns:a16="http://schemas.microsoft.com/office/drawing/2014/main" id="{989C5B95-C614-FB59-F006-E2AEA48F6461}"/>
+              </a:ext>
+            </a:extLst>
+          </p:cNvPr>
+          <p:cNvPicPr>
+            <a:picLocks noChangeAspect="1"/>
+          </p:cNvPicPr>
+          <p:nvPr/>
+        </p:nvPicPr>
+        <p:blipFill>
+          <a:blip r:embed="rId4"/>
+          <a:stretch>
+            <a:fillRect/>
+          </a:stretch>
+        </p:blipFill>
+        <p:spPr>
+          <a:xfrm>
+            <a:off x="6707903" y="144816"/>
+            <a:ext cx="2263537" cy="488784"/>
+          </a:xfrm>
+          <a:prstGeom prst="rect">
+            <a:avLst/>
+          </a:prstGeom>
+        </p:spPr>
+      </p:pic>
     </p:spTree>
   </p:cSld>
   <p:clrMapOvr>
@@ -9074,7 +9399,7 @@
 </file>
 
 <file path=ppt/slides/slide19.xml><?xml version="1.0" encoding="utf-8"?>
-<p:sld xmlns:a="http://schemas.openxmlformats.org/drawingml/2006/main" xmlns:r="http://schemas.openxmlformats.org/officeDocument/2006/relationships" xmlns:mc="http://schemas.openxmlformats.org/markup-compatibility/2006" xmlns:mv="urn:schemas-microsoft-com:mac:vml" xmlns:p="http://schemas.openxmlformats.org/presentationml/2006/main" xmlns:c="http://schemas.openxmlformats.org/drawingml/2006/chart" xmlns:dgm="http://schemas.openxmlformats.org/drawingml/2006/diagram" xmlns:o="urn:schemas-microsoft-com:office:office" xmlns:v="urn:schemas-microsoft-com:vml" xmlns:pvml="urn:schemas-microsoft-com:office:powerpoint" xmlns:com="http://schemas.openxmlformats.org/drawingml/2006/compatibility" xmlns:p14="http://schemas.microsoft.com/office/powerpoint/2010/main" xmlns:p15="http://schemas.microsoft.com/office/powerpoint/2012/main" xmlns:ahyp="http://schemas.microsoft.com/office/drawing/2018/hyperlinkcolor">
+<p:sld xmlns:a="http://schemas.openxmlformats.org/drawingml/2006/main" xmlns:r="http://schemas.openxmlformats.org/officeDocument/2006/relationships" xmlns:p="http://schemas.openxmlformats.org/presentationml/2006/main">
   <p:cSld>
     <p:bg>
       <p:bgPr>
@@ -9086,11 +9411,12 @@
             <a:fillRect/>
           </a:stretch>
         </a:blipFill>
+        <a:effectLst/>
       </p:bgPr>
     </p:bg>
     <p:spTree>
       <p:nvGrpSpPr>
-        <p:cNvPr id="165" name="Shape 165"/>
+        <p:cNvPr id="1" name="Shape 165"/>
         <p:cNvGrpSpPr/>
         <p:nvPr/>
       </p:nvGrpSpPr>
@@ -9111,7 +9437,7 @@
 </file>
 
 <file path=ppt/slides/slide2.xml><?xml version="1.0" encoding="utf-8"?>
-<p:sld xmlns:a="http://schemas.openxmlformats.org/drawingml/2006/main" xmlns:r="http://schemas.openxmlformats.org/officeDocument/2006/relationships" xmlns:mc="http://schemas.openxmlformats.org/markup-compatibility/2006" xmlns:mv="urn:schemas-microsoft-com:mac:vml" xmlns:p="http://schemas.openxmlformats.org/presentationml/2006/main" xmlns:c="http://schemas.openxmlformats.org/drawingml/2006/chart" xmlns:dgm="http://schemas.openxmlformats.org/drawingml/2006/diagram" xmlns:o="urn:schemas-microsoft-com:office:office" xmlns:v="urn:schemas-microsoft-com:vml" xmlns:pvml="urn:schemas-microsoft-com:office:powerpoint" xmlns:com="http://schemas.openxmlformats.org/drawingml/2006/compatibility" xmlns:p14="http://schemas.microsoft.com/office/powerpoint/2010/main" xmlns:p15="http://schemas.microsoft.com/office/powerpoint/2012/main" xmlns:ahyp="http://schemas.microsoft.com/office/drawing/2018/hyperlinkcolor">
+<p:sld xmlns:a="http://schemas.openxmlformats.org/drawingml/2006/main" xmlns:r="http://schemas.openxmlformats.org/officeDocument/2006/relationships" xmlns:p="http://schemas.openxmlformats.org/presentationml/2006/main">
   <p:cSld>
     <p:bg>
       <p:bgPr>
@@ -9123,11 +9449,12 @@
             <a:fillRect/>
           </a:stretch>
         </a:blipFill>
+        <a:effectLst/>
       </p:bgPr>
     </p:bg>
     <p:spTree>
       <p:nvGrpSpPr>
-        <p:cNvPr id="57" name="Shape 57"/>
+        <p:cNvPr id="1" name="Shape 57"/>
         <p:cNvGrpSpPr/>
         <p:nvPr/>
       </p:nvGrpSpPr>
@@ -9139,6 +9466,36 @@
           <a:chExt cx="0" cy="0"/>
         </a:xfrm>
       </p:grpSpPr>
+      <p:pic>
+        <p:nvPicPr>
+          <p:cNvPr id="3" name="Picture 2">
+            <a:extLst>
+              <a:ext uri="{FF2B5EF4-FFF2-40B4-BE49-F238E27FC236}">
+                <a16:creationId xmlns:a16="http://schemas.microsoft.com/office/drawing/2014/main" id="{20A16F48-3530-B353-69F7-9FB87C8B771D}"/>
+              </a:ext>
+            </a:extLst>
+          </p:cNvPr>
+          <p:cNvPicPr>
+            <a:picLocks noChangeAspect="1"/>
+          </p:cNvPicPr>
+          <p:nvPr/>
+        </p:nvPicPr>
+        <p:blipFill>
+          <a:blip r:embed="rId4"/>
+          <a:stretch>
+            <a:fillRect/>
+          </a:stretch>
+        </p:blipFill>
+        <p:spPr>
+          <a:xfrm>
+            <a:off x="6707903" y="144816"/>
+            <a:ext cx="2263537" cy="488784"/>
+          </a:xfrm>
+          <a:prstGeom prst="rect">
+            <a:avLst/>
+          </a:prstGeom>
+        </p:spPr>
+      </p:pic>
     </p:spTree>
   </p:cSld>
   <p:clrMapOvr>
@@ -9148,7 +9505,7 @@
 </file>
 
 <file path=ppt/slides/slide20.xml><?xml version="1.0" encoding="utf-8"?>
-<p:sld xmlns:a="http://schemas.openxmlformats.org/drawingml/2006/main" xmlns:r="http://schemas.openxmlformats.org/officeDocument/2006/relationships" xmlns:mc="http://schemas.openxmlformats.org/markup-compatibility/2006" xmlns:mv="urn:schemas-microsoft-com:mac:vml" xmlns:p="http://schemas.openxmlformats.org/presentationml/2006/main" xmlns:c="http://schemas.openxmlformats.org/drawingml/2006/chart" xmlns:dgm="http://schemas.openxmlformats.org/drawingml/2006/diagram" xmlns:o="urn:schemas-microsoft-com:office:office" xmlns:v="urn:schemas-microsoft-com:vml" xmlns:pvml="urn:schemas-microsoft-com:office:powerpoint" xmlns:com="http://schemas.openxmlformats.org/drawingml/2006/compatibility" xmlns:p14="http://schemas.microsoft.com/office/powerpoint/2010/main" xmlns:p15="http://schemas.microsoft.com/office/powerpoint/2012/main" xmlns:ahyp="http://schemas.microsoft.com/office/drawing/2018/hyperlinkcolor">
+<p:sld xmlns:a="http://schemas.openxmlformats.org/drawingml/2006/main" xmlns:r="http://schemas.openxmlformats.org/officeDocument/2006/relationships" xmlns:p="http://schemas.openxmlformats.org/presentationml/2006/main">
   <p:cSld>
     <p:bg>
       <p:bgPr>
@@ -9160,11 +9517,12 @@
             <a:fillRect/>
           </a:stretch>
         </a:blipFill>
+        <a:effectLst/>
       </p:bgPr>
     </p:bg>
     <p:spTree>
       <p:nvGrpSpPr>
-        <p:cNvPr id="169" name="Shape 169"/>
+        <p:cNvPr id="1" name="Shape 169"/>
         <p:cNvGrpSpPr/>
         <p:nvPr/>
       </p:nvGrpSpPr>
@@ -9196,12 +9554,12 @@
           </a:ln>
         </p:spPr>
         <p:txBody>
-          <a:bodyPr anchorCtr="0" anchor="t" bIns="91425" lIns="91425" spcFirstLastPara="1" rIns="91425" wrap="square" tIns="91425">
+          <a:bodyPr spcFirstLastPara="1" wrap="square" lIns="91425" tIns="91425" rIns="91425" bIns="91425" anchor="t" anchorCtr="0">
             <a:normAutofit/>
           </a:bodyPr>
           <a:lstStyle/>
           <a:p>
-            <a:pPr indent="0" lvl="0" marL="0" rtl="0" algn="l">
+            <a:pPr marL="0" lvl="0" indent="0" algn="l" rtl="0">
               <a:spcBef>
                 <a:spcPts val="0"/>
               </a:spcBef>
@@ -9254,12 +9612,12 @@
           </a:ln>
         </p:spPr>
         <p:txBody>
-          <a:bodyPr anchorCtr="0" anchor="t" bIns="91425" lIns="91425" spcFirstLastPara="1" rIns="91425" wrap="square" tIns="91425">
+          <a:bodyPr spcFirstLastPara="1" wrap="square" lIns="91425" tIns="91425" rIns="91425" bIns="91425" anchor="t" anchorCtr="0">
             <a:normAutofit/>
           </a:bodyPr>
           <a:lstStyle/>
           <a:p>
-            <a:pPr indent="0" lvl="0" marL="0" rtl="0" algn="l">
+            <a:pPr marL="0" lvl="0" indent="0" algn="l" rtl="0">
               <a:spcBef>
                 <a:spcPts val="0"/>
               </a:spcBef>
@@ -9312,12 +9670,12 @@
           </a:ln>
         </p:spPr>
         <p:txBody>
-          <a:bodyPr anchorCtr="0" anchor="t" bIns="91425" lIns="91425" spcFirstLastPara="1" rIns="91425" wrap="square" tIns="91425">
+          <a:bodyPr spcFirstLastPara="1" wrap="square" lIns="91425" tIns="91425" rIns="91425" bIns="91425" anchor="t" anchorCtr="0">
             <a:normAutofit/>
           </a:bodyPr>
           <a:lstStyle/>
           <a:p>
-            <a:pPr indent="0" lvl="0" marL="0" rtl="0" algn="l">
+            <a:pPr marL="0" lvl="0" indent="0" algn="l" rtl="0">
               <a:spcBef>
                 <a:spcPts val="0"/>
               </a:spcBef>
@@ -9370,12 +9728,12 @@
           </a:ln>
         </p:spPr>
         <p:txBody>
-          <a:bodyPr anchorCtr="0" anchor="t" bIns="91425" lIns="91425" spcFirstLastPara="1" rIns="91425" wrap="square" tIns="91425">
+          <a:bodyPr spcFirstLastPara="1" wrap="square" lIns="91425" tIns="91425" rIns="91425" bIns="91425" anchor="t" anchorCtr="0">
             <a:normAutofit/>
           </a:bodyPr>
           <a:lstStyle/>
           <a:p>
-            <a:pPr indent="0" lvl="0" marL="0" rtl="0" algn="l">
+            <a:pPr marL="0" lvl="0" indent="0" algn="l" rtl="0">
               <a:spcBef>
                 <a:spcPts val="0"/>
               </a:spcBef>
@@ -9428,12 +9786,12 @@
           </a:ln>
         </p:spPr>
         <p:txBody>
-          <a:bodyPr anchorCtr="0" anchor="t" bIns="91425" lIns="91425" spcFirstLastPara="1" rIns="91425" wrap="square" tIns="91425">
+          <a:bodyPr spcFirstLastPara="1" wrap="square" lIns="91425" tIns="91425" rIns="91425" bIns="91425" anchor="t" anchorCtr="0">
             <a:normAutofit/>
           </a:bodyPr>
           <a:lstStyle/>
           <a:p>
-            <a:pPr indent="0" lvl="0" marL="0" rtl="0" algn="l">
+            <a:pPr marL="0" lvl="0" indent="0" algn="l" rtl="0">
               <a:spcBef>
                 <a:spcPts val="0"/>
               </a:spcBef>
@@ -9486,12 +9844,12 @@
           </a:ln>
         </p:spPr>
         <p:txBody>
-          <a:bodyPr anchorCtr="0" anchor="t" bIns="91425" lIns="91425" spcFirstLastPara="1" rIns="91425" wrap="square" tIns="91425">
+          <a:bodyPr spcFirstLastPara="1" wrap="square" lIns="91425" tIns="91425" rIns="91425" bIns="91425" anchor="t" anchorCtr="0">
             <a:normAutofit/>
           </a:bodyPr>
           <a:lstStyle/>
           <a:p>
-            <a:pPr indent="0" lvl="0" marL="0" rtl="0" algn="l">
+            <a:pPr marL="0" lvl="0" indent="0" algn="l" rtl="0">
               <a:spcBef>
                 <a:spcPts val="0"/>
               </a:spcBef>
@@ -9544,12 +9902,12 @@
           </a:ln>
         </p:spPr>
         <p:txBody>
-          <a:bodyPr anchorCtr="0" anchor="t" bIns="91425" lIns="91425" spcFirstLastPara="1" rIns="91425" wrap="square" tIns="91425">
+          <a:bodyPr spcFirstLastPara="1" wrap="square" lIns="91425" tIns="91425" rIns="91425" bIns="91425" anchor="t" anchorCtr="0">
             <a:normAutofit/>
           </a:bodyPr>
           <a:lstStyle/>
           <a:p>
-            <a:pPr indent="0" lvl="0" marL="0" rtl="0" algn="l">
+            <a:pPr marL="0" lvl="0" indent="0" algn="l" rtl="0">
               <a:spcBef>
                 <a:spcPts val="0"/>
               </a:spcBef>
@@ -9591,7 +9949,7 @@
 </file>
 
 <file path=ppt/slides/slide21.xml><?xml version="1.0" encoding="utf-8"?>
-<p:sld xmlns:a="http://schemas.openxmlformats.org/drawingml/2006/main" xmlns:r="http://schemas.openxmlformats.org/officeDocument/2006/relationships" xmlns:mc="http://schemas.openxmlformats.org/markup-compatibility/2006" xmlns:mv="urn:schemas-microsoft-com:mac:vml" xmlns:p="http://schemas.openxmlformats.org/presentationml/2006/main" xmlns:c="http://schemas.openxmlformats.org/drawingml/2006/chart" xmlns:dgm="http://schemas.openxmlformats.org/drawingml/2006/diagram" xmlns:o="urn:schemas-microsoft-com:office:office" xmlns:v="urn:schemas-microsoft-com:vml" xmlns:pvml="urn:schemas-microsoft-com:office:powerpoint" xmlns:com="http://schemas.openxmlformats.org/drawingml/2006/compatibility" xmlns:p14="http://schemas.microsoft.com/office/powerpoint/2010/main" xmlns:p15="http://schemas.microsoft.com/office/powerpoint/2012/main" xmlns:ahyp="http://schemas.microsoft.com/office/drawing/2018/hyperlinkcolor">
+<p:sld xmlns:a="http://schemas.openxmlformats.org/drawingml/2006/main" xmlns:r="http://schemas.openxmlformats.org/officeDocument/2006/relationships" xmlns:p="http://schemas.openxmlformats.org/presentationml/2006/main">
   <p:cSld>
     <p:bg>
       <p:bgPr>
@@ -9603,11 +9961,12 @@
             <a:fillRect/>
           </a:stretch>
         </a:blipFill>
+        <a:effectLst/>
       </p:bgPr>
     </p:bg>
     <p:spTree>
       <p:nvGrpSpPr>
-        <p:cNvPr id="180" name="Shape 180"/>
+        <p:cNvPr id="1" name="Shape 180"/>
         <p:cNvGrpSpPr/>
         <p:nvPr/>
       </p:nvGrpSpPr>
@@ -9639,12 +9998,12 @@
           </a:ln>
         </p:spPr>
         <p:txBody>
-          <a:bodyPr anchorCtr="0" anchor="t" bIns="91425" lIns="91425" spcFirstLastPara="1" rIns="91425" wrap="square" tIns="91425">
+          <a:bodyPr spcFirstLastPara="1" wrap="square" lIns="91425" tIns="91425" rIns="91425" bIns="91425" anchor="t" anchorCtr="0">
             <a:normAutofit/>
           </a:bodyPr>
           <a:lstStyle/>
           <a:p>
-            <a:pPr indent="0" lvl="0" marL="0" rtl="0" algn="l">
+            <a:pPr marL="0" lvl="0" indent="0" algn="l" rtl="0">
               <a:spcBef>
                 <a:spcPts val="0"/>
               </a:spcBef>
@@ -9697,12 +10056,12 @@
           </a:ln>
         </p:spPr>
         <p:txBody>
-          <a:bodyPr anchorCtr="0" anchor="t" bIns="91425" lIns="91425" spcFirstLastPara="1" rIns="91425" wrap="square" tIns="91425">
+          <a:bodyPr spcFirstLastPara="1" wrap="square" lIns="91425" tIns="91425" rIns="91425" bIns="91425" anchor="t" anchorCtr="0">
             <a:normAutofit/>
           </a:bodyPr>
           <a:lstStyle/>
           <a:p>
-            <a:pPr indent="0" lvl="0" marL="0" rtl="0" algn="l">
+            <a:pPr marL="0" lvl="0" indent="0" algn="l" rtl="0">
               <a:spcBef>
                 <a:spcPts val="0"/>
               </a:spcBef>
@@ -9755,12 +10114,12 @@
           </a:ln>
         </p:spPr>
         <p:txBody>
-          <a:bodyPr anchorCtr="0" anchor="t" bIns="91425" lIns="91425" spcFirstLastPara="1" rIns="91425" wrap="square" tIns="91425">
+          <a:bodyPr spcFirstLastPara="1" wrap="square" lIns="91425" tIns="91425" rIns="91425" bIns="91425" anchor="t" anchorCtr="0">
             <a:normAutofit/>
           </a:bodyPr>
           <a:lstStyle/>
           <a:p>
-            <a:pPr indent="0" lvl="0" marL="0" rtl="0" algn="l">
+            <a:pPr marL="0" lvl="0" indent="0" algn="l" rtl="0">
               <a:spcBef>
                 <a:spcPts val="0"/>
               </a:spcBef>
@@ -9802,7 +10161,7 @@
 </file>
 
 <file path=ppt/slides/slide22.xml><?xml version="1.0" encoding="utf-8"?>
-<p:sld xmlns:a="http://schemas.openxmlformats.org/drawingml/2006/main" xmlns:r="http://schemas.openxmlformats.org/officeDocument/2006/relationships" xmlns:mc="http://schemas.openxmlformats.org/markup-compatibility/2006" xmlns:mv="urn:schemas-microsoft-com:mac:vml" xmlns:p="http://schemas.openxmlformats.org/presentationml/2006/main" xmlns:c="http://schemas.openxmlformats.org/drawingml/2006/chart" xmlns:dgm="http://schemas.openxmlformats.org/drawingml/2006/diagram" xmlns:o="urn:schemas-microsoft-com:office:office" xmlns:v="urn:schemas-microsoft-com:vml" xmlns:pvml="urn:schemas-microsoft-com:office:powerpoint" xmlns:com="http://schemas.openxmlformats.org/drawingml/2006/compatibility" xmlns:p14="http://schemas.microsoft.com/office/powerpoint/2010/main" xmlns:p15="http://schemas.microsoft.com/office/powerpoint/2012/main" xmlns:ahyp="http://schemas.microsoft.com/office/drawing/2018/hyperlinkcolor">
+<p:sld xmlns:a="http://schemas.openxmlformats.org/drawingml/2006/main" xmlns:r="http://schemas.openxmlformats.org/officeDocument/2006/relationships" xmlns:p="http://schemas.openxmlformats.org/presentationml/2006/main">
   <p:cSld>
     <p:bg>
       <p:bgPr>
@@ -9814,11 +10173,12 @@
             <a:fillRect/>
           </a:stretch>
         </a:blipFill>
+        <a:effectLst/>
       </p:bgPr>
     </p:bg>
     <p:spTree>
       <p:nvGrpSpPr>
-        <p:cNvPr id="187" name="Shape 187"/>
+        <p:cNvPr id="1" name="Shape 187"/>
         <p:cNvGrpSpPr/>
         <p:nvPr/>
       </p:nvGrpSpPr>
@@ -9830,6 +10190,36 @@
           <a:chExt cx="0" cy="0"/>
         </a:xfrm>
       </p:grpSpPr>
+      <p:pic>
+        <p:nvPicPr>
+          <p:cNvPr id="3" name="Picture 2">
+            <a:extLst>
+              <a:ext uri="{FF2B5EF4-FFF2-40B4-BE49-F238E27FC236}">
+                <a16:creationId xmlns:a16="http://schemas.microsoft.com/office/drawing/2014/main" id="{EDC72034-9AD4-C64F-27B3-9CA9C80E460C}"/>
+              </a:ext>
+            </a:extLst>
+          </p:cNvPr>
+          <p:cNvPicPr>
+            <a:picLocks noChangeAspect="1"/>
+          </p:cNvPicPr>
+          <p:nvPr/>
+        </p:nvPicPr>
+        <p:blipFill>
+          <a:blip r:embed="rId4"/>
+          <a:stretch>
+            <a:fillRect/>
+          </a:stretch>
+        </p:blipFill>
+        <p:spPr>
+          <a:xfrm>
+            <a:off x="6707903" y="144816"/>
+            <a:ext cx="2263537" cy="488784"/>
+          </a:xfrm>
+          <a:prstGeom prst="rect">
+            <a:avLst/>
+          </a:prstGeom>
+        </p:spPr>
+      </p:pic>
     </p:spTree>
   </p:cSld>
   <p:clrMapOvr>
@@ -9839,7 +10229,7 @@
 </file>
 
 <file path=ppt/slides/slide3.xml><?xml version="1.0" encoding="utf-8"?>
-<p:sld xmlns:a="http://schemas.openxmlformats.org/drawingml/2006/main" xmlns:r="http://schemas.openxmlformats.org/officeDocument/2006/relationships" xmlns:mc="http://schemas.openxmlformats.org/markup-compatibility/2006" xmlns:mv="urn:schemas-microsoft-com:mac:vml" xmlns:p="http://schemas.openxmlformats.org/presentationml/2006/main" xmlns:c="http://schemas.openxmlformats.org/drawingml/2006/chart" xmlns:dgm="http://schemas.openxmlformats.org/drawingml/2006/diagram" xmlns:o="urn:schemas-microsoft-com:office:office" xmlns:v="urn:schemas-microsoft-com:vml" xmlns:pvml="urn:schemas-microsoft-com:office:powerpoint" xmlns:com="http://schemas.openxmlformats.org/drawingml/2006/compatibility" xmlns:p14="http://schemas.microsoft.com/office/powerpoint/2010/main" xmlns:p15="http://schemas.microsoft.com/office/powerpoint/2012/main" xmlns:ahyp="http://schemas.microsoft.com/office/drawing/2018/hyperlinkcolor">
+<p:sld xmlns:a="http://schemas.openxmlformats.org/drawingml/2006/main" xmlns:r="http://schemas.openxmlformats.org/officeDocument/2006/relationships" xmlns:p="http://schemas.openxmlformats.org/presentationml/2006/main">
   <p:cSld>
     <p:bg>
       <p:bgPr>
@@ -9851,11 +10241,12 @@
             <a:fillRect/>
           </a:stretch>
         </a:blipFill>
+        <a:effectLst/>
       </p:bgPr>
     </p:bg>
     <p:spTree>
       <p:nvGrpSpPr>
-        <p:cNvPr id="61" name="Shape 61"/>
+        <p:cNvPr id="1" name="Shape 61"/>
         <p:cNvGrpSpPr/>
         <p:nvPr/>
       </p:nvGrpSpPr>
@@ -9876,7 +10267,7 @@
 </file>
 
 <file path=ppt/slides/slide4.xml><?xml version="1.0" encoding="utf-8"?>
-<p:sld xmlns:a="http://schemas.openxmlformats.org/drawingml/2006/main" xmlns:r="http://schemas.openxmlformats.org/officeDocument/2006/relationships" xmlns:mc="http://schemas.openxmlformats.org/markup-compatibility/2006" xmlns:mv="urn:schemas-microsoft-com:mac:vml" xmlns:p="http://schemas.openxmlformats.org/presentationml/2006/main" xmlns:c="http://schemas.openxmlformats.org/drawingml/2006/chart" xmlns:dgm="http://schemas.openxmlformats.org/drawingml/2006/diagram" xmlns:o="urn:schemas-microsoft-com:office:office" xmlns:v="urn:schemas-microsoft-com:vml" xmlns:pvml="urn:schemas-microsoft-com:office:powerpoint" xmlns:com="http://schemas.openxmlformats.org/drawingml/2006/compatibility" xmlns:p14="http://schemas.microsoft.com/office/powerpoint/2010/main" xmlns:p15="http://schemas.microsoft.com/office/powerpoint/2012/main" xmlns:ahyp="http://schemas.microsoft.com/office/drawing/2018/hyperlinkcolor">
+<p:sld xmlns:a="http://schemas.openxmlformats.org/drawingml/2006/main" xmlns:r="http://schemas.openxmlformats.org/officeDocument/2006/relationships" xmlns:p="http://schemas.openxmlformats.org/presentationml/2006/main">
   <p:cSld>
     <p:bg>
       <p:bgPr>
@@ -9888,11 +10279,12 @@
             <a:fillRect/>
           </a:stretch>
         </a:blipFill>
+        <a:effectLst/>
       </p:bgPr>
     </p:bg>
     <p:spTree>
       <p:nvGrpSpPr>
-        <p:cNvPr id="65" name="Shape 65"/>
+        <p:cNvPr id="1" name="Shape 65"/>
         <p:cNvGrpSpPr/>
         <p:nvPr/>
       </p:nvGrpSpPr>
@@ -9924,12 +10316,12 @@
           </a:ln>
         </p:spPr>
         <p:txBody>
-          <a:bodyPr anchorCtr="0" anchor="t" bIns="91425" lIns="91425" spcFirstLastPara="1" rIns="91425" wrap="square" tIns="91425">
+          <a:bodyPr spcFirstLastPara="1" wrap="square" lIns="91425" tIns="91425" rIns="91425" bIns="91425" anchor="t" anchorCtr="0">
             <a:normAutofit/>
           </a:bodyPr>
           <a:lstStyle/>
           <a:p>
-            <a:pPr indent="0" lvl="0" marL="0" rtl="0" algn="l">
+            <a:pPr marL="0" lvl="0" indent="0" algn="l" rtl="0">
               <a:spcBef>
                 <a:spcPts val="0"/>
               </a:spcBef>
@@ -9982,12 +10374,12 @@
           </a:ln>
         </p:spPr>
         <p:txBody>
-          <a:bodyPr anchorCtr="0" anchor="t" bIns="91425" lIns="91425" spcFirstLastPara="1" rIns="91425" wrap="square" tIns="91425">
+          <a:bodyPr spcFirstLastPara="1" wrap="square" lIns="91425" tIns="91425" rIns="91425" bIns="91425" anchor="t" anchorCtr="0">
             <a:normAutofit/>
           </a:bodyPr>
           <a:lstStyle/>
           <a:p>
-            <a:pPr indent="0" lvl="0" marL="0" rtl="0" algn="l">
+            <a:pPr marL="0" lvl="0" indent="0" algn="l" rtl="0">
               <a:spcBef>
                 <a:spcPts val="0"/>
               </a:spcBef>
@@ -10040,12 +10432,12 @@
           </a:ln>
         </p:spPr>
         <p:txBody>
-          <a:bodyPr anchorCtr="0" anchor="t" bIns="91425" lIns="91425" spcFirstLastPara="1" rIns="91425" wrap="square" tIns="91425">
+          <a:bodyPr spcFirstLastPara="1" wrap="square" lIns="91425" tIns="91425" rIns="91425" bIns="91425" anchor="t" anchorCtr="0">
             <a:normAutofit/>
           </a:bodyPr>
           <a:lstStyle/>
           <a:p>
-            <a:pPr indent="0" lvl="0" marL="0" rtl="0" algn="l">
+            <a:pPr marL="0" lvl="0" indent="0" algn="l" rtl="0">
               <a:spcBef>
                 <a:spcPts val="0"/>
               </a:spcBef>
@@ -10098,12 +10490,12 @@
           </a:ln>
         </p:spPr>
         <p:txBody>
-          <a:bodyPr anchorCtr="0" anchor="t" bIns="91425" lIns="91425" spcFirstLastPara="1" rIns="91425" wrap="square" tIns="91425">
+          <a:bodyPr spcFirstLastPara="1" wrap="square" lIns="91425" tIns="91425" rIns="91425" bIns="91425" anchor="t" anchorCtr="0">
             <a:normAutofit/>
           </a:bodyPr>
           <a:lstStyle/>
           <a:p>
-            <a:pPr indent="0" lvl="0" marL="0" rtl="0" algn="l">
+            <a:pPr marL="0" lvl="0" indent="0" algn="l" rtl="0">
               <a:spcBef>
                 <a:spcPts val="0"/>
               </a:spcBef>
@@ -10156,12 +10548,12 @@
           </a:ln>
         </p:spPr>
         <p:txBody>
-          <a:bodyPr anchorCtr="0" anchor="t" bIns="91425" lIns="91425" spcFirstLastPara="1" rIns="91425" wrap="square" tIns="91425">
+          <a:bodyPr spcFirstLastPara="1" wrap="square" lIns="91425" tIns="91425" rIns="91425" bIns="91425" anchor="t" anchorCtr="0">
             <a:normAutofit/>
           </a:bodyPr>
           <a:lstStyle/>
           <a:p>
-            <a:pPr indent="0" lvl="0" marL="0" rtl="0" algn="l">
+            <a:pPr marL="0" lvl="0" indent="0" algn="l" rtl="0">
               <a:spcBef>
                 <a:spcPts val="0"/>
               </a:spcBef>
@@ -10214,12 +10606,12 @@
           </a:ln>
         </p:spPr>
         <p:txBody>
-          <a:bodyPr anchorCtr="0" anchor="t" bIns="91425" lIns="91425" spcFirstLastPara="1" rIns="91425" wrap="square" tIns="91425">
+          <a:bodyPr spcFirstLastPara="1" wrap="square" lIns="91425" tIns="91425" rIns="91425" bIns="91425" anchor="t" anchorCtr="0">
             <a:normAutofit/>
           </a:bodyPr>
           <a:lstStyle/>
           <a:p>
-            <a:pPr indent="0" lvl="0" marL="0" rtl="0" algn="l">
+            <a:pPr marL="0" lvl="0" indent="0" algn="l" rtl="0">
               <a:spcBef>
                 <a:spcPts val="0"/>
               </a:spcBef>
@@ -10272,12 +10664,12 @@
           </a:ln>
         </p:spPr>
         <p:txBody>
-          <a:bodyPr anchorCtr="0" anchor="t" bIns="91425" lIns="91425" spcFirstLastPara="1" rIns="91425" wrap="square" tIns="91425">
+          <a:bodyPr spcFirstLastPara="1" wrap="square" lIns="91425" tIns="91425" rIns="91425" bIns="91425" anchor="t" anchorCtr="0">
             <a:normAutofit/>
           </a:bodyPr>
           <a:lstStyle/>
           <a:p>
-            <a:pPr indent="0" lvl="0" marL="0" rtl="0" algn="l">
+            <a:pPr marL="0" lvl="0" indent="0" algn="l" rtl="0">
               <a:spcBef>
                 <a:spcPts val="0"/>
               </a:spcBef>
@@ -10319,7 +10711,7 @@
 </file>
 
 <file path=ppt/slides/slide5.xml><?xml version="1.0" encoding="utf-8"?>
-<p:sld xmlns:a="http://schemas.openxmlformats.org/drawingml/2006/main" xmlns:r="http://schemas.openxmlformats.org/officeDocument/2006/relationships" xmlns:mc="http://schemas.openxmlformats.org/markup-compatibility/2006" xmlns:mv="urn:schemas-microsoft-com:mac:vml" xmlns:p="http://schemas.openxmlformats.org/presentationml/2006/main" xmlns:c="http://schemas.openxmlformats.org/drawingml/2006/chart" xmlns:dgm="http://schemas.openxmlformats.org/drawingml/2006/diagram" xmlns:o="urn:schemas-microsoft-com:office:office" xmlns:v="urn:schemas-microsoft-com:vml" xmlns:pvml="urn:schemas-microsoft-com:office:powerpoint" xmlns:com="http://schemas.openxmlformats.org/drawingml/2006/compatibility" xmlns:p14="http://schemas.microsoft.com/office/powerpoint/2010/main" xmlns:p15="http://schemas.microsoft.com/office/powerpoint/2012/main" xmlns:ahyp="http://schemas.microsoft.com/office/drawing/2018/hyperlinkcolor">
+<p:sld xmlns:a="http://schemas.openxmlformats.org/drawingml/2006/main" xmlns:r="http://schemas.openxmlformats.org/officeDocument/2006/relationships" xmlns:p="http://schemas.openxmlformats.org/presentationml/2006/main">
   <p:cSld>
     <p:bg>
       <p:bgPr>
@@ -10331,11 +10723,12 @@
             <a:fillRect/>
           </a:stretch>
         </a:blipFill>
+        <a:effectLst/>
       </p:bgPr>
     </p:bg>
     <p:spTree>
       <p:nvGrpSpPr>
-        <p:cNvPr id="76" name="Shape 76"/>
+        <p:cNvPr id="1" name="Shape 76"/>
         <p:cNvGrpSpPr/>
         <p:nvPr/>
       </p:nvGrpSpPr>
@@ -10367,12 +10760,12 @@
           </a:ln>
         </p:spPr>
         <p:txBody>
-          <a:bodyPr anchorCtr="0" anchor="t" bIns="91425" lIns="91425" spcFirstLastPara="1" rIns="91425" wrap="square" tIns="91425">
+          <a:bodyPr spcFirstLastPara="1" wrap="square" lIns="91425" tIns="91425" rIns="91425" bIns="91425" anchor="t" anchorCtr="0">
             <a:normAutofit/>
           </a:bodyPr>
           <a:lstStyle/>
           <a:p>
-            <a:pPr indent="0" lvl="0" marL="0" rtl="0" algn="l">
+            <a:pPr marL="0" lvl="0" indent="0" algn="l" rtl="0">
               <a:spcBef>
                 <a:spcPts val="0"/>
               </a:spcBef>
@@ -10425,12 +10818,12 @@
           </a:ln>
         </p:spPr>
         <p:txBody>
-          <a:bodyPr anchorCtr="0" anchor="t" bIns="91425" lIns="91425" spcFirstLastPara="1" rIns="91425" wrap="square" tIns="91425">
+          <a:bodyPr spcFirstLastPara="1" wrap="square" lIns="91425" tIns="91425" rIns="91425" bIns="91425" anchor="t" anchorCtr="0">
             <a:normAutofit/>
           </a:bodyPr>
           <a:lstStyle/>
           <a:p>
-            <a:pPr indent="0" lvl="0" marL="0" rtl="0" algn="l">
+            <a:pPr marL="0" lvl="0" indent="0" algn="l" rtl="0">
               <a:spcBef>
                 <a:spcPts val="0"/>
               </a:spcBef>
@@ -10483,12 +10876,12 @@
           </a:ln>
         </p:spPr>
         <p:txBody>
-          <a:bodyPr anchorCtr="0" anchor="t" bIns="91425" lIns="91425" spcFirstLastPara="1" rIns="91425" wrap="square" tIns="91425">
+          <a:bodyPr spcFirstLastPara="1" wrap="square" lIns="91425" tIns="91425" rIns="91425" bIns="91425" anchor="t" anchorCtr="0">
             <a:normAutofit/>
           </a:bodyPr>
           <a:lstStyle/>
           <a:p>
-            <a:pPr indent="0" lvl="0" marL="0" rtl="0" algn="l">
+            <a:pPr marL="0" lvl="0" indent="0" algn="l" rtl="0">
               <a:spcBef>
                 <a:spcPts val="0"/>
               </a:spcBef>
@@ -10530,7 +10923,7 @@
 </file>
 
 <file path=ppt/slides/slide6.xml><?xml version="1.0" encoding="utf-8"?>
-<p:sld xmlns:a="http://schemas.openxmlformats.org/drawingml/2006/main" xmlns:r="http://schemas.openxmlformats.org/officeDocument/2006/relationships" xmlns:mc="http://schemas.openxmlformats.org/markup-compatibility/2006" xmlns:mv="urn:schemas-microsoft-com:mac:vml" xmlns:p="http://schemas.openxmlformats.org/presentationml/2006/main" xmlns:c="http://schemas.openxmlformats.org/drawingml/2006/chart" xmlns:dgm="http://schemas.openxmlformats.org/drawingml/2006/diagram" xmlns:o="urn:schemas-microsoft-com:office:office" xmlns:v="urn:schemas-microsoft-com:vml" xmlns:pvml="urn:schemas-microsoft-com:office:powerpoint" xmlns:com="http://schemas.openxmlformats.org/drawingml/2006/compatibility" xmlns:p14="http://schemas.microsoft.com/office/powerpoint/2010/main" xmlns:p15="http://schemas.microsoft.com/office/powerpoint/2012/main" xmlns:ahyp="http://schemas.microsoft.com/office/drawing/2018/hyperlinkcolor">
+<p:sld xmlns:a="http://schemas.openxmlformats.org/drawingml/2006/main" xmlns:r="http://schemas.openxmlformats.org/officeDocument/2006/relationships" xmlns:p="http://schemas.openxmlformats.org/presentationml/2006/main">
   <p:cSld>
     <p:bg>
       <p:bgPr>
@@ -10542,11 +10935,12 @@
             <a:fillRect/>
           </a:stretch>
         </a:blipFill>
+        <a:effectLst/>
       </p:bgPr>
     </p:bg>
     <p:spTree>
       <p:nvGrpSpPr>
-        <p:cNvPr id="83" name="Shape 83"/>
+        <p:cNvPr id="1" name="Shape 83"/>
         <p:cNvGrpSpPr/>
         <p:nvPr/>
       </p:nvGrpSpPr>
@@ -10558,6 +10952,36 @@
           <a:chExt cx="0" cy="0"/>
         </a:xfrm>
       </p:grpSpPr>
+      <p:pic>
+        <p:nvPicPr>
+          <p:cNvPr id="3" name="Picture 2">
+            <a:extLst>
+              <a:ext uri="{FF2B5EF4-FFF2-40B4-BE49-F238E27FC236}">
+                <a16:creationId xmlns:a16="http://schemas.microsoft.com/office/drawing/2014/main" id="{0ED43794-7CF7-6F77-7D9E-54D01A46CC38}"/>
+              </a:ext>
+            </a:extLst>
+          </p:cNvPr>
+          <p:cNvPicPr>
+            <a:picLocks noChangeAspect="1"/>
+          </p:cNvPicPr>
+          <p:nvPr/>
+        </p:nvPicPr>
+        <p:blipFill>
+          <a:blip r:embed="rId4"/>
+          <a:stretch>
+            <a:fillRect/>
+          </a:stretch>
+        </p:blipFill>
+        <p:spPr>
+          <a:xfrm>
+            <a:off x="6707903" y="144816"/>
+            <a:ext cx="2263537" cy="488784"/>
+          </a:xfrm>
+          <a:prstGeom prst="rect">
+            <a:avLst/>
+          </a:prstGeom>
+        </p:spPr>
+      </p:pic>
     </p:spTree>
   </p:cSld>
   <p:clrMapOvr>
@@ -10567,7 +10991,7 @@
 </file>
 
 <file path=ppt/slides/slide7.xml><?xml version="1.0" encoding="utf-8"?>
-<p:sld xmlns:a="http://schemas.openxmlformats.org/drawingml/2006/main" xmlns:r="http://schemas.openxmlformats.org/officeDocument/2006/relationships" xmlns:mc="http://schemas.openxmlformats.org/markup-compatibility/2006" xmlns:mv="urn:schemas-microsoft-com:mac:vml" xmlns:p="http://schemas.openxmlformats.org/presentationml/2006/main" xmlns:c="http://schemas.openxmlformats.org/drawingml/2006/chart" xmlns:dgm="http://schemas.openxmlformats.org/drawingml/2006/diagram" xmlns:o="urn:schemas-microsoft-com:office:office" xmlns:v="urn:schemas-microsoft-com:vml" xmlns:pvml="urn:schemas-microsoft-com:office:powerpoint" xmlns:com="http://schemas.openxmlformats.org/drawingml/2006/compatibility" xmlns:p14="http://schemas.microsoft.com/office/powerpoint/2010/main" xmlns:p15="http://schemas.microsoft.com/office/powerpoint/2012/main" xmlns:ahyp="http://schemas.microsoft.com/office/drawing/2018/hyperlinkcolor">
+<p:sld xmlns:a="http://schemas.openxmlformats.org/drawingml/2006/main" xmlns:r="http://schemas.openxmlformats.org/officeDocument/2006/relationships" xmlns:p="http://schemas.openxmlformats.org/presentationml/2006/main">
   <p:cSld>
     <p:bg>
       <p:bgPr>
@@ -10579,11 +11003,12 @@
             <a:fillRect/>
           </a:stretch>
         </a:blipFill>
+        <a:effectLst/>
       </p:bgPr>
     </p:bg>
     <p:spTree>
       <p:nvGrpSpPr>
-        <p:cNvPr id="87" name="Shape 87"/>
+        <p:cNvPr id="1" name="Shape 87"/>
         <p:cNvGrpSpPr/>
         <p:nvPr/>
       </p:nvGrpSpPr>
@@ -10604,7 +11029,7 @@
 </file>
 
 <file path=ppt/slides/slide8.xml><?xml version="1.0" encoding="utf-8"?>
-<p:sld xmlns:a="http://schemas.openxmlformats.org/drawingml/2006/main" xmlns:r="http://schemas.openxmlformats.org/officeDocument/2006/relationships" xmlns:mc="http://schemas.openxmlformats.org/markup-compatibility/2006" xmlns:mv="urn:schemas-microsoft-com:mac:vml" xmlns:p="http://schemas.openxmlformats.org/presentationml/2006/main" xmlns:c="http://schemas.openxmlformats.org/drawingml/2006/chart" xmlns:dgm="http://schemas.openxmlformats.org/drawingml/2006/diagram" xmlns:o="urn:schemas-microsoft-com:office:office" xmlns:v="urn:schemas-microsoft-com:vml" xmlns:pvml="urn:schemas-microsoft-com:office:powerpoint" xmlns:com="http://schemas.openxmlformats.org/drawingml/2006/compatibility" xmlns:p14="http://schemas.microsoft.com/office/powerpoint/2010/main" xmlns:p15="http://schemas.microsoft.com/office/powerpoint/2012/main" xmlns:ahyp="http://schemas.microsoft.com/office/drawing/2018/hyperlinkcolor">
+<p:sld xmlns:a="http://schemas.openxmlformats.org/drawingml/2006/main" xmlns:r="http://schemas.openxmlformats.org/officeDocument/2006/relationships" xmlns:p="http://schemas.openxmlformats.org/presentationml/2006/main">
   <p:cSld>
     <p:bg>
       <p:bgPr>
@@ -10616,11 +11041,12 @@
             <a:fillRect/>
           </a:stretch>
         </a:blipFill>
+        <a:effectLst/>
       </p:bgPr>
     </p:bg>
     <p:spTree>
       <p:nvGrpSpPr>
-        <p:cNvPr id="91" name="Shape 91"/>
+        <p:cNvPr id="1" name="Shape 91"/>
         <p:cNvGrpSpPr/>
         <p:nvPr/>
       </p:nvGrpSpPr>
@@ -10652,12 +11078,12 @@
           </a:ln>
         </p:spPr>
         <p:txBody>
-          <a:bodyPr anchorCtr="0" anchor="t" bIns="91425" lIns="91425" spcFirstLastPara="1" rIns="91425" wrap="square" tIns="91425">
+          <a:bodyPr spcFirstLastPara="1" wrap="square" lIns="91425" tIns="91425" rIns="91425" bIns="91425" anchor="t" anchorCtr="0">
             <a:normAutofit/>
           </a:bodyPr>
           <a:lstStyle/>
           <a:p>
-            <a:pPr indent="0" lvl="0" marL="0" rtl="0" algn="l">
+            <a:pPr marL="0" lvl="0" indent="0" algn="l" rtl="0">
               <a:spcBef>
                 <a:spcPts val="0"/>
               </a:spcBef>
@@ -10710,12 +11136,12 @@
           </a:ln>
         </p:spPr>
         <p:txBody>
-          <a:bodyPr anchorCtr="0" anchor="t" bIns="91425" lIns="91425" spcFirstLastPara="1" rIns="91425" wrap="square" tIns="91425">
+          <a:bodyPr spcFirstLastPara="1" wrap="square" lIns="91425" tIns="91425" rIns="91425" bIns="91425" anchor="t" anchorCtr="0">
             <a:normAutofit/>
           </a:bodyPr>
           <a:lstStyle/>
           <a:p>
-            <a:pPr indent="0" lvl="0" marL="0" rtl="0" algn="l">
+            <a:pPr marL="0" lvl="0" indent="0" algn="l" rtl="0">
               <a:spcBef>
                 <a:spcPts val="0"/>
               </a:spcBef>
@@ -10768,12 +11194,12 @@
           </a:ln>
         </p:spPr>
         <p:txBody>
-          <a:bodyPr anchorCtr="0" anchor="t" bIns="91425" lIns="91425" spcFirstLastPara="1" rIns="91425" wrap="square" tIns="91425">
+          <a:bodyPr spcFirstLastPara="1" wrap="square" lIns="91425" tIns="91425" rIns="91425" bIns="91425" anchor="t" anchorCtr="0">
             <a:normAutofit/>
           </a:bodyPr>
           <a:lstStyle/>
           <a:p>
-            <a:pPr indent="0" lvl="0" marL="0" rtl="0" algn="l">
+            <a:pPr marL="0" lvl="0" indent="0" algn="l" rtl="0">
               <a:spcBef>
                 <a:spcPts val="0"/>
               </a:spcBef>
@@ -10826,12 +11252,12 @@
           </a:ln>
         </p:spPr>
         <p:txBody>
-          <a:bodyPr anchorCtr="0" anchor="t" bIns="91425" lIns="91425" spcFirstLastPara="1" rIns="91425" wrap="square" tIns="91425">
+          <a:bodyPr spcFirstLastPara="1" wrap="square" lIns="91425" tIns="91425" rIns="91425" bIns="91425" anchor="t" anchorCtr="0">
             <a:normAutofit/>
           </a:bodyPr>
           <a:lstStyle/>
           <a:p>
-            <a:pPr indent="0" lvl="0" marL="0" rtl="0" algn="l">
+            <a:pPr marL="0" lvl="0" indent="0" algn="l" rtl="0">
               <a:spcBef>
                 <a:spcPts val="0"/>
               </a:spcBef>
@@ -10884,12 +11310,12 @@
           </a:ln>
         </p:spPr>
         <p:txBody>
-          <a:bodyPr anchorCtr="0" anchor="t" bIns="91425" lIns="91425" spcFirstLastPara="1" rIns="91425" wrap="square" tIns="91425">
+          <a:bodyPr spcFirstLastPara="1" wrap="square" lIns="91425" tIns="91425" rIns="91425" bIns="91425" anchor="t" anchorCtr="0">
             <a:normAutofit/>
           </a:bodyPr>
           <a:lstStyle/>
           <a:p>
-            <a:pPr indent="0" lvl="0" marL="0" rtl="0" algn="l">
+            <a:pPr marL="0" lvl="0" indent="0" algn="l" rtl="0">
               <a:spcBef>
                 <a:spcPts val="0"/>
               </a:spcBef>
@@ -10942,12 +11368,12 @@
           </a:ln>
         </p:spPr>
         <p:txBody>
-          <a:bodyPr anchorCtr="0" anchor="t" bIns="91425" lIns="91425" spcFirstLastPara="1" rIns="91425" wrap="square" tIns="91425">
+          <a:bodyPr spcFirstLastPara="1" wrap="square" lIns="91425" tIns="91425" rIns="91425" bIns="91425" anchor="t" anchorCtr="0">
             <a:normAutofit/>
           </a:bodyPr>
           <a:lstStyle/>
           <a:p>
-            <a:pPr indent="0" lvl="0" marL="0" rtl="0" algn="l">
+            <a:pPr marL="0" lvl="0" indent="0" algn="l" rtl="0">
               <a:spcBef>
                 <a:spcPts val="0"/>
               </a:spcBef>
@@ -11000,12 +11426,12 @@
           </a:ln>
         </p:spPr>
         <p:txBody>
-          <a:bodyPr anchorCtr="0" anchor="t" bIns="91425" lIns="91425" spcFirstLastPara="1" rIns="91425" wrap="square" tIns="91425">
+          <a:bodyPr spcFirstLastPara="1" wrap="square" lIns="91425" tIns="91425" rIns="91425" bIns="91425" anchor="t" anchorCtr="0">
             <a:normAutofit/>
           </a:bodyPr>
           <a:lstStyle/>
           <a:p>
-            <a:pPr indent="0" lvl="0" marL="0" rtl="0" algn="l">
+            <a:pPr marL="0" lvl="0" indent="0" algn="l" rtl="0">
               <a:spcBef>
                 <a:spcPts val="0"/>
               </a:spcBef>
@@ -11047,7 +11473,7 @@
 </file>
 
 <file path=ppt/slides/slide9.xml><?xml version="1.0" encoding="utf-8"?>
-<p:sld xmlns:a="http://schemas.openxmlformats.org/drawingml/2006/main" xmlns:r="http://schemas.openxmlformats.org/officeDocument/2006/relationships" xmlns:mc="http://schemas.openxmlformats.org/markup-compatibility/2006" xmlns:mv="urn:schemas-microsoft-com:mac:vml" xmlns:p="http://schemas.openxmlformats.org/presentationml/2006/main" xmlns:c="http://schemas.openxmlformats.org/drawingml/2006/chart" xmlns:dgm="http://schemas.openxmlformats.org/drawingml/2006/diagram" xmlns:o="urn:schemas-microsoft-com:office:office" xmlns:v="urn:schemas-microsoft-com:vml" xmlns:pvml="urn:schemas-microsoft-com:office:powerpoint" xmlns:com="http://schemas.openxmlformats.org/drawingml/2006/compatibility" xmlns:p14="http://schemas.microsoft.com/office/powerpoint/2010/main" xmlns:p15="http://schemas.microsoft.com/office/powerpoint/2012/main" xmlns:ahyp="http://schemas.microsoft.com/office/drawing/2018/hyperlinkcolor">
+<p:sld xmlns:a="http://schemas.openxmlformats.org/drawingml/2006/main" xmlns:r="http://schemas.openxmlformats.org/officeDocument/2006/relationships" xmlns:p="http://schemas.openxmlformats.org/presentationml/2006/main">
   <p:cSld>
     <p:bg>
       <p:bgPr>
@@ -11059,11 +11485,12 @@
             <a:fillRect/>
           </a:stretch>
         </a:blipFill>
+        <a:effectLst/>
       </p:bgPr>
     </p:bg>
     <p:spTree>
       <p:nvGrpSpPr>
-        <p:cNvPr id="102" name="Shape 102"/>
+        <p:cNvPr id="1" name="Shape 102"/>
         <p:cNvGrpSpPr/>
         <p:nvPr/>
       </p:nvGrpSpPr>
@@ -11095,12 +11522,12 @@
           </a:ln>
         </p:spPr>
         <p:txBody>
-          <a:bodyPr anchorCtr="0" anchor="t" bIns="91425" lIns="91425" spcFirstLastPara="1" rIns="91425" wrap="square" tIns="91425">
+          <a:bodyPr spcFirstLastPara="1" wrap="square" lIns="91425" tIns="91425" rIns="91425" bIns="91425" anchor="t" anchorCtr="0">
             <a:normAutofit/>
           </a:bodyPr>
           <a:lstStyle/>
           <a:p>
-            <a:pPr indent="0" lvl="0" marL="0" rtl="0" algn="l">
+            <a:pPr marL="0" lvl="0" indent="0" algn="l" rtl="0">
               <a:spcBef>
                 <a:spcPts val="0"/>
               </a:spcBef>
@@ -11153,12 +11580,12 @@
           </a:ln>
         </p:spPr>
         <p:txBody>
-          <a:bodyPr anchorCtr="0" anchor="t" bIns="91425" lIns="91425" spcFirstLastPara="1" rIns="91425" wrap="square" tIns="91425">
+          <a:bodyPr spcFirstLastPara="1" wrap="square" lIns="91425" tIns="91425" rIns="91425" bIns="91425" anchor="t" anchorCtr="0">
             <a:normAutofit/>
           </a:bodyPr>
           <a:lstStyle/>
           <a:p>
-            <a:pPr indent="0" lvl="0" marL="0" rtl="0" algn="l">
+            <a:pPr marL="0" lvl="0" indent="0" algn="l" rtl="0">
               <a:spcBef>
                 <a:spcPts val="0"/>
               </a:spcBef>
@@ -11211,12 +11638,12 @@
           </a:ln>
         </p:spPr>
         <p:txBody>
-          <a:bodyPr anchorCtr="0" anchor="t" bIns="91425" lIns="91425" spcFirstLastPara="1" rIns="91425" wrap="square" tIns="91425">
+          <a:bodyPr spcFirstLastPara="1" wrap="square" lIns="91425" tIns="91425" rIns="91425" bIns="91425" anchor="t" anchorCtr="0">
             <a:normAutofit/>
           </a:bodyPr>
           <a:lstStyle/>
           <a:p>
-            <a:pPr indent="0" lvl="0" marL="0" rtl="0" algn="l">
+            <a:pPr marL="0" lvl="0" indent="0" algn="l" rtl="0">
               <a:spcBef>
                 <a:spcPts val="0"/>
               </a:spcBef>
@@ -11258,7 +11685,7 @@
 </file>
 
 <file path=ppt/theme/theme1.xml><?xml version="1.0" encoding="utf-8"?>
-<a:theme xmlns:a="http://schemas.openxmlformats.org/drawingml/2006/main" xmlns:r="http://schemas.openxmlformats.org/officeDocument/2006/relationships" name="Simple Light">
+<a:theme xmlns:a="http://schemas.openxmlformats.org/drawingml/2006/main" name="Simple Light">
   <a:themeElements>
     <a:clrScheme name="Simple Light">
       <a:dk1>
@@ -11533,11 +11960,13 @@
       </a:bgFillStyleLst>
     </a:fmtScheme>
   </a:themeElements>
+  <a:objectDefaults/>
+  <a:extraClrSchemeLst/>
 </a:theme>
 </file>
 
 <file path=ppt/theme/theme2.xml><?xml version="1.0" encoding="utf-8"?>
-<a:theme xmlns:a="http://schemas.openxmlformats.org/drawingml/2006/main" xmlns:r="http://schemas.openxmlformats.org/officeDocument/2006/relationships">
+<a:theme xmlns:a="http://schemas.openxmlformats.org/drawingml/2006/main">
   <a:themeElements>
     <a:clrScheme name="Default">
       <a:dk1>
@@ -11812,5 +12241,7 @@
       </a:bgFillStyleLst>
     </a:fmtScheme>
   </a:themeElements>
+  <a:objectDefaults/>
+  <a:extraClrSchemeLst/>
 </a:theme>
 </file>